--- a/Presentation/SIH-Presentation-GramIntel.pptx
+++ b/Presentation/SIH-Presentation-GramIntel.pptx
@@ -1,28 +1,200 @@
 
 <file path=ppt/presentation.xml><?xml version="1.0" encoding="utf-8"?>
-<p:presentation xmlns:a="http://schemas.openxmlformats.org/drawingml/2006/main" xmlns:p="http://schemas.openxmlformats.org/presentationml/2006/main" xmlns:r="http://schemas.openxmlformats.org/officeDocument/2006/relationships" xmlns:p14="http://schemas.microsoft.com/office/powerpoint/2010/main" xmlns:p15="http://schemas.microsoft.com/office/powerpoint/2012/main" xmlns:mc="http://schemas.openxmlformats.org/markup-compatibility/2006">
+<p:presentation xmlns:a="http://schemas.openxmlformats.org/drawingml/2006/main" xmlns:r="http://schemas.openxmlformats.org/officeDocument/2006/relationships" xmlns:p="http://schemas.openxmlformats.org/presentationml/2006/main">
   <p:sldMasterIdLst>
-    <p:sldMasterId id="2147483648" r:id="rId2"/>
+    <p:sldMasterId id="2147483648" r:id="rId1"/>
   </p:sldMasterIdLst>
   <p:notesMasterIdLst>
-    <p:notesMasterId r:id="rId3"/>
+    <p:notesMasterId r:id="rId8"/>
   </p:notesMasterIdLst>
   <p:sldIdLst>
-    <p:sldId id="256" r:id="rId4"/>
-    <p:sldId id="257" r:id="rId5"/>
-    <p:sldId id="258" r:id="rId6"/>
-    <p:sldId id="259" r:id="rId7"/>
-    <p:sldId id="260" r:id="rId8"/>
-    <p:sldId id="261" r:id="rId9"/>
+    <p:sldId id="256" r:id="rId2"/>
+    <p:sldId id="257" r:id="rId3"/>
+    <p:sldId id="258" r:id="rId4"/>
+    <p:sldId id="259" r:id="rId5"/>
+    <p:sldId id="260" r:id="rId6"/>
+    <p:sldId id="261" r:id="rId7"/>
   </p:sldIdLst>
   <p:sldSz cx="12192000" cy="6858000"/>
   <p:notesSz cx="7772400" cy="10058400"/>
+  <p:defaultTextStyle>
+    <a:defPPr>
+      <a:defRPr lang="en-US"/>
+    </a:defPPr>
+    <a:lvl1pPr marL="0" algn="l" defTabSz="914400" rtl="0" eaLnBrk="1" latinLnBrk="0" hangingPunct="1">
+      <a:defRPr sz="1800" kern="1200">
+        <a:solidFill>
+          <a:schemeClr val="tx1"/>
+        </a:solidFill>
+        <a:latin typeface="+mn-lt"/>
+        <a:ea typeface="+mn-ea"/>
+        <a:cs typeface="+mn-cs"/>
+      </a:defRPr>
+    </a:lvl1pPr>
+    <a:lvl2pPr marL="457200" algn="l" defTabSz="914400" rtl="0" eaLnBrk="1" latinLnBrk="0" hangingPunct="1">
+      <a:defRPr sz="1800" kern="1200">
+        <a:solidFill>
+          <a:schemeClr val="tx1"/>
+        </a:solidFill>
+        <a:latin typeface="+mn-lt"/>
+        <a:ea typeface="+mn-ea"/>
+        <a:cs typeface="+mn-cs"/>
+      </a:defRPr>
+    </a:lvl2pPr>
+    <a:lvl3pPr marL="914400" algn="l" defTabSz="914400" rtl="0" eaLnBrk="1" latinLnBrk="0" hangingPunct="1">
+      <a:defRPr sz="1800" kern="1200">
+        <a:solidFill>
+          <a:schemeClr val="tx1"/>
+        </a:solidFill>
+        <a:latin typeface="+mn-lt"/>
+        <a:ea typeface="+mn-ea"/>
+        <a:cs typeface="+mn-cs"/>
+      </a:defRPr>
+    </a:lvl3pPr>
+    <a:lvl4pPr marL="1371600" algn="l" defTabSz="914400" rtl="0" eaLnBrk="1" latinLnBrk="0" hangingPunct="1">
+      <a:defRPr sz="1800" kern="1200">
+        <a:solidFill>
+          <a:schemeClr val="tx1"/>
+        </a:solidFill>
+        <a:latin typeface="+mn-lt"/>
+        <a:ea typeface="+mn-ea"/>
+        <a:cs typeface="+mn-cs"/>
+      </a:defRPr>
+    </a:lvl4pPr>
+    <a:lvl5pPr marL="1828800" algn="l" defTabSz="914400" rtl="0" eaLnBrk="1" latinLnBrk="0" hangingPunct="1">
+      <a:defRPr sz="1800" kern="1200">
+        <a:solidFill>
+          <a:schemeClr val="tx1"/>
+        </a:solidFill>
+        <a:latin typeface="+mn-lt"/>
+        <a:ea typeface="+mn-ea"/>
+        <a:cs typeface="+mn-cs"/>
+      </a:defRPr>
+    </a:lvl5pPr>
+    <a:lvl6pPr marL="2286000" algn="l" defTabSz="914400" rtl="0" eaLnBrk="1" latinLnBrk="0" hangingPunct="1">
+      <a:defRPr sz="1800" kern="1200">
+        <a:solidFill>
+          <a:schemeClr val="tx1"/>
+        </a:solidFill>
+        <a:latin typeface="+mn-lt"/>
+        <a:ea typeface="+mn-ea"/>
+        <a:cs typeface="+mn-cs"/>
+      </a:defRPr>
+    </a:lvl6pPr>
+    <a:lvl7pPr marL="2743200" algn="l" defTabSz="914400" rtl="0" eaLnBrk="1" latinLnBrk="0" hangingPunct="1">
+      <a:defRPr sz="1800" kern="1200">
+        <a:solidFill>
+          <a:schemeClr val="tx1"/>
+        </a:solidFill>
+        <a:latin typeface="+mn-lt"/>
+        <a:ea typeface="+mn-ea"/>
+        <a:cs typeface="+mn-cs"/>
+      </a:defRPr>
+    </a:lvl7pPr>
+    <a:lvl8pPr marL="3200400" algn="l" defTabSz="914400" rtl="0" eaLnBrk="1" latinLnBrk="0" hangingPunct="1">
+      <a:defRPr sz="1800" kern="1200">
+        <a:solidFill>
+          <a:schemeClr val="tx1"/>
+        </a:solidFill>
+        <a:latin typeface="+mn-lt"/>
+        <a:ea typeface="+mn-ea"/>
+        <a:cs typeface="+mn-cs"/>
+      </a:defRPr>
+    </a:lvl8pPr>
+    <a:lvl9pPr marL="3657600" algn="l" defTabSz="914400" rtl="0" eaLnBrk="1" latinLnBrk="0" hangingPunct="1">
+      <a:defRPr sz="1800" kern="1200">
+        <a:solidFill>
+          <a:schemeClr val="tx1"/>
+        </a:solidFill>
+        <a:latin typeface="+mn-lt"/>
+        <a:ea typeface="+mn-ea"/>
+        <a:cs typeface="+mn-cs"/>
+      </a:defRPr>
+    </a:lvl9pPr>
+  </p:defaultTextStyle>
+  <p:extLst>
+    <p:ext uri="{EFAFB233-063F-42B5-8137-9DF3F51BA10A}">
+      <p15:sldGuideLst xmlns:p15="http://schemas.microsoft.com/office/powerpoint/2012/main"/>
+    </p:ext>
+  </p:extLst>
 </p:presentation>
 </file>
 
+<file path=ppt/revisionInfo.xml><?xml version="1.0" encoding="utf-8"?>
+<p1510:revInfo xmlns:a="http://schemas.openxmlformats.org/drawingml/2006/main" xmlns:r="http://schemas.openxmlformats.org/officeDocument/2006/relationships" xmlns:p1510="http://schemas.microsoft.com/office/powerpoint/2015/10/main">
+  <p1510:revLst>
+    <p1510:client id="{3CB985A9-DF4C-461C-995C-B6C25D2D4FF6}" v="2" dt="2026-09-11T15:25:19.795"/>
+  </p1510:revLst>
+</p1510:revInfo>
+</file>
+
+<file path=ppt/changesInfos/changesInfo1.xml><?xml version="1.0" encoding="utf-8"?>
+<pc:chgInfo xmlns:a="http://schemas.openxmlformats.org/drawingml/2006/main" xmlns:r="http://schemas.openxmlformats.org/officeDocument/2006/relationships" xmlns:ac="http://schemas.microsoft.com/office/drawing/2013/main/command" xmlns:pc="http://schemas.microsoft.com/office/powerpoint/2013/main/command">
+  <pc:docChgLst>
+    <pc:chgData name="yudheesh chandra chowdary chunduri" userId="568cacb26267c967" providerId="LiveId" clId="{81D9DF75-E425-4535-A4D6-68E9678FA894}"/>
+    <pc:docChg chg="modSld">
+      <pc:chgData name="yudheesh chandra chowdary chunduri" userId="568cacb26267c967" providerId="LiveId" clId="{81D9DF75-E425-4535-A4D6-68E9678FA894}" dt="2026-09-11T15:27:34.315" v="202" actId="20577"/>
+      <pc:docMkLst>
+        <pc:docMk/>
+      </pc:docMkLst>
+      <pc:sldChg chg="modSp mod">
+        <pc:chgData name="yudheesh chandra chowdary chunduri" userId="568cacb26267c967" providerId="LiveId" clId="{81D9DF75-E425-4535-A4D6-68E9678FA894}" dt="2026-09-11T15:23:00.752" v="7" actId="20577"/>
+        <pc:sldMkLst>
+          <pc:docMk/>
+          <pc:sldMk cId="0" sldId="256"/>
+        </pc:sldMkLst>
+        <pc:spChg chg="mod">
+          <ac:chgData name="yudheesh chandra chowdary chunduri" userId="568cacb26267c967" providerId="LiveId" clId="{81D9DF75-E425-4535-A4D6-68E9678FA894}" dt="2026-09-11T15:23:00.752" v="7" actId="20577"/>
+          <ac:spMkLst>
+            <pc:docMk/>
+            <pc:sldMk cId="0" sldId="256"/>
+            <ac:spMk id="71" creationId="{00000000-0000-0000-0000-000000000000}"/>
+          </ac:spMkLst>
+        </pc:spChg>
+      </pc:sldChg>
+      <pc:sldChg chg="modSp mod">
+        <pc:chgData name="yudheesh chandra chowdary chunduri" userId="568cacb26267c967" providerId="LiveId" clId="{81D9DF75-E425-4535-A4D6-68E9678FA894}" dt="2026-09-11T15:26:03.546" v="200" actId="20577"/>
+        <pc:sldMkLst>
+          <pc:docMk/>
+          <pc:sldMk cId="0" sldId="258"/>
+        </pc:sldMkLst>
+        <pc:spChg chg="mod">
+          <ac:chgData name="yudheesh chandra chowdary chunduri" userId="568cacb26267c967" providerId="LiveId" clId="{81D9DF75-E425-4535-A4D6-68E9678FA894}" dt="2026-09-11T15:26:03.546" v="200" actId="20577"/>
+          <ac:spMkLst>
+            <pc:docMk/>
+            <pc:sldMk cId="0" sldId="258"/>
+            <ac:spMk id="89" creationId="{00000000-0000-0000-0000-000000000000}"/>
+          </ac:spMkLst>
+        </pc:spChg>
+      </pc:sldChg>
+      <pc:sldChg chg="modSp mod">
+        <pc:chgData name="yudheesh chandra chowdary chunduri" userId="568cacb26267c967" providerId="LiveId" clId="{81D9DF75-E425-4535-A4D6-68E9678FA894}" dt="2026-09-11T15:27:34.315" v="202" actId="20577"/>
+        <pc:sldMkLst>
+          <pc:docMk/>
+          <pc:sldMk cId="0" sldId="261"/>
+        </pc:sldMkLst>
+        <pc:spChg chg="mod">
+          <ac:chgData name="yudheesh chandra chowdary chunduri" userId="568cacb26267c967" providerId="LiveId" clId="{81D9DF75-E425-4535-A4D6-68E9678FA894}" dt="2026-09-11T15:27:34.315" v="202" actId="20577"/>
+          <ac:spMkLst>
+            <pc:docMk/>
+            <pc:sldMk cId="0" sldId="261"/>
+            <ac:spMk id="123" creationId="{00000000-0000-0000-0000-000000000000}"/>
+          </ac:spMkLst>
+        </pc:spChg>
+      </pc:sldChg>
+    </pc:docChg>
+  </pc:docChgLst>
+</pc:chgInfo>
+</file>
+
 <file path=ppt/notesMasters/notesMaster1.xml><?xml version="1.0" encoding="utf-8"?>
-<p:notesMaster xmlns:a="http://schemas.openxmlformats.org/drawingml/2006/main" xmlns:p="http://schemas.openxmlformats.org/presentationml/2006/main" xmlns:r="http://schemas.openxmlformats.org/officeDocument/2006/relationships" xmlns:p14="http://schemas.microsoft.com/office/powerpoint/2010/main" xmlns:p15="http://schemas.microsoft.com/office/powerpoint/2012/main" xmlns:mc="http://schemas.openxmlformats.org/markup-compatibility/2006">
+<p:notesMaster xmlns:a="http://schemas.openxmlformats.org/drawingml/2006/main" xmlns:r="http://schemas.openxmlformats.org/officeDocument/2006/relationships" xmlns:p="http://schemas.openxmlformats.org/presentationml/2006/main">
   <p:cSld>
+    <p:bg>
+      <p:bgRef idx="1001">
+        <a:schemeClr val="bg1"/>
+      </p:bgRef>
+    </p:bg>
     <p:spTree>
       <p:nvGrpSpPr>
         <p:cNvPr id="1" name=""/>
@@ -41,7 +213,7 @@
         <p:nvSpPr>
           <p:cNvPr id="60" name="PlaceHolder 1"/>
           <p:cNvSpPr>
-            <a:spLocks noGrp="1"/>
+            <a:spLocks noGrp="1" noRot="1" noChangeAspect="1"/>
           </p:cNvSpPr>
           <p:nvPr>
             <p:ph type="sldImg"/>
@@ -64,6 +236,7 @@
           <a:bodyPr lIns="0" tIns="0" rIns="0" bIns="0" anchor="ctr">
             <a:noAutofit/>
           </a:bodyPr>
+          <a:lstStyle/>
           <a:p>
             <a:pPr algn="ctr" defTabSz="457200"/>
             <a:r>
@@ -77,14 +250,6 @@
               </a:rPr>
               <a:t>Click to move the slide</a:t>
             </a:r>
-            <a:endParaRPr lang="en-US" sz="4400" b="0" u="none" strike="noStrike">
-              <a:solidFill>
-                <a:schemeClr val="dk1"/>
-              </a:solidFill>
-              <a:effectLst/>
-              <a:uFillTx/>
-              <a:latin typeface="TradeGothic"/>
-            </a:endParaRPr>
           </a:p>
         </p:txBody>
       </p:sp>
@@ -115,6 +280,7 @@
           <a:bodyPr lIns="0" tIns="0" rIns="0" bIns="0" anchor="t">
             <a:noAutofit/>
           </a:bodyPr>
+          <a:lstStyle/>
           <a:p>
             <a:pPr indent="0" algn="l">
               <a:buNone/>
@@ -130,14 +296,6 @@
               </a:rPr>
               <a:t>Click to edit the notes format</a:t>
             </a:r>
-            <a:endParaRPr lang="en-US" sz="2000" b="0" u="none" strike="noStrike">
-              <a:solidFill>
-                <a:srgbClr val="000000"/>
-              </a:solidFill>
-              <a:effectLst/>
-              <a:uFillTx/>
-              <a:latin typeface="Arial"/>
-            </a:endParaRPr>
           </a:p>
         </p:txBody>
       </p:sp>
@@ -168,6 +326,7 @@
           <a:bodyPr lIns="0" tIns="0" rIns="0" bIns="0" anchor="t">
             <a:noAutofit/>
           </a:bodyPr>
+          <a:lstStyle/>
           <a:p>
             <a:pPr indent="0" algn="l">
               <a:buNone/>
@@ -183,14 +342,6 @@
               </a:rPr>
               <a:t>&lt;header&gt;</a:t>
             </a:r>
-            <a:endParaRPr lang="en-US" sz="1400" b="0" u="none" strike="noStrike">
-              <a:solidFill>
-                <a:srgbClr val="000000"/>
-              </a:solidFill>
-              <a:effectLst/>
-              <a:uFillTx/>
-              <a:latin typeface="Times New Roman"/>
-            </a:endParaRPr>
           </a:p>
         </p:txBody>
       </p:sp>
@@ -249,14 +400,6 @@
               </a:rPr>
               <a:t>&lt;date/time&gt;</a:t>
             </a:r>
-            <a:endParaRPr lang="en-US" sz="1400" b="0" u="none" strike="noStrike">
-              <a:solidFill>
-                <a:srgbClr val="000000"/>
-              </a:solidFill>
-              <a:effectLst/>
-              <a:uFillTx/>
-              <a:latin typeface="Times New Roman"/>
-            </a:endParaRPr>
           </a:p>
         </p:txBody>
       </p:sp>
@@ -315,14 +458,6 @@
               </a:rPr>
               <a:t>&lt;footer&gt;</a:t>
             </a:r>
-            <a:endParaRPr lang="en-US" sz="1400" b="0" u="none" strike="noStrike">
-              <a:solidFill>
-                <a:srgbClr val="000000"/>
-              </a:solidFill>
-              <a:effectLst/>
-              <a:uFillTx/>
-              <a:latin typeface="Times New Roman"/>
-            </a:endParaRPr>
           </a:p>
         </p:txBody>
       </p:sp>
@@ -379,7 +514,7 @@
                 <a:uFillTx/>
                 <a:latin typeface="Times New Roman"/>
               </a:rPr>
-              <a:t>&lt;number&gt;</a:t>
+              <a:t>‹#›</a:t>
             </a:fld>
             <a:endParaRPr lang="en-US" sz="1400" b="0" u="none" strike="noStrike">
               <a:solidFill>
@@ -394,12 +529,104 @@
       </p:sp>
     </p:spTree>
   </p:cSld>
-  <p:clrMap bg1="lt1" bg2="lt2" tx1="dk1" tx2="dk2" accent1="accent1" accent2="accent2" accent3="accent3" accent4="accent4" accent5="accent5" accent6="accent6" hlink="hlink" folHlink="folHlink"/>
+  <p:clrMap bg1="lt1" tx1="dk1" bg2="lt2" tx2="dk2" accent1="accent1" accent2="accent2" accent3="accent3" accent4="accent4" accent5="accent5" accent6="accent6" hlink="hlink" folHlink="folHlink"/>
+  <p:notesStyle>
+    <a:lvl1pPr marL="0" algn="l" defTabSz="914400" rtl="0" eaLnBrk="1" latinLnBrk="0" hangingPunct="1">
+      <a:defRPr sz="1200" kern="1200">
+        <a:solidFill>
+          <a:schemeClr val="tx1"/>
+        </a:solidFill>
+        <a:latin typeface="+mn-lt"/>
+        <a:ea typeface="+mn-ea"/>
+        <a:cs typeface="+mn-cs"/>
+      </a:defRPr>
+    </a:lvl1pPr>
+    <a:lvl2pPr marL="457200" algn="l" defTabSz="914400" rtl="0" eaLnBrk="1" latinLnBrk="0" hangingPunct="1">
+      <a:defRPr sz="1200" kern="1200">
+        <a:solidFill>
+          <a:schemeClr val="tx1"/>
+        </a:solidFill>
+        <a:latin typeface="+mn-lt"/>
+        <a:ea typeface="+mn-ea"/>
+        <a:cs typeface="+mn-cs"/>
+      </a:defRPr>
+    </a:lvl2pPr>
+    <a:lvl3pPr marL="914400" algn="l" defTabSz="914400" rtl="0" eaLnBrk="1" latinLnBrk="0" hangingPunct="1">
+      <a:defRPr sz="1200" kern="1200">
+        <a:solidFill>
+          <a:schemeClr val="tx1"/>
+        </a:solidFill>
+        <a:latin typeface="+mn-lt"/>
+        <a:ea typeface="+mn-ea"/>
+        <a:cs typeface="+mn-cs"/>
+      </a:defRPr>
+    </a:lvl3pPr>
+    <a:lvl4pPr marL="1371600" algn="l" defTabSz="914400" rtl="0" eaLnBrk="1" latinLnBrk="0" hangingPunct="1">
+      <a:defRPr sz="1200" kern="1200">
+        <a:solidFill>
+          <a:schemeClr val="tx1"/>
+        </a:solidFill>
+        <a:latin typeface="+mn-lt"/>
+        <a:ea typeface="+mn-ea"/>
+        <a:cs typeface="+mn-cs"/>
+      </a:defRPr>
+    </a:lvl4pPr>
+    <a:lvl5pPr marL="1828800" algn="l" defTabSz="914400" rtl="0" eaLnBrk="1" latinLnBrk="0" hangingPunct="1">
+      <a:defRPr sz="1200" kern="1200">
+        <a:solidFill>
+          <a:schemeClr val="tx1"/>
+        </a:solidFill>
+        <a:latin typeface="+mn-lt"/>
+        <a:ea typeface="+mn-ea"/>
+        <a:cs typeface="+mn-cs"/>
+      </a:defRPr>
+    </a:lvl5pPr>
+    <a:lvl6pPr marL="2286000" algn="l" defTabSz="914400" rtl="0" eaLnBrk="1" latinLnBrk="0" hangingPunct="1">
+      <a:defRPr sz="1200" kern="1200">
+        <a:solidFill>
+          <a:schemeClr val="tx1"/>
+        </a:solidFill>
+        <a:latin typeface="+mn-lt"/>
+        <a:ea typeface="+mn-ea"/>
+        <a:cs typeface="+mn-cs"/>
+      </a:defRPr>
+    </a:lvl6pPr>
+    <a:lvl7pPr marL="2743200" algn="l" defTabSz="914400" rtl="0" eaLnBrk="1" latinLnBrk="0" hangingPunct="1">
+      <a:defRPr sz="1200" kern="1200">
+        <a:solidFill>
+          <a:schemeClr val="tx1"/>
+        </a:solidFill>
+        <a:latin typeface="+mn-lt"/>
+        <a:ea typeface="+mn-ea"/>
+        <a:cs typeface="+mn-cs"/>
+      </a:defRPr>
+    </a:lvl7pPr>
+    <a:lvl8pPr marL="3200400" algn="l" defTabSz="914400" rtl="0" eaLnBrk="1" latinLnBrk="0" hangingPunct="1">
+      <a:defRPr sz="1200" kern="1200">
+        <a:solidFill>
+          <a:schemeClr val="tx1"/>
+        </a:solidFill>
+        <a:latin typeface="+mn-lt"/>
+        <a:ea typeface="+mn-ea"/>
+        <a:cs typeface="+mn-cs"/>
+      </a:defRPr>
+    </a:lvl8pPr>
+    <a:lvl9pPr marL="3657600" algn="l" defTabSz="914400" rtl="0" eaLnBrk="1" latinLnBrk="0" hangingPunct="1">
+      <a:defRPr sz="1200" kern="1200">
+        <a:solidFill>
+          <a:schemeClr val="tx1"/>
+        </a:solidFill>
+        <a:latin typeface="+mn-lt"/>
+        <a:ea typeface="+mn-ea"/>
+        <a:cs typeface="+mn-cs"/>
+      </a:defRPr>
+    </a:lvl9pPr>
+  </p:notesStyle>
 </p:notesMaster>
 </file>
 
-<file path=ppt/notesSlides/notesSlide2.xml><?xml version="1.0" encoding="utf-8"?>
-<p:notes xmlns:a="http://schemas.openxmlformats.org/drawingml/2006/main" xmlns:p="http://schemas.openxmlformats.org/presentationml/2006/main" xmlns:r="http://schemas.openxmlformats.org/officeDocument/2006/relationships" xmlns:p14="http://schemas.microsoft.com/office/powerpoint/2010/main" xmlns:p15="http://schemas.microsoft.com/office/powerpoint/2012/main" xmlns:mc="http://schemas.openxmlformats.org/markup-compatibility/2006">
+<file path=ppt/notesSlides/notesSlide1.xml><?xml version="1.0" encoding="utf-8"?>
+<p:notes xmlns:a="http://schemas.openxmlformats.org/drawingml/2006/main" xmlns:r="http://schemas.openxmlformats.org/officeDocument/2006/relationships" xmlns:p="http://schemas.openxmlformats.org/presentationml/2006/main">
   <p:cSld>
     <p:spTree>
       <p:nvGrpSpPr>
@@ -419,7 +646,7 @@
         <p:nvSpPr>
           <p:cNvPr id="128" name="PlaceHolder 1"/>
           <p:cNvSpPr>
-            <a:spLocks noGrp="1"/>
+            <a:spLocks noGrp="1" noRot="1" noChangeAspect="1"/>
           </p:cNvSpPr>
           <p:nvPr>
             <p:ph type="sldImg"/>
@@ -462,9 +689,10 @@
           </a:ln>
         </p:spPr>
         <p:txBody>
-          <a:bodyPr numCol="1" spcCol="0" lIns="91440" tIns="45720" rIns="91440" bIns="45720" anchor="t">
+          <a:bodyPr lIns="91440" tIns="45720" rIns="91440" bIns="45720" numCol="1" spcCol="0" anchor="t">
             <a:noAutofit/>
           </a:bodyPr>
+          <a:lstStyle/>
           <a:p>
             <a:pPr indent="0" algn="l">
               <a:buNone/>
@@ -504,7 +732,7 @@
           </a:ln>
         </p:spPr>
         <p:txBody>
-          <a:bodyPr numCol="1" spcCol="0" lIns="91440" tIns="45720" rIns="91440" bIns="45720" anchor="b">
+          <a:bodyPr lIns="91440" tIns="45720" rIns="91440" bIns="45720" numCol="1" spcCol="0" anchor="b">
             <a:noAutofit/>
           </a:bodyPr>
           <a:lstStyle>
@@ -539,7 +767,7 @@
                 <a:uFillTx/>
                 <a:latin typeface="Times New Roman"/>
               </a:rPr>
-              <a:t>&lt;number&gt;</a:t>
+              <a:t>2</a:t>
             </a:fld>
             <a:endParaRPr lang="en-US" sz="1200" b="0" u="none" strike="noStrike">
               <a:solidFill>
@@ -554,11 +782,14 @@
       </p:sp>
     </p:spTree>
   </p:cSld>
+  <p:clrMapOvr>
+    <a:masterClrMapping/>
+  </p:clrMapOvr>
 </p:notes>
 </file>
 
-<file path=ppt/notesSlides/notesSlide3.xml><?xml version="1.0" encoding="utf-8"?>
-<p:notes xmlns:a="http://schemas.openxmlformats.org/drawingml/2006/main" xmlns:p="http://schemas.openxmlformats.org/presentationml/2006/main" xmlns:r="http://schemas.openxmlformats.org/officeDocument/2006/relationships" xmlns:p14="http://schemas.microsoft.com/office/powerpoint/2010/main" xmlns:p15="http://schemas.microsoft.com/office/powerpoint/2012/main" xmlns:mc="http://schemas.openxmlformats.org/markup-compatibility/2006">
+<file path=ppt/notesSlides/notesSlide2.xml><?xml version="1.0" encoding="utf-8"?>
+<p:notes xmlns:a="http://schemas.openxmlformats.org/drawingml/2006/main" xmlns:r="http://schemas.openxmlformats.org/officeDocument/2006/relationships" xmlns:p="http://schemas.openxmlformats.org/presentationml/2006/main">
   <p:cSld>
     <p:spTree>
       <p:nvGrpSpPr>
@@ -578,7 +809,7 @@
         <p:nvSpPr>
           <p:cNvPr id="131" name="PlaceHolder 1"/>
           <p:cNvSpPr>
-            <a:spLocks noGrp="1"/>
+            <a:spLocks noGrp="1" noRot="1" noChangeAspect="1"/>
           </p:cNvSpPr>
           <p:nvPr>
             <p:ph type="sldImg"/>
@@ -586,8 +817,8 @@
         </p:nvSpPr>
         <p:spPr>
           <a:xfrm>
-            <a:off x="380880" y="685800"/>
-            <a:ext cx="6095520" cy="3428640"/>
+            <a:off x="381000" y="685800"/>
+            <a:ext cx="6096000" cy="3429000"/>
           </a:xfrm>
           <a:prstGeom prst="rect">
             <a:avLst/>
@@ -621,9 +852,10 @@
           </a:ln>
         </p:spPr>
         <p:txBody>
-          <a:bodyPr numCol="1" spcCol="0" lIns="91440" tIns="45720" rIns="91440" bIns="45720" anchor="t">
+          <a:bodyPr lIns="91440" tIns="45720" rIns="91440" bIns="45720" numCol="1" spcCol="0" anchor="t">
             <a:noAutofit/>
           </a:bodyPr>
+          <a:lstStyle/>
           <a:p>
             <a:pPr indent="0" algn="l">
               <a:buNone/>
@@ -663,7 +895,7 @@
           </a:ln>
         </p:spPr>
         <p:txBody>
-          <a:bodyPr numCol="1" spcCol="0" lIns="91440" tIns="45720" rIns="91440" bIns="45720" anchor="b">
+          <a:bodyPr lIns="91440" tIns="45720" rIns="91440" bIns="45720" numCol="1" spcCol="0" anchor="b">
             <a:noAutofit/>
           </a:bodyPr>
           <a:lstStyle>
@@ -698,7 +930,7 @@
                 <a:uFillTx/>
                 <a:latin typeface="Times New Roman"/>
               </a:rPr>
-              <a:t>&lt;number&gt;</a:t>
+              <a:t>3</a:t>
             </a:fld>
             <a:endParaRPr lang="en-US" sz="1200" b="0" u="none" strike="noStrike">
               <a:solidFill>
@@ -713,11 +945,14 @@
       </p:sp>
     </p:spTree>
   </p:cSld>
+  <p:clrMapOvr>
+    <a:masterClrMapping/>
+  </p:clrMapOvr>
 </p:notes>
 </file>
 
-<file path=ppt/notesSlides/notesSlide4.xml><?xml version="1.0" encoding="utf-8"?>
-<p:notes xmlns:a="http://schemas.openxmlformats.org/drawingml/2006/main" xmlns:p="http://schemas.openxmlformats.org/presentationml/2006/main" xmlns:r="http://schemas.openxmlformats.org/officeDocument/2006/relationships" xmlns:p14="http://schemas.microsoft.com/office/powerpoint/2010/main" xmlns:p15="http://schemas.microsoft.com/office/powerpoint/2012/main" xmlns:mc="http://schemas.openxmlformats.org/markup-compatibility/2006">
+<file path=ppt/notesSlides/notesSlide3.xml><?xml version="1.0" encoding="utf-8"?>
+<p:notes xmlns:a="http://schemas.openxmlformats.org/drawingml/2006/main" xmlns:r="http://schemas.openxmlformats.org/officeDocument/2006/relationships" xmlns:p="http://schemas.openxmlformats.org/presentationml/2006/main">
   <p:cSld>
     <p:spTree>
       <p:nvGrpSpPr>
@@ -737,7 +972,7 @@
         <p:nvSpPr>
           <p:cNvPr id="134" name="PlaceHolder 1"/>
           <p:cNvSpPr>
-            <a:spLocks noGrp="1"/>
+            <a:spLocks noGrp="1" noRot="1" noChangeAspect="1"/>
           </p:cNvSpPr>
           <p:nvPr>
             <p:ph type="sldImg"/>
@@ -745,8 +980,8 @@
         </p:nvSpPr>
         <p:spPr>
           <a:xfrm>
-            <a:off x="380880" y="685800"/>
-            <a:ext cx="6095520" cy="3428640"/>
+            <a:off x="381000" y="685800"/>
+            <a:ext cx="6096000" cy="3429000"/>
           </a:xfrm>
           <a:prstGeom prst="rect">
             <a:avLst/>
@@ -780,9 +1015,10 @@
           </a:ln>
         </p:spPr>
         <p:txBody>
-          <a:bodyPr numCol="1" spcCol="0" lIns="91440" tIns="45720" rIns="91440" bIns="45720" anchor="t">
+          <a:bodyPr lIns="91440" tIns="45720" rIns="91440" bIns="45720" numCol="1" spcCol="0" anchor="t">
             <a:noAutofit/>
           </a:bodyPr>
+          <a:lstStyle/>
           <a:p>
             <a:pPr indent="0" algn="l">
               <a:buNone/>
@@ -822,7 +1058,7 @@
           </a:ln>
         </p:spPr>
         <p:txBody>
-          <a:bodyPr numCol="1" spcCol="0" lIns="91440" tIns="45720" rIns="91440" bIns="45720" anchor="b">
+          <a:bodyPr lIns="91440" tIns="45720" rIns="91440" bIns="45720" numCol="1" spcCol="0" anchor="b">
             <a:noAutofit/>
           </a:bodyPr>
           <a:lstStyle>
@@ -865,7 +1101,7 @@
                 <a:latin typeface="Calibri"/>
                 <a:ea typeface="ＭＳ Ｐゴシック"/>
               </a:rPr>
-              <a:t>&lt;number&gt;</a:t>
+              <a:t>4</a:t>
             </a:fld>
             <a:endParaRPr lang="en-US" sz="1200" b="0" u="none" strike="noStrike">
               <a:solidFill>
@@ -880,11 +1116,14 @@
       </p:sp>
     </p:spTree>
   </p:cSld>
+  <p:clrMapOvr>
+    <a:masterClrMapping/>
+  </p:clrMapOvr>
 </p:notes>
 </file>
 
-<file path=ppt/notesSlides/notesSlide5.xml><?xml version="1.0" encoding="utf-8"?>
-<p:notes xmlns:a="http://schemas.openxmlformats.org/drawingml/2006/main" xmlns:p="http://schemas.openxmlformats.org/presentationml/2006/main" xmlns:r="http://schemas.openxmlformats.org/officeDocument/2006/relationships" xmlns:p14="http://schemas.microsoft.com/office/powerpoint/2010/main" xmlns:p15="http://schemas.microsoft.com/office/powerpoint/2012/main" xmlns:mc="http://schemas.openxmlformats.org/markup-compatibility/2006">
+<file path=ppt/notesSlides/notesSlide4.xml><?xml version="1.0" encoding="utf-8"?>
+<p:notes xmlns:a="http://schemas.openxmlformats.org/drawingml/2006/main" xmlns:r="http://schemas.openxmlformats.org/officeDocument/2006/relationships" xmlns:p="http://schemas.openxmlformats.org/presentationml/2006/main">
   <p:cSld>
     <p:spTree>
       <p:nvGrpSpPr>
@@ -904,7 +1143,7 @@
         <p:nvSpPr>
           <p:cNvPr id="137" name="PlaceHolder 1"/>
           <p:cNvSpPr>
-            <a:spLocks noGrp="1"/>
+            <a:spLocks noGrp="1" noRot="1" noChangeAspect="1"/>
           </p:cNvSpPr>
           <p:nvPr>
             <p:ph type="sldImg"/>
@@ -947,9 +1186,10 @@
           </a:ln>
         </p:spPr>
         <p:txBody>
-          <a:bodyPr numCol="1" spcCol="0" lIns="91440" tIns="45720" rIns="91440" bIns="45720" anchor="t">
+          <a:bodyPr lIns="91440" tIns="45720" rIns="91440" bIns="45720" numCol="1" spcCol="0" anchor="t">
             <a:noAutofit/>
           </a:bodyPr>
+          <a:lstStyle/>
           <a:p>
             <a:pPr indent="0" algn="l">
               <a:buNone/>
@@ -989,7 +1229,7 @@
           </a:ln>
         </p:spPr>
         <p:txBody>
-          <a:bodyPr numCol="1" spcCol="0" lIns="91440" tIns="45720" rIns="91440" bIns="45720" anchor="b">
+          <a:bodyPr lIns="91440" tIns="45720" rIns="91440" bIns="45720" numCol="1" spcCol="0" anchor="b">
             <a:noAutofit/>
           </a:bodyPr>
           <a:lstStyle>
@@ -1032,7 +1272,7 @@
                 <a:latin typeface="Calibri"/>
                 <a:ea typeface="ＭＳ Ｐゴシック"/>
               </a:rPr>
-              <a:t>&lt;number&gt;</a:t>
+              <a:t>5</a:t>
             </a:fld>
             <a:endParaRPr lang="en-US" sz="1200" b="0" u="none" strike="noStrike">
               <a:solidFill>
@@ -1047,11 +1287,14 @@
       </p:sp>
     </p:spTree>
   </p:cSld>
+  <p:clrMapOvr>
+    <a:masterClrMapping/>
+  </p:clrMapOvr>
 </p:notes>
 </file>
 
-<file path=ppt/notesSlides/notesSlide6.xml><?xml version="1.0" encoding="utf-8"?>
-<p:notes xmlns:a="http://schemas.openxmlformats.org/drawingml/2006/main" xmlns:p="http://schemas.openxmlformats.org/presentationml/2006/main" xmlns:r="http://schemas.openxmlformats.org/officeDocument/2006/relationships" xmlns:p14="http://schemas.microsoft.com/office/powerpoint/2010/main" xmlns:p15="http://schemas.microsoft.com/office/powerpoint/2012/main" xmlns:mc="http://schemas.openxmlformats.org/markup-compatibility/2006">
+<file path=ppt/notesSlides/notesSlide5.xml><?xml version="1.0" encoding="utf-8"?>
+<p:notes xmlns:a="http://schemas.openxmlformats.org/drawingml/2006/main" xmlns:r="http://schemas.openxmlformats.org/officeDocument/2006/relationships" xmlns:p="http://schemas.openxmlformats.org/presentationml/2006/main">
   <p:cSld>
     <p:spTree>
       <p:nvGrpSpPr>
@@ -1071,7 +1314,7 @@
         <p:nvSpPr>
           <p:cNvPr id="140" name="PlaceHolder 1"/>
           <p:cNvSpPr>
-            <a:spLocks noGrp="1"/>
+            <a:spLocks noGrp="1" noRot="1" noChangeAspect="1"/>
           </p:cNvSpPr>
           <p:nvPr>
             <p:ph type="sldImg"/>
@@ -1079,8 +1322,8 @@
         </p:nvSpPr>
         <p:spPr>
           <a:xfrm>
-            <a:off x="380880" y="685800"/>
-            <a:ext cx="6095520" cy="3428640"/>
+            <a:off x="381000" y="685800"/>
+            <a:ext cx="6096000" cy="3429000"/>
           </a:xfrm>
           <a:prstGeom prst="rect">
             <a:avLst/>
@@ -1114,9 +1357,10 @@
           </a:ln>
         </p:spPr>
         <p:txBody>
-          <a:bodyPr numCol="1" spcCol="0" lIns="91440" tIns="45720" rIns="91440" bIns="45720" anchor="t">
+          <a:bodyPr lIns="91440" tIns="45720" rIns="91440" bIns="45720" numCol="1" spcCol="0" anchor="t">
             <a:noAutofit/>
           </a:bodyPr>
+          <a:lstStyle/>
           <a:p>
             <a:pPr indent="0" algn="l">
               <a:buNone/>
@@ -1156,7 +1400,7 @@
           </a:ln>
         </p:spPr>
         <p:txBody>
-          <a:bodyPr numCol="1" spcCol="0" lIns="91440" tIns="45720" rIns="91440" bIns="45720" anchor="b">
+          <a:bodyPr lIns="91440" tIns="45720" rIns="91440" bIns="45720" numCol="1" spcCol="0" anchor="b">
             <a:noAutofit/>
           </a:bodyPr>
           <a:lstStyle>
@@ -1199,7 +1443,7 @@
                 <a:latin typeface="Calibri"/>
                 <a:ea typeface="ＭＳ Ｐゴシック"/>
               </a:rPr>
-              <a:t>&lt;number&gt;</a:t>
+              <a:t>6</a:t>
             </a:fld>
             <a:endParaRPr lang="en-US" sz="1200" b="0" u="none" strike="noStrike">
               <a:solidFill>
@@ -1214,17 +1458,21 @@
       </p:sp>
     </p:spTree>
   </p:cSld>
+  <p:clrMapOvr>
+    <a:masterClrMapping/>
+  </p:clrMapOvr>
 </p:notes>
 </file>
 
 <file path=ppt/slideLayouts/slideLayout1.xml><?xml version="1.0" encoding="utf-8"?>
-<p:sldLayout xmlns:a="http://schemas.openxmlformats.org/drawingml/2006/main" xmlns:p="http://schemas.openxmlformats.org/presentationml/2006/main" xmlns:r="http://schemas.openxmlformats.org/officeDocument/2006/relationships" xmlns:p14="http://schemas.microsoft.com/office/powerpoint/2010/main" xmlns:p15="http://schemas.microsoft.com/office/powerpoint/2012/main" xmlns:mc="http://schemas.openxmlformats.org/markup-compatibility/2006" type="title" preserve="1">
+<p:sldLayout xmlns:a="http://schemas.openxmlformats.org/drawingml/2006/main" xmlns:r="http://schemas.openxmlformats.org/officeDocument/2006/relationships" xmlns:p="http://schemas.openxmlformats.org/presentationml/2006/main" type="title" preserve="1">
   <p:cSld name="Title Slide">
     <p:bg>
       <p:bgPr>
         <a:solidFill>
           <a:srgbClr val="FFFFFF"/>
         </a:solidFill>
+        <a:effectLst/>
       </p:bgPr>
     </p:bg>
     <p:spTree>
@@ -1265,7 +1513,7 @@
           </a:ln>
         </p:spPr>
         <p:txBody>
-          <a:bodyPr numCol="1" spcCol="0" lIns="91440" tIns="45720" rIns="91440" bIns="45720" anchor="ctr">
+          <a:bodyPr lIns="91440" tIns="45720" rIns="91440" bIns="45720" numCol="1" spcCol="0" anchor="ctr">
             <a:noAutofit/>
           </a:bodyPr>
           <a:lstStyle>
@@ -1339,7 +1587,7 @@
           </a:ln>
         </p:spPr>
         <p:txBody>
-          <a:bodyPr numCol="1" spcCol="0" lIns="91440" tIns="45720" rIns="91440" bIns="45720" anchor="ctr">
+          <a:bodyPr lIns="91440" tIns="45720" rIns="91440" bIns="45720" numCol="1" spcCol="0" anchor="ctr">
             <a:noAutofit/>
           </a:bodyPr>
           <a:lstStyle>
@@ -1489,7 +1737,7 @@
           </a:ln>
         </p:spPr>
         <p:txBody>
-          <a:bodyPr numCol="1" spcCol="0" lIns="91440" tIns="45720" rIns="91440" bIns="45720" anchor="ctr">
+          <a:bodyPr lIns="91440" tIns="45720" rIns="91440" bIns="45720" numCol="1" spcCol="0" anchor="ctr">
             <a:noAutofit/>
           </a:bodyPr>
           <a:lstStyle>
@@ -1526,7 +1774,7 @@
                 <a:latin typeface="TradeGothic"/>
                 <a:ea typeface="ＭＳ Ｐゴシック"/>
               </a:rPr>
-              <a:t>&lt;number&gt;</a:t>
+              <a:t>‹#›</a:t>
             </a:fld>
             <a:endParaRPr lang="en-US" sz="1200" b="0" u="none" strike="noStrike">
               <a:solidFill>
@@ -1722,14 +1970,6 @@
               </a:rPr>
               <a:t>Click to edit the outline text format</a:t>
             </a:r>
-            <a:endParaRPr lang="en-US" sz="3200" b="0" u="none" strike="noStrike">
-              <a:solidFill>
-                <a:schemeClr val="dk1"/>
-              </a:solidFill>
-              <a:effectLst/>
-              <a:uFillTx/>
-              <a:latin typeface="TradeGothic"/>
-            </a:endParaRPr>
           </a:p>
           <a:p>
             <a:pPr marL="864000" lvl="1" indent="-324000" algn="l" defTabSz="457200">
@@ -1754,14 +1994,6 @@
               </a:rPr>
               <a:t>Second Outline Level</a:t>
             </a:r>
-            <a:endParaRPr lang="en-US" sz="2800" b="0" u="none" strike="noStrike">
-              <a:solidFill>
-                <a:schemeClr val="dk1"/>
-              </a:solidFill>
-              <a:effectLst/>
-              <a:uFillTx/>
-              <a:latin typeface="TradeGothic"/>
-            </a:endParaRPr>
           </a:p>
           <a:p>
             <a:pPr marL="1296000" lvl="2" indent="-288000" algn="l" defTabSz="457200">
@@ -1786,14 +2018,6 @@
               </a:rPr>
               <a:t>Third Outline Level</a:t>
             </a:r>
-            <a:endParaRPr lang="en-US" sz="2400" b="0" u="none" strike="noStrike">
-              <a:solidFill>
-                <a:schemeClr val="dk1"/>
-              </a:solidFill>
-              <a:effectLst/>
-              <a:uFillTx/>
-              <a:latin typeface="TradeGothic"/>
-            </a:endParaRPr>
           </a:p>
           <a:p>
             <a:pPr marL="1728000" lvl="3" indent="-216000" algn="l" defTabSz="457200">
@@ -1818,14 +2042,6 @@
               </a:rPr>
               <a:t>Fourth Outline Level</a:t>
             </a:r>
-            <a:endParaRPr lang="en-US" sz="2000" b="0" u="none" strike="noStrike">
-              <a:solidFill>
-                <a:schemeClr val="dk1"/>
-              </a:solidFill>
-              <a:effectLst/>
-              <a:uFillTx/>
-              <a:latin typeface="TradeGothic"/>
-            </a:endParaRPr>
           </a:p>
           <a:p>
             <a:pPr marL="2160000" lvl="4" indent="-216000" algn="l" defTabSz="457200">
@@ -1850,14 +2066,6 @@
               </a:rPr>
               <a:t>Fifth Outline Level</a:t>
             </a:r>
-            <a:endParaRPr lang="en-US" sz="2000" b="0" u="none" strike="noStrike">
-              <a:solidFill>
-                <a:schemeClr val="dk1"/>
-              </a:solidFill>
-              <a:effectLst/>
-              <a:uFillTx/>
-              <a:latin typeface="TradeGothic"/>
-            </a:endParaRPr>
           </a:p>
           <a:p>
             <a:pPr marL="2592000" lvl="5" indent="-216000" algn="l" defTabSz="457200">
@@ -1882,14 +2090,6 @@
               </a:rPr>
               <a:t>Sixth Outline Level</a:t>
             </a:r>
-            <a:endParaRPr lang="en-US" sz="2000" b="0" u="none" strike="noStrike">
-              <a:solidFill>
-                <a:schemeClr val="dk1"/>
-              </a:solidFill>
-              <a:effectLst/>
-              <a:uFillTx/>
-              <a:latin typeface="TradeGothic"/>
-            </a:endParaRPr>
           </a:p>
           <a:p>
             <a:pPr marL="3024000" lvl="6" indent="-216000" algn="l" defTabSz="457200">
@@ -1914,14 +2114,6 @@
               </a:rPr>
               <a:t>Seventh Outline Level</a:t>
             </a:r>
-            <a:endParaRPr lang="en-US" sz="2000" b="0" u="none" strike="noStrike">
-              <a:solidFill>
-                <a:schemeClr val="dk1"/>
-              </a:solidFill>
-              <a:effectLst/>
-              <a:uFillTx/>
-              <a:latin typeface="TradeGothic"/>
-            </a:endParaRPr>
           </a:p>
         </p:txBody>
       </p:sp>
@@ -1934,13 +2126,14 @@
 </file>
 
 <file path=ppt/slideLayouts/slideLayout10.xml><?xml version="1.0" encoding="utf-8"?>
-<p:sldLayout xmlns:a="http://schemas.openxmlformats.org/drawingml/2006/main" xmlns:p="http://schemas.openxmlformats.org/presentationml/2006/main" xmlns:r="http://schemas.openxmlformats.org/officeDocument/2006/relationships" xmlns:p14="http://schemas.microsoft.com/office/powerpoint/2010/main" xmlns:p15="http://schemas.microsoft.com/office/powerpoint/2012/main" xmlns:mc="http://schemas.openxmlformats.org/markup-compatibility/2006" type="blank" preserve="1">
+<p:sldLayout xmlns:a="http://schemas.openxmlformats.org/drawingml/2006/main" xmlns:r="http://schemas.openxmlformats.org/officeDocument/2006/relationships" xmlns:p="http://schemas.openxmlformats.org/presentationml/2006/main" type="blank" preserve="1">
   <p:cSld name="Content with Caption">
     <p:bg>
       <p:bgPr>
         <a:solidFill>
           <a:srgbClr val="FFFFFF"/>
         </a:solidFill>
+        <a:effectLst/>
       </p:bgPr>
     </p:bg>
     <p:spTree>
@@ -1981,7 +2174,7 @@
           </a:ln>
         </p:spPr>
         <p:txBody>
-          <a:bodyPr numCol="1" spcCol="0" lIns="91440" tIns="45720" rIns="91440" bIns="45720" anchor="b">
+          <a:bodyPr lIns="91440" tIns="45720" rIns="91440" bIns="45720" numCol="1" spcCol="0" anchor="b">
             <a:noAutofit/>
           </a:bodyPr>
           <a:lstStyle>
@@ -2055,7 +2248,7 @@
           </a:ln>
         </p:spPr>
         <p:txBody>
-          <a:bodyPr numCol="1" spcCol="0" lIns="91440" tIns="45720" rIns="91440" bIns="45720" anchor="t">
+          <a:bodyPr lIns="91440" tIns="45720" rIns="91440" bIns="45720" numCol="1" spcCol="0" anchor="t">
             <a:noAutofit/>
           </a:bodyPr>
           <a:lstStyle>
@@ -2371,7 +2564,7 @@
           </a:ln>
         </p:spPr>
         <p:txBody>
-          <a:bodyPr numCol="1" spcCol="0" lIns="91440" tIns="45720" rIns="91440" bIns="45720" anchor="t">
+          <a:bodyPr lIns="91440" tIns="45720" rIns="91440" bIns="45720" numCol="1" spcCol="0" anchor="t">
             <a:noAutofit/>
           </a:bodyPr>
           <a:lstStyle>
@@ -2457,7 +2650,7 @@
           </a:ln>
         </p:spPr>
         <p:txBody>
-          <a:bodyPr numCol="1" spcCol="0" lIns="91440" tIns="45720" rIns="91440" bIns="45720" anchor="ctr">
+          <a:bodyPr lIns="91440" tIns="45720" rIns="91440" bIns="45720" numCol="1" spcCol="0" anchor="ctr">
             <a:noAutofit/>
           </a:bodyPr>
           <a:lstStyle>
@@ -2607,7 +2800,7 @@
           </a:ln>
         </p:spPr>
         <p:txBody>
-          <a:bodyPr numCol="1" spcCol="0" lIns="91440" tIns="45720" rIns="91440" bIns="45720" anchor="ctr">
+          <a:bodyPr lIns="91440" tIns="45720" rIns="91440" bIns="45720" numCol="1" spcCol="0" anchor="ctr">
             <a:noAutofit/>
           </a:bodyPr>
           <a:lstStyle>
@@ -2644,7 +2837,7 @@
                 <a:latin typeface="TradeGothic"/>
                 <a:ea typeface="ＭＳ Ｐゴシック"/>
               </a:rPr>
-              <a:t>&lt;number&gt;</a:t>
+              <a:t>‹#›</a:t>
             </a:fld>
             <a:endParaRPr lang="en-US" sz="1200" b="0" u="none" strike="noStrike">
               <a:solidFill>
@@ -2666,13 +2859,14 @@
 </file>
 
 <file path=ppt/slideLayouts/slideLayout11.xml><?xml version="1.0" encoding="utf-8"?>
-<p:sldLayout xmlns:a="http://schemas.openxmlformats.org/drawingml/2006/main" xmlns:p="http://schemas.openxmlformats.org/presentationml/2006/main" xmlns:r="http://schemas.openxmlformats.org/officeDocument/2006/relationships" xmlns:p14="http://schemas.microsoft.com/office/powerpoint/2010/main" xmlns:p15="http://schemas.microsoft.com/office/powerpoint/2012/main" xmlns:mc="http://schemas.openxmlformats.org/markup-compatibility/2006" type="blank" preserve="1">
+<p:sldLayout xmlns:a="http://schemas.openxmlformats.org/drawingml/2006/main" xmlns:r="http://schemas.openxmlformats.org/officeDocument/2006/relationships" xmlns:p="http://schemas.openxmlformats.org/presentationml/2006/main" type="blank" preserve="1">
   <p:cSld name="Picture with Caption">
     <p:bg>
       <p:bgPr>
         <a:solidFill>
           <a:srgbClr val="FFFFFF"/>
         </a:solidFill>
+        <a:effectLst/>
       </p:bgPr>
     </p:bg>
     <p:spTree>
@@ -2713,7 +2907,7 @@
           </a:ln>
         </p:spPr>
         <p:txBody>
-          <a:bodyPr numCol="1" spcCol="0" lIns="91440" tIns="45720" rIns="91440" bIns="45720" anchor="b">
+          <a:bodyPr lIns="91440" tIns="45720" rIns="91440" bIns="45720" numCol="1" spcCol="0" anchor="b">
             <a:noAutofit/>
           </a:bodyPr>
           <a:lstStyle>
@@ -2790,6 +2984,7 @@
           <a:bodyPr lIns="90000" tIns="45000" rIns="90000" bIns="45000" anchor="t">
             <a:normAutofit/>
           </a:bodyPr>
+          <a:lstStyle/>
           <a:p>
             <a:pPr indent="0" algn="l">
               <a:buNone/>
@@ -2805,14 +3000,6 @@
               </a:rPr>
               <a:t>Double-click to add an Image</a:t>
             </a:r>
-            <a:endParaRPr lang="en-US" sz="3200" b="0" u="none" strike="noStrike">
-              <a:solidFill>
-                <a:srgbClr val="000000"/>
-              </a:solidFill>
-              <a:effectLst/>
-              <a:uFillTx/>
-              <a:latin typeface="Arial"/>
-            </a:endParaRPr>
           </a:p>
         </p:txBody>
       </p:sp>
@@ -2840,7 +3027,7 @@
           </a:ln>
         </p:spPr>
         <p:txBody>
-          <a:bodyPr numCol="1" spcCol="0" lIns="91440" tIns="45720" rIns="91440" bIns="45720" anchor="t">
+          <a:bodyPr lIns="91440" tIns="45720" rIns="91440" bIns="45720" numCol="1" spcCol="0" anchor="t">
             <a:noAutofit/>
           </a:bodyPr>
           <a:lstStyle>
@@ -2926,7 +3113,7 @@
           </a:ln>
         </p:spPr>
         <p:txBody>
-          <a:bodyPr numCol="1" spcCol="0" lIns="91440" tIns="45720" rIns="91440" bIns="45720" anchor="ctr">
+          <a:bodyPr lIns="91440" tIns="45720" rIns="91440" bIns="45720" numCol="1" spcCol="0" anchor="ctr">
             <a:noAutofit/>
           </a:bodyPr>
           <a:lstStyle>
@@ -3076,7 +3263,7 @@
           </a:ln>
         </p:spPr>
         <p:txBody>
-          <a:bodyPr numCol="1" spcCol="0" lIns="91440" tIns="45720" rIns="91440" bIns="45720" anchor="ctr">
+          <a:bodyPr lIns="91440" tIns="45720" rIns="91440" bIns="45720" numCol="1" spcCol="0" anchor="ctr">
             <a:noAutofit/>
           </a:bodyPr>
           <a:lstStyle>
@@ -3113,7 +3300,7 @@
                 <a:latin typeface="TradeGothic"/>
                 <a:ea typeface="ＭＳ Ｐゴシック"/>
               </a:rPr>
-              <a:t>&lt;number&gt;</a:t>
+              <a:t>‹#›</a:t>
             </a:fld>
             <a:endParaRPr lang="en-US" sz="1200" b="0" u="none" strike="noStrike">
               <a:solidFill>
@@ -3135,13 +3322,14 @@
 </file>
 
 <file path=ppt/slideLayouts/slideLayout2.xml><?xml version="1.0" encoding="utf-8"?>
-<p:sldLayout xmlns:a="http://schemas.openxmlformats.org/drawingml/2006/main" xmlns:p="http://schemas.openxmlformats.org/presentationml/2006/main" xmlns:r="http://schemas.openxmlformats.org/officeDocument/2006/relationships" xmlns:p14="http://schemas.microsoft.com/office/powerpoint/2010/main" xmlns:p15="http://schemas.microsoft.com/office/powerpoint/2012/main" xmlns:mc="http://schemas.openxmlformats.org/markup-compatibility/2006" type="vertTx" preserve="1">
+<p:sldLayout xmlns:a="http://schemas.openxmlformats.org/drawingml/2006/main" xmlns:r="http://schemas.openxmlformats.org/officeDocument/2006/relationships" xmlns:p="http://schemas.openxmlformats.org/presentationml/2006/main" type="vertTx" preserve="1">
   <p:cSld name="Title and Vertical Text">
     <p:bg>
       <p:bgPr>
         <a:solidFill>
           <a:srgbClr val="FFFFFF"/>
         </a:solidFill>
+        <a:effectLst/>
       </p:bgPr>
     </p:bg>
     <p:spTree>
@@ -3182,7 +3370,7 @@
           </a:ln>
         </p:spPr>
         <p:txBody>
-          <a:bodyPr numCol="1" spcCol="0" lIns="91440" tIns="45720" rIns="91440" bIns="45720" anchor="ctr">
+          <a:bodyPr lIns="91440" tIns="45720" rIns="91440" bIns="45720" numCol="1" spcCol="0" anchor="ctr">
             <a:noAutofit/>
           </a:bodyPr>
           <a:lstStyle>
@@ -3256,7 +3444,7 @@
           </a:ln>
         </p:spPr>
         <p:txBody>
-          <a:bodyPr numCol="1" spcCol="0" lIns="91440" tIns="45720" rIns="91440" bIns="45720" anchor="t" vert="eaVert">
+          <a:bodyPr vert="eaVert" lIns="91440" tIns="45720" rIns="91440" bIns="45720" numCol="1" spcCol="0" anchor="t">
             <a:noAutofit/>
           </a:bodyPr>
           <a:lstStyle>
@@ -3572,7 +3760,7 @@
           </a:ln>
         </p:spPr>
         <p:txBody>
-          <a:bodyPr numCol="1" spcCol="0" lIns="91440" tIns="45720" rIns="91440" bIns="45720" anchor="ctr">
+          <a:bodyPr lIns="91440" tIns="45720" rIns="91440" bIns="45720" numCol="1" spcCol="0" anchor="ctr">
             <a:noAutofit/>
           </a:bodyPr>
           <a:lstStyle>
@@ -3722,7 +3910,7 @@
           </a:ln>
         </p:spPr>
         <p:txBody>
-          <a:bodyPr numCol="1" spcCol="0" lIns="91440" tIns="45720" rIns="91440" bIns="45720" anchor="ctr">
+          <a:bodyPr lIns="91440" tIns="45720" rIns="91440" bIns="45720" numCol="1" spcCol="0" anchor="ctr">
             <a:noAutofit/>
           </a:bodyPr>
           <a:lstStyle>
@@ -3759,7 +3947,7 @@
                 <a:latin typeface="TradeGothic"/>
                 <a:ea typeface="ＭＳ Ｐゴシック"/>
               </a:rPr>
-              <a:t>&lt;number&gt;</a:t>
+              <a:t>‹#›</a:t>
             </a:fld>
             <a:endParaRPr lang="en-US" sz="1200" b="0" u="none" strike="noStrike">
               <a:solidFill>
@@ -3781,13 +3969,14 @@
 </file>
 
 <file path=ppt/slideLayouts/slideLayout3.xml><?xml version="1.0" encoding="utf-8"?>
-<p:sldLayout xmlns:a="http://schemas.openxmlformats.org/drawingml/2006/main" xmlns:p="http://schemas.openxmlformats.org/presentationml/2006/main" xmlns:r="http://schemas.openxmlformats.org/officeDocument/2006/relationships" xmlns:p14="http://schemas.microsoft.com/office/powerpoint/2010/main" xmlns:p15="http://schemas.microsoft.com/office/powerpoint/2012/main" xmlns:mc="http://schemas.openxmlformats.org/markup-compatibility/2006" type="vertTitleAndTx" preserve="1">
+<p:sldLayout xmlns:a="http://schemas.openxmlformats.org/drawingml/2006/main" xmlns:r="http://schemas.openxmlformats.org/officeDocument/2006/relationships" xmlns:p="http://schemas.openxmlformats.org/presentationml/2006/main" type="vertTitleAndTx" preserve="1">
   <p:cSld name="Vertical Title and Text">
     <p:bg>
       <p:bgPr>
         <a:solidFill>
           <a:srgbClr val="FFFFFF"/>
         </a:solidFill>
+        <a:effectLst/>
       </p:bgPr>
     </p:bg>
     <p:spTree>
@@ -3828,7 +4017,7 @@
           </a:ln>
         </p:spPr>
         <p:txBody>
-          <a:bodyPr numCol="1" spcCol="0" lIns="91440" tIns="45720" rIns="91440" bIns="45720" anchor="ctr" vert="eaVert">
+          <a:bodyPr vert="eaVert" lIns="91440" tIns="45720" rIns="91440" bIns="45720" numCol="1" spcCol="0" anchor="ctr">
             <a:noAutofit/>
           </a:bodyPr>
           <a:lstStyle>
@@ -3865,355 +4054,7 @@
                 <a:latin typeface="TradeGothic"/>
                 <a:ea typeface="ＭＳ Ｐゴシック"/>
               </a:rPr>
-              <a:t>C</a:t>
-            </a:r>
-            <a:r>
-              <a:rPr lang="en-US" sz="4400" b="0" u="none" strike="noStrike">
-                <a:solidFill>
-                  <a:schemeClr val="dk1"/>
-                </a:solidFill>
-                <a:effectLst/>
-                <a:uFillTx/>
-                <a:latin typeface="TradeGothic"/>
-                <a:ea typeface="ＭＳ Ｐゴシック"/>
-              </a:rPr>
-              <a:t>l</a:t>
-            </a:r>
-            <a:r>
-              <a:rPr lang="en-US" sz="4400" b="0" u="none" strike="noStrike">
-                <a:solidFill>
-                  <a:schemeClr val="dk1"/>
-                </a:solidFill>
-                <a:effectLst/>
-                <a:uFillTx/>
-                <a:latin typeface="TradeGothic"/>
-                <a:ea typeface="ＭＳ Ｐゴシック"/>
-              </a:rPr>
-              <a:t>i</a:t>
-            </a:r>
-            <a:r>
-              <a:rPr lang="en-US" sz="4400" b="0" u="none" strike="noStrike">
-                <a:solidFill>
-                  <a:schemeClr val="dk1"/>
-                </a:solidFill>
-                <a:effectLst/>
-                <a:uFillTx/>
-                <a:latin typeface="TradeGothic"/>
-                <a:ea typeface="ＭＳ Ｐゴシック"/>
-              </a:rPr>
-              <a:t>c</a:t>
-            </a:r>
-            <a:r>
-              <a:rPr lang="en-US" sz="4400" b="0" u="none" strike="noStrike">
-                <a:solidFill>
-                  <a:schemeClr val="dk1"/>
-                </a:solidFill>
-                <a:effectLst/>
-                <a:uFillTx/>
-                <a:latin typeface="TradeGothic"/>
-                <a:ea typeface="ＭＳ Ｐゴシック"/>
-              </a:rPr>
-              <a:t>k</a:t>
-            </a:r>
-            <a:r>
-              <a:rPr lang="en-US" sz="4400" b="0" u="none" strike="noStrike">
-                <a:solidFill>
-                  <a:schemeClr val="dk1"/>
-                </a:solidFill>
-                <a:effectLst/>
-                <a:uFillTx/>
-                <a:latin typeface="TradeGothic"/>
-                <a:ea typeface="ＭＳ Ｐゴシック"/>
-              </a:rPr>
-              <a:t> </a:t>
-            </a:r>
-            <a:r>
-              <a:rPr lang="en-US" sz="4400" b="0" u="none" strike="noStrike">
-                <a:solidFill>
-                  <a:schemeClr val="dk1"/>
-                </a:solidFill>
-                <a:effectLst/>
-                <a:uFillTx/>
-                <a:latin typeface="TradeGothic"/>
-                <a:ea typeface="ＭＳ Ｐゴシック"/>
-              </a:rPr>
-              <a:t>t</a:t>
-            </a:r>
-            <a:r>
-              <a:rPr lang="en-US" sz="4400" b="0" u="none" strike="noStrike">
-                <a:solidFill>
-                  <a:schemeClr val="dk1"/>
-                </a:solidFill>
-                <a:effectLst/>
-                <a:uFillTx/>
-                <a:latin typeface="TradeGothic"/>
-                <a:ea typeface="ＭＳ Ｐゴシック"/>
-              </a:rPr>
-              <a:t>o</a:t>
-            </a:r>
-            <a:r>
-              <a:rPr lang="en-US" sz="4400" b="0" u="none" strike="noStrike">
-                <a:solidFill>
-                  <a:schemeClr val="dk1"/>
-                </a:solidFill>
-                <a:effectLst/>
-                <a:uFillTx/>
-                <a:latin typeface="TradeGothic"/>
-                <a:ea typeface="ＭＳ Ｐゴシック"/>
-              </a:rPr>
-              <a:t> </a:t>
-            </a:r>
-            <a:r>
-              <a:rPr lang="en-US" sz="4400" b="0" u="none" strike="noStrike">
-                <a:solidFill>
-                  <a:schemeClr val="dk1"/>
-                </a:solidFill>
-                <a:effectLst/>
-                <a:uFillTx/>
-                <a:latin typeface="TradeGothic"/>
-                <a:ea typeface="ＭＳ Ｐゴシック"/>
-              </a:rPr>
-              <a:t>e</a:t>
-            </a:r>
-            <a:r>
-              <a:rPr lang="en-US" sz="4400" b="0" u="none" strike="noStrike">
-                <a:solidFill>
-                  <a:schemeClr val="dk1"/>
-                </a:solidFill>
-                <a:effectLst/>
-                <a:uFillTx/>
-                <a:latin typeface="TradeGothic"/>
-                <a:ea typeface="ＭＳ Ｐゴシック"/>
-              </a:rPr>
-              <a:t>d</a:t>
-            </a:r>
-            <a:r>
-              <a:rPr lang="en-US" sz="4400" b="0" u="none" strike="noStrike">
-                <a:solidFill>
-                  <a:schemeClr val="dk1"/>
-                </a:solidFill>
-                <a:effectLst/>
-                <a:uFillTx/>
-                <a:latin typeface="TradeGothic"/>
-                <a:ea typeface="ＭＳ Ｐゴシック"/>
-              </a:rPr>
-              <a:t>i</a:t>
-            </a:r>
-            <a:r>
-              <a:rPr lang="en-US" sz="4400" b="0" u="none" strike="noStrike">
-                <a:solidFill>
-                  <a:schemeClr val="dk1"/>
-                </a:solidFill>
-                <a:effectLst/>
-                <a:uFillTx/>
-                <a:latin typeface="TradeGothic"/>
-                <a:ea typeface="ＭＳ Ｐゴシック"/>
-              </a:rPr>
-              <a:t>t </a:t>
-            </a:r>
-            <a:r>
-              <a:rPr lang="en-US" sz="4400" b="0" u="none" strike="noStrike">
-                <a:solidFill>
-                  <a:schemeClr val="dk1"/>
-                </a:solidFill>
-                <a:effectLst/>
-                <a:uFillTx/>
-                <a:latin typeface="TradeGothic"/>
-                <a:ea typeface="ＭＳ Ｐゴシック"/>
-              </a:rPr>
-              <a:t>M</a:t>
-            </a:r>
-            <a:r>
-              <a:rPr lang="en-US" sz="4400" b="0" u="none" strike="noStrike">
-                <a:solidFill>
-                  <a:schemeClr val="dk1"/>
-                </a:solidFill>
-                <a:effectLst/>
-                <a:uFillTx/>
-                <a:latin typeface="TradeGothic"/>
-                <a:ea typeface="ＭＳ Ｐゴシック"/>
-              </a:rPr>
-              <a:t>a</a:t>
-            </a:r>
-            <a:r>
-              <a:rPr lang="en-US" sz="4400" b="0" u="none" strike="noStrike">
-                <a:solidFill>
-                  <a:schemeClr val="dk1"/>
-                </a:solidFill>
-                <a:effectLst/>
-                <a:uFillTx/>
-                <a:latin typeface="TradeGothic"/>
-                <a:ea typeface="ＭＳ Ｐゴシック"/>
-              </a:rPr>
-              <a:t>s</a:t>
-            </a:r>
-            <a:r>
-              <a:rPr lang="en-US" sz="4400" b="0" u="none" strike="noStrike">
-                <a:solidFill>
-                  <a:schemeClr val="dk1"/>
-                </a:solidFill>
-                <a:effectLst/>
-                <a:uFillTx/>
-                <a:latin typeface="TradeGothic"/>
-                <a:ea typeface="ＭＳ Ｐゴシック"/>
-              </a:rPr>
-              <a:t>t</a:t>
-            </a:r>
-            <a:r>
-              <a:rPr lang="en-US" sz="4400" b="0" u="none" strike="noStrike">
-                <a:solidFill>
-                  <a:schemeClr val="dk1"/>
-                </a:solidFill>
-                <a:effectLst/>
-                <a:uFillTx/>
-                <a:latin typeface="TradeGothic"/>
-                <a:ea typeface="ＭＳ Ｐゴシック"/>
-              </a:rPr>
-              <a:t>e</a:t>
-            </a:r>
-            <a:r>
-              <a:rPr lang="en-US" sz="4400" b="0" u="none" strike="noStrike">
-                <a:solidFill>
-                  <a:schemeClr val="dk1"/>
-                </a:solidFill>
-                <a:effectLst/>
-                <a:uFillTx/>
-                <a:latin typeface="TradeGothic"/>
-                <a:ea typeface="ＭＳ Ｐゴシック"/>
-              </a:rPr>
-              <a:t>r </a:t>
-            </a:r>
-            <a:r>
-              <a:rPr lang="en-US" sz="4400" b="0" u="none" strike="noStrike">
-                <a:solidFill>
-                  <a:schemeClr val="dk1"/>
-                </a:solidFill>
-                <a:effectLst/>
-                <a:uFillTx/>
-                <a:latin typeface="TradeGothic"/>
-                <a:ea typeface="ＭＳ Ｐゴシック"/>
-              </a:rPr>
-              <a:t>t</a:t>
-            </a:r>
-            <a:r>
-              <a:rPr lang="en-US" sz="4400" b="0" u="none" strike="noStrike">
-                <a:solidFill>
-                  <a:schemeClr val="dk1"/>
-                </a:solidFill>
-                <a:effectLst/>
-                <a:uFillTx/>
-                <a:latin typeface="TradeGothic"/>
-                <a:ea typeface="ＭＳ Ｐゴシック"/>
-              </a:rPr>
-              <a:t>i</a:t>
-            </a:r>
-            <a:r>
-              <a:rPr lang="en-US" sz="4400" b="0" u="none" strike="noStrike">
-                <a:solidFill>
-                  <a:schemeClr val="dk1"/>
-                </a:solidFill>
-                <a:effectLst/>
-                <a:uFillTx/>
-                <a:latin typeface="TradeGothic"/>
-                <a:ea typeface="ＭＳ Ｐゴシック"/>
-              </a:rPr>
-              <a:t>t</a:t>
-            </a:r>
-            <a:r>
-              <a:rPr lang="en-US" sz="4400" b="0" u="none" strike="noStrike">
-                <a:solidFill>
-                  <a:schemeClr val="dk1"/>
-                </a:solidFill>
-                <a:effectLst/>
-                <a:uFillTx/>
-                <a:latin typeface="TradeGothic"/>
-                <a:ea typeface="ＭＳ Ｐゴシック"/>
-              </a:rPr>
-              <a:t>l</a:t>
-            </a:r>
-            <a:r>
-              <a:rPr lang="en-US" sz="4400" b="0" u="none" strike="noStrike">
-                <a:solidFill>
-                  <a:schemeClr val="dk1"/>
-                </a:solidFill>
-                <a:effectLst/>
-                <a:uFillTx/>
-                <a:latin typeface="TradeGothic"/>
-                <a:ea typeface="ＭＳ Ｐゴシック"/>
-              </a:rPr>
-              <a:t>e</a:t>
-            </a:r>
-            <a:r>
-              <a:rPr lang="en-US" sz="4400" b="0" u="none" strike="noStrike">
-                <a:solidFill>
-                  <a:schemeClr val="dk1"/>
-                </a:solidFill>
-                <a:effectLst/>
-                <a:uFillTx/>
-                <a:latin typeface="TradeGothic"/>
-                <a:ea typeface="ＭＳ Ｐゴシック"/>
-              </a:rPr>
-              <a:t> </a:t>
-            </a:r>
-            <a:r>
-              <a:rPr lang="en-US" sz="4400" b="0" u="none" strike="noStrike">
-                <a:solidFill>
-                  <a:schemeClr val="dk1"/>
-                </a:solidFill>
-                <a:effectLst/>
-                <a:uFillTx/>
-                <a:latin typeface="TradeGothic"/>
-                <a:ea typeface="ＭＳ Ｐゴシック"/>
-              </a:rPr>
-              <a:t>s</a:t>
-            </a:r>
-            <a:r>
-              <a:rPr lang="en-US" sz="4400" b="0" u="none" strike="noStrike">
-                <a:solidFill>
-                  <a:schemeClr val="dk1"/>
-                </a:solidFill>
-                <a:effectLst/>
-                <a:uFillTx/>
-                <a:latin typeface="TradeGothic"/>
-                <a:ea typeface="ＭＳ Ｐゴシック"/>
-              </a:rPr>
-              <a:t>t</a:t>
-            </a:r>
-            <a:r>
-              <a:rPr lang="en-US" sz="4400" b="0" u="none" strike="noStrike">
-                <a:solidFill>
-                  <a:schemeClr val="dk1"/>
-                </a:solidFill>
-                <a:effectLst/>
-                <a:uFillTx/>
-                <a:latin typeface="TradeGothic"/>
-                <a:ea typeface="ＭＳ Ｐゴシック"/>
-              </a:rPr>
-              <a:t>y</a:t>
-            </a:r>
-            <a:r>
-              <a:rPr lang="en-US" sz="4400" b="0" u="none" strike="noStrike">
-                <a:solidFill>
-                  <a:schemeClr val="dk1"/>
-                </a:solidFill>
-                <a:effectLst/>
-                <a:uFillTx/>
-                <a:latin typeface="TradeGothic"/>
-                <a:ea typeface="ＭＳ Ｐゴシック"/>
-              </a:rPr>
-              <a:t>l</a:t>
-            </a:r>
-            <a:r>
-              <a:rPr lang="en-US" sz="4400" b="0" u="none" strike="noStrike">
-                <a:solidFill>
-                  <a:schemeClr val="dk1"/>
-                </a:solidFill>
-                <a:effectLst/>
-                <a:uFillTx/>
-                <a:latin typeface="TradeGothic"/>
-                <a:ea typeface="ＭＳ Ｐゴシック"/>
-              </a:rPr>
-              <a:t>e</a:t>
+              <a:t>Click to edit Master title style</a:t>
             </a:r>
             <a:endParaRPr lang="en-US" sz="4400" b="0" u="none" strike="noStrike">
               <a:solidFill>
@@ -4250,7 +4091,7 @@
           </a:ln>
         </p:spPr>
         <p:txBody>
-          <a:bodyPr numCol="1" spcCol="0" lIns="91440" tIns="45720" rIns="91440" bIns="45720" anchor="t" vert="eaVert">
+          <a:bodyPr vert="eaVert" lIns="91440" tIns="45720" rIns="91440" bIns="45720" numCol="1" spcCol="0" anchor="t">
             <a:noAutofit/>
           </a:bodyPr>
           <a:lstStyle>
@@ -4566,7 +4407,7 @@
           </a:ln>
         </p:spPr>
         <p:txBody>
-          <a:bodyPr numCol="1" spcCol="0" lIns="91440" tIns="45720" rIns="91440" bIns="45720" anchor="ctr">
+          <a:bodyPr lIns="91440" tIns="45720" rIns="91440" bIns="45720" numCol="1" spcCol="0" anchor="ctr">
             <a:noAutofit/>
           </a:bodyPr>
           <a:lstStyle>
@@ -4716,7 +4557,7 @@
           </a:ln>
         </p:spPr>
         <p:txBody>
-          <a:bodyPr numCol="1" spcCol="0" lIns="91440" tIns="45720" rIns="91440" bIns="45720" anchor="ctr">
+          <a:bodyPr lIns="91440" tIns="45720" rIns="91440" bIns="45720" numCol="1" spcCol="0" anchor="ctr">
             <a:noAutofit/>
           </a:bodyPr>
           <a:lstStyle>
@@ -4753,7 +4594,7 @@
                 <a:latin typeface="TradeGothic"/>
                 <a:ea typeface="ＭＳ Ｐゴシック"/>
               </a:rPr>
-              <a:t>&lt;number&gt;</a:t>
+              <a:t>‹#›</a:t>
             </a:fld>
             <a:endParaRPr lang="en-US" sz="1200" b="0" u="none" strike="noStrike">
               <a:solidFill>
@@ -4775,13 +4616,14 @@
 </file>
 
 <file path=ppt/slideLayouts/slideLayout4.xml><?xml version="1.0" encoding="utf-8"?>
-<p:sldLayout xmlns:a="http://schemas.openxmlformats.org/drawingml/2006/main" xmlns:p="http://schemas.openxmlformats.org/presentationml/2006/main" xmlns:r="http://schemas.openxmlformats.org/officeDocument/2006/relationships" xmlns:p14="http://schemas.microsoft.com/office/powerpoint/2010/main" xmlns:p15="http://schemas.microsoft.com/office/powerpoint/2012/main" xmlns:mc="http://schemas.openxmlformats.org/markup-compatibility/2006" type="obj" preserve="1">
+<p:sldLayout xmlns:a="http://schemas.openxmlformats.org/drawingml/2006/main" xmlns:r="http://schemas.openxmlformats.org/officeDocument/2006/relationships" xmlns:p="http://schemas.openxmlformats.org/presentationml/2006/main" type="obj" preserve="1">
   <p:cSld name="Title and Content">
     <p:bg>
       <p:bgPr>
         <a:solidFill>
           <a:srgbClr val="FFFFFF"/>
         </a:solidFill>
+        <a:effectLst/>
       </p:bgPr>
     </p:bg>
     <p:spTree>
@@ -4822,7 +4664,7 @@
           </a:ln>
         </p:spPr>
         <p:txBody>
-          <a:bodyPr numCol="1" spcCol="0" lIns="91440" tIns="45720" rIns="91440" bIns="45720" anchor="ctr">
+          <a:bodyPr lIns="91440" tIns="45720" rIns="91440" bIns="45720" numCol="1" spcCol="0" anchor="ctr">
             <a:noAutofit/>
           </a:bodyPr>
           <a:lstStyle>
@@ -4896,7 +4738,7 @@
           </a:ln>
         </p:spPr>
         <p:txBody>
-          <a:bodyPr numCol="1" spcCol="0" lIns="91440" tIns="45720" rIns="91440" bIns="45720" anchor="t">
+          <a:bodyPr lIns="91440" tIns="45720" rIns="91440" bIns="45720" numCol="1" spcCol="0" anchor="t">
             <a:noAutofit/>
           </a:bodyPr>
           <a:lstStyle>
@@ -5212,7 +5054,7 @@
           </a:ln>
         </p:spPr>
         <p:txBody>
-          <a:bodyPr numCol="1" spcCol="0" lIns="91440" tIns="45720" rIns="91440" bIns="45720" anchor="ctr">
+          <a:bodyPr lIns="91440" tIns="45720" rIns="91440" bIns="45720" numCol="1" spcCol="0" anchor="ctr">
             <a:noAutofit/>
           </a:bodyPr>
           <a:lstStyle>
@@ -5362,7 +5204,7 @@
           </a:ln>
         </p:spPr>
         <p:txBody>
-          <a:bodyPr numCol="1" spcCol="0" lIns="91440" tIns="45720" rIns="91440" bIns="45720" anchor="ctr">
+          <a:bodyPr lIns="91440" tIns="45720" rIns="91440" bIns="45720" numCol="1" spcCol="0" anchor="ctr">
             <a:noAutofit/>
           </a:bodyPr>
           <a:lstStyle>
@@ -5399,7 +5241,7 @@
                 <a:latin typeface="TradeGothic"/>
                 <a:ea typeface="ＭＳ Ｐゴシック"/>
               </a:rPr>
-              <a:t>&lt;number&gt;</a:t>
+              <a:t>‹#›</a:t>
             </a:fld>
             <a:endParaRPr lang="en-US" sz="1200" b="0" u="none" strike="noStrike">
               <a:solidFill>
@@ -5421,13 +5263,14 @@
 </file>
 
 <file path=ppt/slideLayouts/slideLayout5.xml><?xml version="1.0" encoding="utf-8"?>
-<p:sldLayout xmlns:a="http://schemas.openxmlformats.org/drawingml/2006/main" xmlns:p="http://schemas.openxmlformats.org/presentationml/2006/main" xmlns:r="http://schemas.openxmlformats.org/officeDocument/2006/relationships" xmlns:p14="http://schemas.microsoft.com/office/powerpoint/2010/main" xmlns:p15="http://schemas.microsoft.com/office/powerpoint/2012/main" xmlns:mc="http://schemas.openxmlformats.org/markup-compatibility/2006" type="blank" preserve="1">
+<p:sldLayout xmlns:a="http://schemas.openxmlformats.org/drawingml/2006/main" xmlns:r="http://schemas.openxmlformats.org/officeDocument/2006/relationships" xmlns:p="http://schemas.openxmlformats.org/presentationml/2006/main" type="blank" preserve="1">
   <p:cSld name="Section Header">
     <p:bg>
       <p:bgPr>
         <a:solidFill>
           <a:srgbClr val="FFFFFF"/>
         </a:solidFill>
+        <a:effectLst/>
       </p:bgPr>
     </p:bg>
     <p:spTree>
@@ -5468,7 +5311,7 @@
           </a:ln>
         </p:spPr>
         <p:txBody>
-          <a:bodyPr numCol="1" spcCol="0" lIns="91440" tIns="45720" rIns="91440" bIns="45720" anchor="t">
+          <a:bodyPr lIns="91440" tIns="45720" rIns="91440" bIns="45720" numCol="1" spcCol="0" anchor="t">
             <a:noAutofit/>
           </a:bodyPr>
           <a:lstStyle>
@@ -5542,7 +5385,7 @@
           </a:ln>
         </p:spPr>
         <p:txBody>
-          <a:bodyPr numCol="1" spcCol="0" lIns="91440" tIns="45720" rIns="91440" bIns="45720" anchor="b">
+          <a:bodyPr lIns="91440" tIns="45720" rIns="91440" bIns="45720" numCol="1" spcCol="0" anchor="b">
             <a:noAutofit/>
           </a:bodyPr>
           <a:lstStyle>
@@ -5634,7 +5477,7 @@
           </a:ln>
         </p:spPr>
         <p:txBody>
-          <a:bodyPr numCol="1" spcCol="0" lIns="91440" tIns="45720" rIns="91440" bIns="45720" anchor="ctr">
+          <a:bodyPr lIns="91440" tIns="45720" rIns="91440" bIns="45720" numCol="1" spcCol="0" anchor="ctr">
             <a:noAutofit/>
           </a:bodyPr>
           <a:lstStyle>
@@ -5784,7 +5627,7 @@
           </a:ln>
         </p:spPr>
         <p:txBody>
-          <a:bodyPr numCol="1" spcCol="0" lIns="91440" tIns="45720" rIns="91440" bIns="45720" anchor="ctr">
+          <a:bodyPr lIns="91440" tIns="45720" rIns="91440" bIns="45720" numCol="1" spcCol="0" anchor="ctr">
             <a:noAutofit/>
           </a:bodyPr>
           <a:lstStyle>
@@ -5821,7 +5664,7 @@
                 <a:latin typeface="TradeGothic"/>
                 <a:ea typeface="ＭＳ Ｐゴシック"/>
               </a:rPr>
-              <a:t>&lt;number&gt;</a:t>
+              <a:t>‹#›</a:t>
             </a:fld>
             <a:endParaRPr lang="en-US" sz="1200" b="0" u="none" strike="noStrike">
               <a:solidFill>
@@ -5843,13 +5686,14 @@
 </file>
 
 <file path=ppt/slideLayouts/slideLayout6.xml><?xml version="1.0" encoding="utf-8"?>
-<p:sldLayout xmlns:a="http://schemas.openxmlformats.org/drawingml/2006/main" xmlns:p="http://schemas.openxmlformats.org/presentationml/2006/main" xmlns:r="http://schemas.openxmlformats.org/officeDocument/2006/relationships" xmlns:p14="http://schemas.microsoft.com/office/powerpoint/2010/main" xmlns:p15="http://schemas.microsoft.com/office/powerpoint/2012/main" xmlns:mc="http://schemas.openxmlformats.org/markup-compatibility/2006" type="twoObj" preserve="1">
+<p:sldLayout xmlns:a="http://schemas.openxmlformats.org/drawingml/2006/main" xmlns:r="http://schemas.openxmlformats.org/officeDocument/2006/relationships" xmlns:p="http://schemas.openxmlformats.org/presentationml/2006/main" type="twoObj" preserve="1">
   <p:cSld name="Two Content">
     <p:bg>
       <p:bgPr>
         <a:solidFill>
           <a:srgbClr val="FFFFFF"/>
         </a:solidFill>
+        <a:effectLst/>
       </p:bgPr>
     </p:bg>
     <p:spTree>
@@ -5890,7 +5734,7 @@
           </a:ln>
         </p:spPr>
         <p:txBody>
-          <a:bodyPr numCol="1" spcCol="0" lIns="91440" tIns="45720" rIns="91440" bIns="45720" anchor="ctr">
+          <a:bodyPr lIns="91440" tIns="45720" rIns="91440" bIns="45720" numCol="1" spcCol="0" anchor="ctr">
             <a:noAutofit/>
           </a:bodyPr>
           <a:lstStyle>
@@ -5927,43 +5771,7 @@
                 <a:latin typeface="TradeGothic"/>
                 <a:ea typeface="ＭＳ Ｐゴシック"/>
               </a:rPr>
-              <a:t>Click to </a:t>
-            </a:r>
-            <a:r>
-              <a:rPr lang="en-US" sz="4400" b="0" u="none" strike="noStrike">
-                <a:solidFill>
-                  <a:schemeClr val="dk1"/>
-                </a:solidFill>
-                <a:effectLst/>
-                <a:uFillTx/>
-                <a:latin typeface="TradeGothic"/>
-                <a:ea typeface="ＭＳ Ｐゴシック"/>
-              </a:rPr>
-              <a:t>edit </a:t>
-            </a:r>
-            <a:r>
-              <a:rPr lang="en-US" sz="4400" b="0" u="none" strike="noStrike">
-                <a:solidFill>
-                  <a:schemeClr val="dk1"/>
-                </a:solidFill>
-                <a:effectLst/>
-                <a:uFillTx/>
-                <a:latin typeface="TradeGothic"/>
-                <a:ea typeface="ＭＳ Ｐゴシック"/>
-              </a:rPr>
-              <a:t>Master </a:t>
-            </a:r>
-            <a:r>
-              <a:rPr lang="en-US" sz="4400" b="0" u="none" strike="noStrike">
-                <a:solidFill>
-                  <a:schemeClr val="dk1"/>
-                </a:solidFill>
-                <a:effectLst/>
-                <a:uFillTx/>
-                <a:latin typeface="TradeGothic"/>
-                <a:ea typeface="ＭＳ Ｐゴシック"/>
-              </a:rPr>
-              <a:t>title style</a:t>
+              <a:t>Click to edit Master title style</a:t>
             </a:r>
             <a:endParaRPr lang="en-US" sz="4400" b="0" u="none" strike="noStrike">
               <a:solidFill>
@@ -6000,7 +5808,7 @@
           </a:ln>
         </p:spPr>
         <p:txBody>
-          <a:bodyPr numCol="1" spcCol="0" lIns="91440" tIns="45720" rIns="91440" bIns="45720" anchor="t">
+          <a:bodyPr lIns="91440" tIns="45720" rIns="91440" bIns="45720" numCol="1" spcCol="0" anchor="t">
             <a:noAutofit/>
           </a:bodyPr>
           <a:lstStyle>
@@ -6316,7 +6124,7 @@
           </a:ln>
         </p:spPr>
         <p:txBody>
-          <a:bodyPr numCol="1" spcCol="0" lIns="91440" tIns="45720" rIns="91440" bIns="45720" anchor="t">
+          <a:bodyPr lIns="91440" tIns="45720" rIns="91440" bIns="45720" numCol="1" spcCol="0" anchor="t">
             <a:noAutofit/>
           </a:bodyPr>
           <a:lstStyle>
@@ -6632,7 +6440,7 @@
           </a:ln>
         </p:spPr>
         <p:txBody>
-          <a:bodyPr numCol="1" spcCol="0" lIns="91440" tIns="45720" rIns="91440" bIns="45720" anchor="ctr">
+          <a:bodyPr lIns="91440" tIns="45720" rIns="91440" bIns="45720" numCol="1" spcCol="0" anchor="ctr">
             <a:noAutofit/>
           </a:bodyPr>
           <a:lstStyle>
@@ -6782,7 +6590,7 @@
           </a:ln>
         </p:spPr>
         <p:txBody>
-          <a:bodyPr numCol="1" spcCol="0" lIns="91440" tIns="45720" rIns="91440" bIns="45720" anchor="ctr">
+          <a:bodyPr lIns="91440" tIns="45720" rIns="91440" bIns="45720" numCol="1" spcCol="0" anchor="ctr">
             <a:noAutofit/>
           </a:bodyPr>
           <a:lstStyle>
@@ -6819,7 +6627,7 @@
                 <a:latin typeface="TradeGothic"/>
                 <a:ea typeface="ＭＳ Ｐゴシック"/>
               </a:rPr>
-              <a:t>&lt;number&gt;</a:t>
+              <a:t>‹#›</a:t>
             </a:fld>
             <a:endParaRPr lang="en-US" sz="1200" b="0" u="none" strike="noStrike">
               <a:solidFill>
@@ -6841,13 +6649,14 @@
 </file>
 
 <file path=ppt/slideLayouts/slideLayout7.xml><?xml version="1.0" encoding="utf-8"?>
-<p:sldLayout xmlns:a="http://schemas.openxmlformats.org/drawingml/2006/main" xmlns:p="http://schemas.openxmlformats.org/presentationml/2006/main" xmlns:r="http://schemas.openxmlformats.org/officeDocument/2006/relationships" xmlns:p14="http://schemas.microsoft.com/office/powerpoint/2010/main" xmlns:p15="http://schemas.microsoft.com/office/powerpoint/2012/main" xmlns:mc="http://schemas.openxmlformats.org/markup-compatibility/2006" type="blank" preserve="1">
+<p:sldLayout xmlns:a="http://schemas.openxmlformats.org/drawingml/2006/main" xmlns:r="http://schemas.openxmlformats.org/officeDocument/2006/relationships" xmlns:p="http://schemas.openxmlformats.org/presentationml/2006/main" type="blank" preserve="1">
   <p:cSld name="Comparison">
     <p:bg>
       <p:bgPr>
         <a:solidFill>
           <a:srgbClr val="FFFFFF"/>
         </a:solidFill>
+        <a:effectLst/>
       </p:bgPr>
     </p:bg>
     <p:spTree>
@@ -6888,7 +6697,7 @@
           </a:ln>
         </p:spPr>
         <p:txBody>
-          <a:bodyPr numCol="1" spcCol="0" lIns="91440" tIns="45720" rIns="91440" bIns="45720" anchor="ctr">
+          <a:bodyPr lIns="91440" tIns="45720" rIns="91440" bIns="45720" numCol="1" spcCol="0" anchor="ctr">
             <a:noAutofit/>
           </a:bodyPr>
           <a:lstStyle>
@@ -6962,7 +6771,7 @@
           </a:ln>
         </p:spPr>
         <p:txBody>
-          <a:bodyPr numCol="1" spcCol="0" lIns="91440" tIns="45720" rIns="91440" bIns="45720" anchor="b">
+          <a:bodyPr lIns="91440" tIns="45720" rIns="91440" bIns="45720" numCol="1" spcCol="0" anchor="b">
             <a:noAutofit/>
           </a:bodyPr>
           <a:lstStyle>
@@ -7048,7 +6857,7 @@
           </a:ln>
         </p:spPr>
         <p:txBody>
-          <a:bodyPr numCol="1" spcCol="0" lIns="91440" tIns="45720" rIns="91440" bIns="45720" anchor="t">
+          <a:bodyPr lIns="91440" tIns="45720" rIns="91440" bIns="45720" numCol="1" spcCol="0" anchor="t">
             <a:noAutofit/>
           </a:bodyPr>
           <a:lstStyle>
@@ -7394,7 +7203,7 @@
           </a:ln>
         </p:spPr>
         <p:txBody>
-          <a:bodyPr numCol="1" spcCol="0" lIns="91440" tIns="45720" rIns="91440" bIns="45720" anchor="b">
+          <a:bodyPr lIns="91440" tIns="45720" rIns="91440" bIns="45720" numCol="1" spcCol="0" anchor="b">
             <a:noAutofit/>
           </a:bodyPr>
           <a:lstStyle>
@@ -7480,7 +7289,7 @@
           </a:ln>
         </p:spPr>
         <p:txBody>
-          <a:bodyPr numCol="1" spcCol="0" lIns="91440" tIns="45720" rIns="91440" bIns="45720" anchor="t">
+          <a:bodyPr lIns="91440" tIns="45720" rIns="91440" bIns="45720" numCol="1" spcCol="0" anchor="t">
             <a:noAutofit/>
           </a:bodyPr>
           <a:lstStyle>
@@ -7826,7 +7635,7 @@
           </a:ln>
         </p:spPr>
         <p:txBody>
-          <a:bodyPr numCol="1" spcCol="0" lIns="91440" tIns="45720" rIns="91440" bIns="45720" anchor="ctr">
+          <a:bodyPr lIns="91440" tIns="45720" rIns="91440" bIns="45720" numCol="1" spcCol="0" anchor="ctr">
             <a:noAutofit/>
           </a:bodyPr>
           <a:lstStyle>
@@ -7976,7 +7785,7 @@
           </a:ln>
         </p:spPr>
         <p:txBody>
-          <a:bodyPr numCol="1" spcCol="0" lIns="91440" tIns="45720" rIns="91440" bIns="45720" anchor="ctr">
+          <a:bodyPr lIns="91440" tIns="45720" rIns="91440" bIns="45720" numCol="1" spcCol="0" anchor="ctr">
             <a:noAutofit/>
           </a:bodyPr>
           <a:lstStyle>
@@ -8013,7 +7822,7 @@
                 <a:latin typeface="TradeGothic"/>
                 <a:ea typeface="ＭＳ Ｐゴシック"/>
               </a:rPr>
-              <a:t>&lt;number&gt;</a:t>
+              <a:t>‹#›</a:t>
             </a:fld>
             <a:endParaRPr lang="en-US" sz="1200" b="0" u="none" strike="noStrike">
               <a:solidFill>
@@ -8035,13 +7844,14 @@
 </file>
 
 <file path=ppt/slideLayouts/slideLayout8.xml><?xml version="1.0" encoding="utf-8"?>
-<p:sldLayout xmlns:a="http://schemas.openxmlformats.org/drawingml/2006/main" xmlns:p="http://schemas.openxmlformats.org/presentationml/2006/main" xmlns:r="http://schemas.openxmlformats.org/officeDocument/2006/relationships" xmlns:p14="http://schemas.microsoft.com/office/powerpoint/2010/main" xmlns:p15="http://schemas.microsoft.com/office/powerpoint/2012/main" xmlns:mc="http://schemas.openxmlformats.org/markup-compatibility/2006" type="titleOnly" preserve="1">
+<p:sldLayout xmlns:a="http://schemas.openxmlformats.org/drawingml/2006/main" xmlns:r="http://schemas.openxmlformats.org/officeDocument/2006/relationships" xmlns:p="http://schemas.openxmlformats.org/presentationml/2006/main" type="titleOnly" preserve="1">
   <p:cSld name="Title Only">
     <p:bg>
       <p:bgPr>
         <a:solidFill>
           <a:srgbClr val="FFFFFF"/>
         </a:solidFill>
+        <a:effectLst/>
       </p:bgPr>
     </p:bg>
     <p:spTree>
@@ -8082,7 +7892,7 @@
           </a:ln>
         </p:spPr>
         <p:txBody>
-          <a:bodyPr numCol="1" spcCol="0" lIns="91440" tIns="45720" rIns="91440" bIns="45720" anchor="ctr">
+          <a:bodyPr lIns="91440" tIns="45720" rIns="91440" bIns="45720" numCol="1" spcCol="0" anchor="ctr">
             <a:noAutofit/>
           </a:bodyPr>
           <a:lstStyle>
@@ -8119,31 +7929,7 @@
                 <a:latin typeface="TradeGothic"/>
                 <a:ea typeface="ＭＳ Ｐゴシック"/>
               </a:rPr>
-              <a:t>Click to </a:t>
-            </a:r>
-            <a:r>
-              <a:rPr lang="en-US" sz="4400" b="0" u="none" strike="noStrike">
-                <a:solidFill>
-                  <a:schemeClr val="dk1"/>
-                </a:solidFill>
-                <a:effectLst/>
-                <a:uFillTx/>
-                <a:latin typeface="TradeGothic"/>
-                <a:ea typeface="ＭＳ Ｐゴシック"/>
-              </a:rPr>
-              <a:t>edit Master </a:t>
-            </a:r>
-            <a:r>
-              <a:rPr lang="en-US" sz="4400" b="0" u="none" strike="noStrike">
-                <a:solidFill>
-                  <a:schemeClr val="dk1"/>
-                </a:solidFill>
-                <a:effectLst/>
-                <a:uFillTx/>
-                <a:latin typeface="TradeGothic"/>
-                <a:ea typeface="ＭＳ Ｐゴシック"/>
-              </a:rPr>
-              <a:t>title style</a:t>
+              <a:t>Click to edit Master title style</a:t>
             </a:r>
             <a:endParaRPr lang="en-US" sz="4400" b="0" u="none" strike="noStrike">
               <a:solidFill>
@@ -8180,7 +7966,7 @@
           </a:ln>
         </p:spPr>
         <p:txBody>
-          <a:bodyPr numCol="1" spcCol="0" lIns="91440" tIns="45720" rIns="91440" bIns="45720" anchor="ctr">
+          <a:bodyPr lIns="91440" tIns="45720" rIns="91440" bIns="45720" numCol="1" spcCol="0" anchor="ctr">
             <a:noAutofit/>
           </a:bodyPr>
           <a:lstStyle>
@@ -8330,7 +8116,7 @@
           </a:ln>
         </p:spPr>
         <p:txBody>
-          <a:bodyPr numCol="1" spcCol="0" lIns="91440" tIns="45720" rIns="91440" bIns="45720" anchor="ctr">
+          <a:bodyPr lIns="91440" tIns="45720" rIns="91440" bIns="45720" numCol="1" spcCol="0" anchor="ctr">
             <a:noAutofit/>
           </a:bodyPr>
           <a:lstStyle>
@@ -8367,7 +8153,7 @@
                 <a:latin typeface="TradeGothic"/>
                 <a:ea typeface="ＭＳ Ｐゴシック"/>
               </a:rPr>
-              <a:t>&lt;number&gt;</a:t>
+              <a:t>‹#›</a:t>
             </a:fld>
             <a:endParaRPr lang="en-US" sz="1200" b="0" u="none" strike="noStrike">
               <a:solidFill>
@@ -8389,13 +8175,14 @@
 </file>
 
 <file path=ppt/slideLayouts/slideLayout9.xml><?xml version="1.0" encoding="utf-8"?>
-<p:sldLayout xmlns:a="http://schemas.openxmlformats.org/drawingml/2006/main" xmlns:p="http://schemas.openxmlformats.org/presentationml/2006/main" xmlns:r="http://schemas.openxmlformats.org/officeDocument/2006/relationships" xmlns:p14="http://schemas.microsoft.com/office/powerpoint/2010/main" xmlns:p15="http://schemas.microsoft.com/office/powerpoint/2012/main" xmlns:mc="http://schemas.openxmlformats.org/markup-compatibility/2006" type="blank" preserve="1">
+<p:sldLayout xmlns:a="http://schemas.openxmlformats.org/drawingml/2006/main" xmlns:r="http://schemas.openxmlformats.org/officeDocument/2006/relationships" xmlns:p="http://schemas.openxmlformats.org/presentationml/2006/main" type="blank" preserve="1">
   <p:cSld name="Blank">
     <p:bg>
       <p:bgPr>
         <a:solidFill>
           <a:srgbClr val="FFFFFF"/>
         </a:solidFill>
+        <a:effectLst/>
       </p:bgPr>
     </p:bg>
     <p:spTree>
@@ -8436,7 +8223,7 @@
           </a:ln>
         </p:spPr>
         <p:txBody>
-          <a:bodyPr numCol="1" spcCol="0" lIns="91440" tIns="45720" rIns="91440" bIns="45720" anchor="ctr">
+          <a:bodyPr lIns="91440" tIns="45720" rIns="91440" bIns="45720" numCol="1" spcCol="0" anchor="ctr">
             <a:noAutofit/>
           </a:bodyPr>
           <a:lstStyle>
@@ -8586,7 +8373,7 @@
           </a:ln>
         </p:spPr>
         <p:txBody>
-          <a:bodyPr numCol="1" spcCol="0" lIns="91440" tIns="45720" rIns="91440" bIns="45720" anchor="ctr">
+          <a:bodyPr lIns="91440" tIns="45720" rIns="91440" bIns="45720" numCol="1" spcCol="0" anchor="ctr">
             <a:noAutofit/>
           </a:bodyPr>
           <a:lstStyle>
@@ -8623,7 +8410,7 @@
                 <a:latin typeface="TradeGothic"/>
                 <a:ea typeface="ＭＳ Ｐゴシック"/>
               </a:rPr>
-              <a:t>&lt;number&gt;</a:t>
+              <a:t>‹#›</a:t>
             </a:fld>
             <a:endParaRPr lang="en-US" sz="1200" b="0" u="none" strike="noStrike">
               <a:solidFill>
@@ -8645,8 +8432,13 @@
 </file>
 
 <file path=ppt/slideMasters/slideMaster1.xml><?xml version="1.0" encoding="utf-8"?>
-<p:sldMaster xmlns:a="http://schemas.openxmlformats.org/drawingml/2006/main" xmlns:p="http://schemas.openxmlformats.org/presentationml/2006/main" xmlns:r="http://schemas.openxmlformats.org/officeDocument/2006/relationships" xmlns:p14="http://schemas.microsoft.com/office/powerpoint/2010/main" xmlns:p15="http://schemas.microsoft.com/office/powerpoint/2012/main" xmlns:mc="http://schemas.openxmlformats.org/markup-compatibility/2006">
+<p:sldMaster xmlns:a="http://schemas.openxmlformats.org/drawingml/2006/main" xmlns:r="http://schemas.openxmlformats.org/officeDocument/2006/relationships" xmlns:p="http://schemas.openxmlformats.org/presentationml/2006/main">
   <p:cSld>
+    <p:bg>
+      <p:bgRef idx="1001">
+        <a:schemeClr val="bg1"/>
+      </p:bgRef>
+    </p:bg>
     <p:spTree>
       <p:nvGrpSpPr>
         <p:cNvPr id="1" name=""/>
@@ -8665,29 +8457,310 @@
   </p:cSld>
   <p:clrMap bg1="lt1" tx1="dk1" bg2="lt2" tx2="dk2" accent1="accent1" accent2="accent2" accent3="accent3" accent4="accent4" accent5="accent5" accent6="accent6" hlink="hlink" folHlink="folHlink"/>
   <p:sldLayoutIdLst>
-    <p:sldLayoutId id="2147483649" r:id="rId2"/>
-    <p:sldLayoutId id="2147483650" r:id="rId3"/>
-    <p:sldLayoutId id="2147483651" r:id="rId4"/>
-    <p:sldLayoutId id="2147483652" r:id="rId5"/>
-    <p:sldLayoutId id="2147483653" r:id="rId6"/>
-    <p:sldLayoutId id="2147483654" r:id="rId7"/>
-    <p:sldLayoutId id="2147483655" r:id="rId8"/>
-    <p:sldLayoutId id="2147483656" r:id="rId9"/>
-    <p:sldLayoutId id="2147483657" r:id="rId10"/>
-    <p:sldLayoutId id="2147483658" r:id="rId11"/>
-    <p:sldLayoutId id="2147483659" r:id="rId12"/>
+    <p:sldLayoutId id="2147483649" r:id="rId1"/>
+    <p:sldLayoutId id="2147483650" r:id="rId2"/>
+    <p:sldLayoutId id="2147483651" r:id="rId3"/>
+    <p:sldLayoutId id="2147483652" r:id="rId4"/>
+    <p:sldLayoutId id="2147483653" r:id="rId5"/>
+    <p:sldLayoutId id="2147483654" r:id="rId6"/>
+    <p:sldLayoutId id="2147483655" r:id="rId7"/>
+    <p:sldLayoutId id="2147483656" r:id="rId8"/>
+    <p:sldLayoutId id="2147483657" r:id="rId9"/>
+    <p:sldLayoutId id="2147483658" r:id="rId10"/>
+    <p:sldLayoutId id="2147483659" r:id="rId11"/>
   </p:sldLayoutIdLst>
+  <p:txStyles>
+    <p:titleStyle>
+      <a:lvl1pPr algn="l" defTabSz="914400" rtl="0" eaLnBrk="1" latinLnBrk="0" hangingPunct="1">
+        <a:lnSpc>
+          <a:spcPct val="90000"/>
+        </a:lnSpc>
+        <a:spcBef>
+          <a:spcPct val="0"/>
+        </a:spcBef>
+        <a:buNone/>
+        <a:defRPr sz="4400" kern="1200">
+          <a:solidFill>
+            <a:schemeClr val="tx1"/>
+          </a:solidFill>
+          <a:latin typeface="+mj-lt"/>
+          <a:ea typeface="+mj-ea"/>
+          <a:cs typeface="+mj-cs"/>
+        </a:defRPr>
+      </a:lvl1pPr>
+    </p:titleStyle>
+    <p:bodyStyle>
+      <a:lvl1pPr marL="228600" indent="-228600" algn="l" defTabSz="914400" rtl="0" eaLnBrk="1" latinLnBrk="0" hangingPunct="1">
+        <a:lnSpc>
+          <a:spcPct val="90000"/>
+        </a:lnSpc>
+        <a:spcBef>
+          <a:spcPts val="1000"/>
+        </a:spcBef>
+        <a:buFont typeface="Arial" panose="020B0604020202020204" pitchFamily="34" charset="0"/>
+        <a:buChar char="•"/>
+        <a:defRPr sz="2800" kern="1200">
+          <a:solidFill>
+            <a:schemeClr val="tx1"/>
+          </a:solidFill>
+          <a:latin typeface="+mn-lt"/>
+          <a:ea typeface="+mn-ea"/>
+          <a:cs typeface="+mn-cs"/>
+        </a:defRPr>
+      </a:lvl1pPr>
+      <a:lvl2pPr marL="685800" indent="-228600" algn="l" defTabSz="914400" rtl="0" eaLnBrk="1" latinLnBrk="0" hangingPunct="1">
+        <a:lnSpc>
+          <a:spcPct val="90000"/>
+        </a:lnSpc>
+        <a:spcBef>
+          <a:spcPts val="500"/>
+        </a:spcBef>
+        <a:buFont typeface="Arial" panose="020B0604020202020204" pitchFamily="34" charset="0"/>
+        <a:buChar char="•"/>
+        <a:defRPr sz="2400" kern="1200">
+          <a:solidFill>
+            <a:schemeClr val="tx1"/>
+          </a:solidFill>
+          <a:latin typeface="+mn-lt"/>
+          <a:ea typeface="+mn-ea"/>
+          <a:cs typeface="+mn-cs"/>
+        </a:defRPr>
+      </a:lvl2pPr>
+      <a:lvl3pPr marL="1143000" indent="-228600" algn="l" defTabSz="914400" rtl="0" eaLnBrk="1" latinLnBrk="0" hangingPunct="1">
+        <a:lnSpc>
+          <a:spcPct val="90000"/>
+        </a:lnSpc>
+        <a:spcBef>
+          <a:spcPts val="500"/>
+        </a:spcBef>
+        <a:buFont typeface="Arial" panose="020B0604020202020204" pitchFamily="34" charset="0"/>
+        <a:buChar char="•"/>
+        <a:defRPr sz="2000" kern="1200">
+          <a:solidFill>
+            <a:schemeClr val="tx1"/>
+          </a:solidFill>
+          <a:latin typeface="+mn-lt"/>
+          <a:ea typeface="+mn-ea"/>
+          <a:cs typeface="+mn-cs"/>
+        </a:defRPr>
+      </a:lvl3pPr>
+      <a:lvl4pPr marL="1600200" indent="-228600" algn="l" defTabSz="914400" rtl="0" eaLnBrk="1" latinLnBrk="0" hangingPunct="1">
+        <a:lnSpc>
+          <a:spcPct val="90000"/>
+        </a:lnSpc>
+        <a:spcBef>
+          <a:spcPts val="500"/>
+        </a:spcBef>
+        <a:buFont typeface="Arial" panose="020B0604020202020204" pitchFamily="34" charset="0"/>
+        <a:buChar char="•"/>
+        <a:defRPr sz="1800" kern="1200">
+          <a:solidFill>
+            <a:schemeClr val="tx1"/>
+          </a:solidFill>
+          <a:latin typeface="+mn-lt"/>
+          <a:ea typeface="+mn-ea"/>
+          <a:cs typeface="+mn-cs"/>
+        </a:defRPr>
+      </a:lvl4pPr>
+      <a:lvl5pPr marL="2057400" indent="-228600" algn="l" defTabSz="914400" rtl="0" eaLnBrk="1" latinLnBrk="0" hangingPunct="1">
+        <a:lnSpc>
+          <a:spcPct val="90000"/>
+        </a:lnSpc>
+        <a:spcBef>
+          <a:spcPts val="500"/>
+        </a:spcBef>
+        <a:buFont typeface="Arial" panose="020B0604020202020204" pitchFamily="34" charset="0"/>
+        <a:buChar char="•"/>
+        <a:defRPr sz="1800" kern="1200">
+          <a:solidFill>
+            <a:schemeClr val="tx1"/>
+          </a:solidFill>
+          <a:latin typeface="+mn-lt"/>
+          <a:ea typeface="+mn-ea"/>
+          <a:cs typeface="+mn-cs"/>
+        </a:defRPr>
+      </a:lvl5pPr>
+      <a:lvl6pPr marL="2514600" indent="-228600" algn="l" defTabSz="914400" rtl="0" eaLnBrk="1" latinLnBrk="0" hangingPunct="1">
+        <a:lnSpc>
+          <a:spcPct val="90000"/>
+        </a:lnSpc>
+        <a:spcBef>
+          <a:spcPts val="500"/>
+        </a:spcBef>
+        <a:buFont typeface="Arial" panose="020B0604020202020204" pitchFamily="34" charset="0"/>
+        <a:buChar char="•"/>
+        <a:defRPr sz="1800" kern="1200">
+          <a:solidFill>
+            <a:schemeClr val="tx1"/>
+          </a:solidFill>
+          <a:latin typeface="+mn-lt"/>
+          <a:ea typeface="+mn-ea"/>
+          <a:cs typeface="+mn-cs"/>
+        </a:defRPr>
+      </a:lvl6pPr>
+      <a:lvl7pPr marL="2971800" indent="-228600" algn="l" defTabSz="914400" rtl="0" eaLnBrk="1" latinLnBrk="0" hangingPunct="1">
+        <a:lnSpc>
+          <a:spcPct val="90000"/>
+        </a:lnSpc>
+        <a:spcBef>
+          <a:spcPts val="500"/>
+        </a:spcBef>
+        <a:buFont typeface="Arial" panose="020B0604020202020204" pitchFamily="34" charset="0"/>
+        <a:buChar char="•"/>
+        <a:defRPr sz="1800" kern="1200">
+          <a:solidFill>
+            <a:schemeClr val="tx1"/>
+          </a:solidFill>
+          <a:latin typeface="+mn-lt"/>
+          <a:ea typeface="+mn-ea"/>
+          <a:cs typeface="+mn-cs"/>
+        </a:defRPr>
+      </a:lvl7pPr>
+      <a:lvl8pPr marL="3429000" indent="-228600" algn="l" defTabSz="914400" rtl="0" eaLnBrk="1" latinLnBrk="0" hangingPunct="1">
+        <a:lnSpc>
+          <a:spcPct val="90000"/>
+        </a:lnSpc>
+        <a:spcBef>
+          <a:spcPts val="500"/>
+        </a:spcBef>
+        <a:buFont typeface="Arial" panose="020B0604020202020204" pitchFamily="34" charset="0"/>
+        <a:buChar char="•"/>
+        <a:defRPr sz="1800" kern="1200">
+          <a:solidFill>
+            <a:schemeClr val="tx1"/>
+          </a:solidFill>
+          <a:latin typeface="+mn-lt"/>
+          <a:ea typeface="+mn-ea"/>
+          <a:cs typeface="+mn-cs"/>
+        </a:defRPr>
+      </a:lvl8pPr>
+      <a:lvl9pPr marL="3886200" indent="-228600" algn="l" defTabSz="914400" rtl="0" eaLnBrk="1" latinLnBrk="0" hangingPunct="1">
+        <a:lnSpc>
+          <a:spcPct val="90000"/>
+        </a:lnSpc>
+        <a:spcBef>
+          <a:spcPts val="500"/>
+        </a:spcBef>
+        <a:buFont typeface="Arial" panose="020B0604020202020204" pitchFamily="34" charset="0"/>
+        <a:buChar char="•"/>
+        <a:defRPr sz="1800" kern="1200">
+          <a:solidFill>
+            <a:schemeClr val="tx1"/>
+          </a:solidFill>
+          <a:latin typeface="+mn-lt"/>
+          <a:ea typeface="+mn-ea"/>
+          <a:cs typeface="+mn-cs"/>
+        </a:defRPr>
+      </a:lvl9pPr>
+    </p:bodyStyle>
+    <p:otherStyle>
+      <a:defPPr>
+        <a:defRPr lang="en-US"/>
+      </a:defPPr>
+      <a:lvl1pPr marL="0" algn="l" defTabSz="914400" rtl="0" eaLnBrk="1" latinLnBrk="0" hangingPunct="1">
+        <a:defRPr sz="1800" kern="1200">
+          <a:solidFill>
+            <a:schemeClr val="tx1"/>
+          </a:solidFill>
+          <a:latin typeface="+mn-lt"/>
+          <a:ea typeface="+mn-ea"/>
+          <a:cs typeface="+mn-cs"/>
+        </a:defRPr>
+      </a:lvl1pPr>
+      <a:lvl2pPr marL="457200" algn="l" defTabSz="914400" rtl="0" eaLnBrk="1" latinLnBrk="0" hangingPunct="1">
+        <a:defRPr sz="1800" kern="1200">
+          <a:solidFill>
+            <a:schemeClr val="tx1"/>
+          </a:solidFill>
+          <a:latin typeface="+mn-lt"/>
+          <a:ea typeface="+mn-ea"/>
+          <a:cs typeface="+mn-cs"/>
+        </a:defRPr>
+      </a:lvl2pPr>
+      <a:lvl3pPr marL="914400" algn="l" defTabSz="914400" rtl="0" eaLnBrk="1" latinLnBrk="0" hangingPunct="1">
+        <a:defRPr sz="1800" kern="1200">
+          <a:solidFill>
+            <a:schemeClr val="tx1"/>
+          </a:solidFill>
+          <a:latin typeface="+mn-lt"/>
+          <a:ea typeface="+mn-ea"/>
+          <a:cs typeface="+mn-cs"/>
+        </a:defRPr>
+      </a:lvl3pPr>
+      <a:lvl4pPr marL="1371600" algn="l" defTabSz="914400" rtl="0" eaLnBrk="1" latinLnBrk="0" hangingPunct="1">
+        <a:defRPr sz="1800" kern="1200">
+          <a:solidFill>
+            <a:schemeClr val="tx1"/>
+          </a:solidFill>
+          <a:latin typeface="+mn-lt"/>
+          <a:ea typeface="+mn-ea"/>
+          <a:cs typeface="+mn-cs"/>
+        </a:defRPr>
+      </a:lvl4pPr>
+      <a:lvl5pPr marL="1828800" algn="l" defTabSz="914400" rtl="0" eaLnBrk="1" latinLnBrk="0" hangingPunct="1">
+        <a:defRPr sz="1800" kern="1200">
+          <a:solidFill>
+            <a:schemeClr val="tx1"/>
+          </a:solidFill>
+          <a:latin typeface="+mn-lt"/>
+          <a:ea typeface="+mn-ea"/>
+          <a:cs typeface="+mn-cs"/>
+        </a:defRPr>
+      </a:lvl5pPr>
+      <a:lvl6pPr marL="2286000" algn="l" defTabSz="914400" rtl="0" eaLnBrk="1" latinLnBrk="0" hangingPunct="1">
+        <a:defRPr sz="1800" kern="1200">
+          <a:solidFill>
+            <a:schemeClr val="tx1"/>
+          </a:solidFill>
+          <a:latin typeface="+mn-lt"/>
+          <a:ea typeface="+mn-ea"/>
+          <a:cs typeface="+mn-cs"/>
+        </a:defRPr>
+      </a:lvl6pPr>
+      <a:lvl7pPr marL="2743200" algn="l" defTabSz="914400" rtl="0" eaLnBrk="1" latinLnBrk="0" hangingPunct="1">
+        <a:defRPr sz="1800" kern="1200">
+          <a:solidFill>
+            <a:schemeClr val="tx1"/>
+          </a:solidFill>
+          <a:latin typeface="+mn-lt"/>
+          <a:ea typeface="+mn-ea"/>
+          <a:cs typeface="+mn-cs"/>
+        </a:defRPr>
+      </a:lvl7pPr>
+      <a:lvl8pPr marL="3200400" algn="l" defTabSz="914400" rtl="0" eaLnBrk="1" latinLnBrk="0" hangingPunct="1">
+        <a:defRPr sz="1800" kern="1200">
+          <a:solidFill>
+            <a:schemeClr val="tx1"/>
+          </a:solidFill>
+          <a:latin typeface="+mn-lt"/>
+          <a:ea typeface="+mn-ea"/>
+          <a:cs typeface="+mn-cs"/>
+        </a:defRPr>
+      </a:lvl8pPr>
+      <a:lvl9pPr marL="3657600" algn="l" defTabSz="914400" rtl="0" eaLnBrk="1" latinLnBrk="0" hangingPunct="1">
+        <a:defRPr sz="1800" kern="1200">
+          <a:solidFill>
+            <a:schemeClr val="tx1"/>
+          </a:solidFill>
+          <a:latin typeface="+mn-lt"/>
+          <a:ea typeface="+mn-ea"/>
+          <a:cs typeface="+mn-cs"/>
+        </a:defRPr>
+      </a:lvl9pPr>
+    </p:otherStyle>
+  </p:txStyles>
 </p:sldMaster>
 </file>
 
 <file path=ppt/slides/slide1.xml><?xml version="1.0" encoding="utf-8"?>
-<p:sld xmlns:a="http://schemas.openxmlformats.org/drawingml/2006/main" xmlns:p="http://schemas.openxmlformats.org/presentationml/2006/main" xmlns:r="http://schemas.openxmlformats.org/officeDocument/2006/relationships" xmlns:p14="http://schemas.microsoft.com/office/powerpoint/2010/main" xmlns:p15="http://schemas.microsoft.com/office/powerpoint/2012/main" xmlns:mc="http://schemas.openxmlformats.org/markup-compatibility/2006">
+<p:sld xmlns:a="http://schemas.openxmlformats.org/drawingml/2006/main" xmlns:r="http://schemas.openxmlformats.org/officeDocument/2006/relationships" xmlns:p="http://schemas.openxmlformats.org/presentationml/2006/main">
   <p:cSld>
     <p:bg>
       <p:bgPr>
         <a:solidFill>
           <a:schemeClr val="lt1"/>
         </a:solidFill>
+        <a:effectLst/>
       </p:bgPr>
     </p:bg>
     <p:spTree>
@@ -8746,8 +8819,8 @@
           <a:bodyPr lIns="90000" tIns="45000" rIns="90000" bIns="45000" anchor="ctr">
             <a:noAutofit/>
           </a:bodyPr>
-          <a:p>
-            <a:pPr/>
+          <a:lstStyle/>
+          <a:p>
             <a:endParaRPr lang="en-US" sz="1800" b="0" u="none" strike="noStrike">
               <a:solidFill>
                 <a:schemeClr val="lt1"/>
@@ -9517,8 +9590,8 @@
           <a:bodyPr lIns="90000" tIns="45000" rIns="90000" bIns="45000" anchor="ctr">
             <a:noAutofit/>
           </a:bodyPr>
-          <a:p>
-            <a:pPr/>
+          <a:lstStyle/>
+          <a:p>
             <a:endParaRPr lang="en-US" sz="1800" b="0" u="none" strike="noStrike">
               <a:solidFill>
                 <a:schemeClr val="lt1"/>
@@ -9537,8 +9610,8 @@
           <p:nvPr/>
         </p:nvPicPr>
         <p:blipFill>
-          <a:blip r:embed="rId1"/>
-          <a:srcRect l="0" t="0" r="59916" b="0"/>
+          <a:blip r:embed="rId2"/>
+          <a:srcRect r="59916"/>
           <a:stretch/>
         </p:blipFill>
         <p:spPr>
@@ -9579,9 +9652,10 @@
           </a:ln>
         </p:spPr>
         <p:txBody>
-          <a:bodyPr numCol="1" spcCol="0" lIns="91440" tIns="45720" rIns="91440" bIns="45720" anchor="t">
+          <a:bodyPr lIns="91440" tIns="45720" rIns="91440" bIns="45720" numCol="1" spcCol="0" anchor="t">
             <a:noAutofit/>
           </a:bodyPr>
+          <a:lstStyle/>
           <a:p>
             <a:pPr indent="0" algn="ctr" defTabSz="457200">
               <a:lnSpc>
@@ -9686,9 +9760,10 @@
           </a:ln>
         </p:spPr>
         <p:txBody>
-          <a:bodyPr numCol="1" spcCol="0" lIns="91440" tIns="45720" rIns="91440" bIns="45720" anchor="ctr">
+          <a:bodyPr lIns="91440" tIns="45720" rIns="91440" bIns="45720" numCol="1" spcCol="0" anchor="ctr">
             <a:noAutofit/>
           </a:bodyPr>
+          <a:lstStyle/>
           <a:p>
             <a:pPr indent="0" algn="ctr" defTabSz="457200">
               <a:lnSpc>
@@ -9728,7 +9803,7 @@
         <p:spPr>
           <a:xfrm>
             <a:off x="331200" y="2076480"/>
-            <a:ext cx="5924160" cy="4207320"/>
+            <a:ext cx="5924160" cy="3938086"/>
           </a:xfrm>
           <a:prstGeom prst="rect">
             <a:avLst/>
@@ -9739,15 +9814,22 @@
           </a:ln>
         </p:spPr>
         <p:style>
-          <a:lnRef idx="0"/>
-          <a:fillRef idx="0"/>
-          <a:effectRef idx="0"/>
+          <a:lnRef idx="0">
+            <a:scrgbClr r="0" g="0" b="0"/>
+          </a:lnRef>
+          <a:fillRef idx="0">
+            <a:scrgbClr r="0" g="0" b="0"/>
+          </a:fillRef>
+          <a:effectRef idx="0">
+            <a:scrgbClr r="0" g="0" b="0"/>
+          </a:effectRef>
           <a:fontRef idx="minor"/>
         </p:style>
         <p:txBody>
           <a:bodyPr lIns="411480" tIns="45000" rIns="90000" bIns="45000" anchor="t">
             <a:spAutoFit/>
           </a:bodyPr>
+          <a:lstStyle/>
           <a:p>
             <a:pPr defTabSz="457200">
               <a:lnSpc>
@@ -9761,7 +9843,7 @@
               </a:spcAft>
             </a:pPr>
             <a:r>
-              <a:rPr lang="en-US" sz="2000" b="0" u="none" strike="noStrike">
+              <a:rPr lang="en-US" sz="2000" b="0" u="none" strike="noStrike" dirty="0">
                 <a:solidFill>
                   <a:srgbClr val="0F1A14"/>
                 </a:solidFill>
@@ -9773,7 +9855,7 @@
               <a:t>•</a:t>
             </a:r>
             <a:r>
-              <a:rPr lang="en-US" sz="1400" b="0" u="none" strike="noStrike">
+              <a:rPr lang="en-US" sz="1400" b="0" u="none" strike="noStrike" dirty="0">
                 <a:solidFill>
                   <a:srgbClr val="0F1A14"/>
                 </a:solidFill>
@@ -9785,7 +9867,7 @@
               <a:t> </a:t>
             </a:r>
             <a:r>
-              <a:rPr lang="en-US" sz="2000" b="1" u="none" strike="noStrike">
+              <a:rPr lang="en-US" sz="2000" b="1" u="none" strike="noStrike" dirty="0">
                 <a:solidFill>
                   <a:srgbClr val="0F1A14"/>
                 </a:solidFill>
@@ -9797,7 +9879,7 @@
               <a:t>Problem Statement ID – </a:t>
             </a:r>
             <a:r>
-              <a:rPr lang="en-US" sz="2000" b="0" u="none" strike="noStrike">
+              <a:rPr lang="en-US" sz="2000" b="0" u="none" strike="noStrike" dirty="0">
                 <a:solidFill>
                   <a:srgbClr val="0F1A14"/>
                 </a:solidFill>
@@ -9808,7 +9890,7 @@
               </a:rPr>
               <a:t>26091</a:t>
             </a:r>
-            <a:endParaRPr lang="en-US" sz="2000" b="0" u="none" strike="noStrike">
+            <a:endParaRPr lang="en-US" sz="2000" b="0" u="none" strike="noStrike" dirty="0">
               <a:solidFill>
                 <a:srgbClr val="000000"/>
               </a:solidFill>
@@ -9830,7 +9912,7 @@
               </a:spcAft>
             </a:pPr>
             <a:r>
-              <a:rPr lang="en-US" sz="2000" b="0" u="none" strike="noStrike">
+              <a:rPr lang="en-US" sz="2000" b="0" u="none" strike="noStrike" dirty="0">
                 <a:solidFill>
                   <a:srgbClr val="0F1A14"/>
                 </a:solidFill>
@@ -9842,7 +9924,7 @@
               <a:t>•  </a:t>
             </a:r>
             <a:r>
-              <a:rPr lang="en-US" sz="2000" b="1" u="none" strike="noStrike">
+              <a:rPr lang="en-US" sz="2000" b="1" u="none" strike="noStrike" dirty="0">
                 <a:solidFill>
                   <a:srgbClr val="0F1A14"/>
                 </a:solidFill>
@@ -9854,7 +9936,7 @@
               <a:t>Problem Statement Title – </a:t>
             </a:r>
             <a:r>
-              <a:rPr lang="en-US" sz="2000" b="0" u="none" strike="noStrike">
+              <a:rPr lang="en-US" sz="2000" b="0" u="none" strike="noStrike" dirty="0">
                 <a:solidFill>
                   <a:srgbClr val="0F1A14"/>
                 </a:solidFill>
@@ -9865,7 +9947,7 @@
               </a:rPr>
               <a:t>AI-Driven Hyper-Local Business Advisory and Financial Structuring Assistant for Rural Micro-Entrepreneurs</a:t>
             </a:r>
-            <a:endParaRPr lang="en-US" sz="2000" b="0" u="none" strike="noStrike">
+            <a:endParaRPr lang="en-US" sz="2000" b="0" u="none" strike="noStrike" dirty="0">
               <a:solidFill>
                 <a:srgbClr val="000000"/>
               </a:solidFill>
@@ -9887,7 +9969,7 @@
               </a:spcAft>
             </a:pPr>
             <a:r>
-              <a:rPr lang="en-US" sz="2000" b="0" u="none" strike="noStrike">
+              <a:rPr lang="en-US" sz="2000" b="0" u="none" strike="noStrike" dirty="0">
                 <a:solidFill>
                   <a:srgbClr val="0F1A14"/>
                 </a:solidFill>
@@ -9899,7 +9981,7 @@
               <a:t>•  </a:t>
             </a:r>
             <a:r>
-              <a:rPr lang="en-US" sz="2000" b="1" u="none" strike="noStrike">
+              <a:rPr lang="en-US" sz="2000" b="1" u="none" strike="noStrike" dirty="0">
                 <a:solidFill>
                   <a:srgbClr val="0F1A14"/>
                 </a:solidFill>
@@ -9911,7 +9993,7 @@
               <a:t>Ministry / Agency – </a:t>
             </a:r>
             <a:r>
-              <a:rPr lang="en-US" sz="2000" b="0" u="none" strike="noStrike">
+              <a:rPr lang="en-US" sz="2000" b="0" u="none" strike="noStrike" dirty="0">
                 <a:solidFill>
                   <a:srgbClr val="0F1A14"/>
                 </a:solidFill>
@@ -9920,9 +10002,33 @@
                 <a:latin typeface="Calibri"/>
                 <a:ea typeface="ＭＳ Ｐゴシック"/>
               </a:rPr>
-              <a:t>Ministry of Social Justice &amp; Empowerment (MoSJE)</a:t>
-            </a:r>
-            <a:endParaRPr lang="en-US" sz="2000" b="0" u="none" strike="noStrike">
+              <a:t>Ministry of Social Justice &amp; Empowerment (</a:t>
+            </a:r>
+            <a:r>
+              <a:rPr lang="en-US" sz="2000" b="0" u="none" strike="noStrike" dirty="0" err="1">
+                <a:solidFill>
+                  <a:srgbClr val="0F1A14"/>
+                </a:solidFill>
+                <a:effectLst/>
+                <a:uFillTx/>
+                <a:latin typeface="Calibri"/>
+                <a:ea typeface="ＭＳ Ｐゴシック"/>
+              </a:rPr>
+              <a:t>MoSJE</a:t>
+            </a:r>
+            <a:r>
+              <a:rPr lang="en-US" sz="2000" b="0" u="none" strike="noStrike" dirty="0">
+                <a:solidFill>
+                  <a:srgbClr val="0F1A14"/>
+                </a:solidFill>
+                <a:effectLst/>
+                <a:uFillTx/>
+                <a:latin typeface="Calibri"/>
+                <a:ea typeface="ＭＳ Ｐゴシック"/>
+              </a:rPr>
+              <a:t>)</a:t>
+            </a:r>
+            <a:endParaRPr lang="en-US" sz="2000" b="0" u="none" strike="noStrike" dirty="0">
               <a:solidFill>
                 <a:srgbClr val="000000"/>
               </a:solidFill>
@@ -9944,7 +10050,7 @@
               </a:spcAft>
             </a:pPr>
             <a:r>
-              <a:rPr lang="en-US" sz="2000" b="0" u="none" strike="noStrike">
+              <a:rPr lang="en-US" sz="2000" b="0" u="none" strike="noStrike" dirty="0">
                 <a:solidFill>
                   <a:srgbClr val="0F1A14"/>
                 </a:solidFill>
@@ -9956,7 +10062,7 @@
               <a:t>•  </a:t>
             </a:r>
             <a:r>
-              <a:rPr lang="en-US" sz="2000" b="1" u="none" strike="noStrike">
+              <a:rPr lang="en-US" sz="2000" b="1" u="none" strike="noStrike" dirty="0">
                 <a:solidFill>
                   <a:srgbClr val="0F1A14"/>
                 </a:solidFill>
@@ -9968,7 +10074,7 @@
               <a:t>Theme – </a:t>
             </a:r>
             <a:r>
-              <a:rPr lang="en-US" sz="2000" b="0" u="none" strike="noStrike">
+              <a:rPr lang="en-US" sz="2000" b="0" u="none" strike="noStrike" dirty="0">
                 <a:solidFill>
                   <a:srgbClr val="0F1A14"/>
                 </a:solidFill>
@@ -9977,9 +10083,33 @@
                 <a:latin typeface="Calibri"/>
                 <a:ea typeface="ＭＳ Ｐゴシック"/>
               </a:rPr>
-              <a:t>Agriculture, FoodTech &amp; Rural Development</a:t>
-            </a:r>
-            <a:endParaRPr lang="en-US" sz="2000" b="0" u="none" strike="noStrike">
+              <a:t>Agriculture, </a:t>
+            </a:r>
+            <a:r>
+              <a:rPr lang="en-US" sz="2000" b="0" u="none" strike="noStrike" dirty="0" err="1">
+                <a:solidFill>
+                  <a:srgbClr val="0F1A14"/>
+                </a:solidFill>
+                <a:effectLst/>
+                <a:uFillTx/>
+                <a:latin typeface="Calibri"/>
+                <a:ea typeface="ＭＳ Ｐゴシック"/>
+              </a:rPr>
+              <a:t>FoodTech</a:t>
+            </a:r>
+            <a:r>
+              <a:rPr lang="en-US" sz="2000" b="0" u="none" strike="noStrike" dirty="0">
+                <a:solidFill>
+                  <a:srgbClr val="0F1A14"/>
+                </a:solidFill>
+                <a:effectLst/>
+                <a:uFillTx/>
+                <a:latin typeface="Calibri"/>
+                <a:ea typeface="ＭＳ Ｐゴシック"/>
+              </a:rPr>
+              <a:t> &amp; Rural Development</a:t>
+            </a:r>
+            <a:endParaRPr lang="en-US" sz="2000" b="0" u="none" strike="noStrike" dirty="0">
               <a:solidFill>
                 <a:srgbClr val="000000"/>
               </a:solidFill>
@@ -10001,7 +10131,7 @@
               </a:spcAft>
             </a:pPr>
             <a:r>
-              <a:rPr lang="en-US" sz="2000" b="0" u="none" strike="noStrike">
+              <a:rPr lang="en-US" sz="2000" b="0" u="none" strike="noStrike" dirty="0">
                 <a:solidFill>
                   <a:srgbClr val="0F1A14"/>
                 </a:solidFill>
@@ -10013,7 +10143,7 @@
               <a:t>•  </a:t>
             </a:r>
             <a:r>
-              <a:rPr lang="en-US" sz="2000" b="1" u="none" strike="noStrike">
+              <a:rPr lang="en-US" sz="2000" b="1" u="none" strike="noStrike" dirty="0">
                 <a:solidFill>
                   <a:srgbClr val="0F1A14"/>
                 </a:solidFill>
@@ -10025,7 +10155,7 @@
               <a:t>PS Category – </a:t>
             </a:r>
             <a:r>
-              <a:rPr lang="en-US" sz="2000" b="0" u="none" strike="noStrike">
+              <a:rPr lang="en-US" sz="2000" b="0" u="none" strike="noStrike" dirty="0">
                 <a:solidFill>
                   <a:srgbClr val="0F1A14"/>
                 </a:solidFill>
@@ -10036,7 +10166,7 @@
               </a:rPr>
               <a:t>Software</a:t>
             </a:r>
-            <a:endParaRPr lang="en-US" sz="2000" b="0" u="none" strike="noStrike">
+            <a:endParaRPr lang="en-US" sz="2000" b="0" u="none" strike="noStrike" dirty="0">
               <a:solidFill>
                 <a:srgbClr val="000000"/>
               </a:solidFill>
@@ -10058,7 +10188,7 @@
               </a:spcAft>
             </a:pPr>
             <a:r>
-              <a:rPr lang="en-US" sz="2000" b="0" u="none" strike="noStrike">
+              <a:rPr lang="en-US" sz="2000" b="0" u="none" strike="noStrike" dirty="0">
                 <a:solidFill>
                   <a:srgbClr val="0F1A14"/>
                 </a:solidFill>
@@ -10070,7 +10200,7 @@
               <a:t>•  </a:t>
             </a:r>
             <a:r>
-              <a:rPr lang="en-US" sz="2000" b="1" u="none" strike="noStrike">
+              <a:rPr lang="en-US" sz="2000" b="1" u="none" strike="noStrike" dirty="0">
                 <a:solidFill>
                   <a:srgbClr val="0F1A14"/>
                 </a:solidFill>
@@ -10082,18 +10212,16 @@
               <a:t>Team ID – </a:t>
             </a:r>
             <a:r>
-              <a:rPr lang="en-US" sz="2000" b="1" u="none" strike="noStrike">
+              <a:rPr lang="en-US" sz="2000" b="1" dirty="0">
                 <a:solidFill>
                   <a:srgbClr val="0B5D3B"/>
                 </a:solidFill>
-                <a:effectLst/>
-                <a:uFillTx/>
-                <a:latin typeface="Calibri"/>
-                <a:ea typeface="ＭＳ Ｐゴシック"/>
-              </a:rPr>
-              <a:t>TBD</a:t>
-            </a:r>
-            <a:endParaRPr lang="en-US" sz="2000" b="0" u="none" strike="noStrike">
+                <a:latin typeface="Calibri"/>
+                <a:ea typeface="ＭＳ Ｐゴシック"/>
+              </a:rPr>
+              <a:t>S-091</a:t>
+            </a:r>
+            <a:endParaRPr lang="en-US" sz="2000" b="0" u="none" strike="noStrike" dirty="0">
               <a:solidFill>
                 <a:srgbClr val="000000"/>
               </a:solidFill>
@@ -10115,7 +10243,7 @@
               </a:spcAft>
             </a:pPr>
             <a:r>
-              <a:rPr lang="en-US" sz="2000" b="0" u="none" strike="noStrike">
+              <a:rPr lang="en-US" sz="2000" b="0" u="none" strike="noStrike" dirty="0">
                 <a:solidFill>
                   <a:srgbClr val="0F1A14"/>
                 </a:solidFill>
@@ -10127,7 +10255,7 @@
               <a:t>•  </a:t>
             </a:r>
             <a:r>
-              <a:rPr lang="en-US" sz="2000" b="1" u="none" strike="noStrike">
+              <a:rPr lang="en-US" sz="2000" b="1" u="none" strike="noStrike" dirty="0">
                 <a:solidFill>
                   <a:srgbClr val="0F1A14"/>
                 </a:solidFill>
@@ -10139,7 +10267,7 @@
               <a:t>Team Name – </a:t>
             </a:r>
             <a:r>
-              <a:rPr lang="en-US" sz="2000" b="1" u="none" strike="noStrike">
+              <a:rPr lang="en-US" sz="2000" b="1" u="none" strike="noStrike" dirty="0">
                 <a:solidFill>
                   <a:srgbClr val="0B5D3B"/>
                 </a:solidFill>
@@ -10150,7 +10278,7 @@
               </a:rPr>
               <a:t>ADAPT</a:t>
             </a:r>
-            <a:endParaRPr lang="en-US" sz="2000" b="0" u="none" strike="noStrike">
+            <a:endParaRPr lang="en-US" sz="2000" b="0" u="none" strike="noStrike" dirty="0">
               <a:solidFill>
                 <a:srgbClr val="000000"/>
               </a:solidFill>
@@ -10168,7 +10296,7 @@
           <p:nvPr/>
         </p:nvPicPr>
         <p:blipFill>
-          <a:blip r:embed="rId2"/>
+          <a:blip r:embed="rId3"/>
           <a:stretch/>
         </p:blipFill>
         <p:spPr>
@@ -10187,19 +10315,14 @@
       </p:pic>
     </p:spTree>
   </p:cSld>
-  <mc:AlternateContent>
-    <mc:Choice Requires="p14">
-      <p:transition spd="slow" p14:dur="2000"/>
-    </mc:Choice>
-    <mc:Fallback>
-      <p:transition spd="slow"/>
-    </mc:Fallback>
-  </mc:AlternateContent>
+  <p:clrMapOvr>
+    <a:masterClrMapping/>
+  </p:clrMapOvr>
 </p:sld>
 </file>
 
 <file path=ppt/slides/slide2.xml><?xml version="1.0" encoding="utf-8"?>
-<p:sld xmlns:a="http://schemas.openxmlformats.org/drawingml/2006/main" xmlns:p="http://schemas.openxmlformats.org/presentationml/2006/main" xmlns:r="http://schemas.openxmlformats.org/officeDocument/2006/relationships" xmlns:p14="http://schemas.microsoft.com/office/powerpoint/2010/main" xmlns:p15="http://schemas.microsoft.com/office/powerpoint/2012/main" xmlns:mc="http://schemas.openxmlformats.org/markup-compatibility/2006">
+<p:sld xmlns:a="http://schemas.openxmlformats.org/drawingml/2006/main" xmlns:r="http://schemas.openxmlformats.org/officeDocument/2006/relationships" xmlns:p="http://schemas.openxmlformats.org/presentationml/2006/main">
   <p:cSld>
     <p:spTree>
       <p:nvGrpSpPr>
@@ -10236,7 +10359,7 @@
             <a:noFill/>
           </a:ln>
           <a:effectLst>
-            <a:outerShdw dir="5400000" dist="23040" rotWithShape="0">
+            <a:outerShdw dist="23040" dir="5400000" rotWithShape="0">
               <a:srgbClr val="808080">
                 <a:alpha val="35000"/>
               </a:srgbClr>
@@ -10244,17 +10367,23 @@
           </a:effectLst>
         </p:spPr>
         <p:style>
-          <a:lnRef idx="0"/>
-          <a:fillRef idx="0"/>
-          <a:effectRef idx="0"/>
+          <a:lnRef idx="0">
+            <a:scrgbClr r="0" g="0" b="0"/>
+          </a:lnRef>
+          <a:fillRef idx="0">
+            <a:scrgbClr r="0" g="0" b="0"/>
+          </a:fillRef>
+          <a:effectRef idx="0">
+            <a:scrgbClr r="0" g="0" b="0"/>
+          </a:effectRef>
           <a:fontRef idx="minor"/>
         </p:style>
         <p:txBody>
           <a:bodyPr lIns="90000" tIns="45000" rIns="90000" bIns="45000" anchor="ctr">
             <a:noAutofit/>
           </a:bodyPr>
-          <a:p>
-            <a:pPr/>
+          <a:lstStyle/>
+          <a:p>
             <a:endParaRPr lang="en-US" sz="1800" b="0" u="none" strike="noStrike">
               <a:solidFill>
                 <a:schemeClr val="accent2">
@@ -10292,9 +10421,10 @@
           </a:ln>
         </p:spPr>
         <p:txBody>
-          <a:bodyPr numCol="1" spcCol="0" lIns="91440" tIns="45720" rIns="91440" bIns="45720" anchor="ctr">
+          <a:bodyPr lIns="91440" tIns="45720" rIns="91440" bIns="45720" numCol="1" spcCol="0" anchor="ctr">
             <a:noAutofit/>
           </a:bodyPr>
+          <a:lstStyle/>
           <a:p>
             <a:pPr indent="0" algn="ctr" defTabSz="457200">
               <a:lnSpc>
@@ -10348,15 +10478,22 @@
           </a:ln>
         </p:spPr>
         <p:style>
-          <a:lnRef idx="0"/>
-          <a:fillRef idx="0"/>
-          <a:effectRef idx="0"/>
+          <a:lnRef idx="0">
+            <a:scrgbClr r="0" g="0" b="0"/>
+          </a:lnRef>
+          <a:fillRef idx="0">
+            <a:scrgbClr r="0" g="0" b="0"/>
+          </a:fillRef>
+          <a:effectRef idx="0">
+            <a:scrgbClr r="0" g="0" b="0"/>
+          </a:effectRef>
           <a:fontRef idx="minor"/>
         </p:style>
         <p:txBody>
           <a:bodyPr lIns="90000" tIns="45000" rIns="90000" bIns="45000" anchor="t">
             <a:spAutoFit/>
           </a:bodyPr>
+          <a:lstStyle/>
           <a:p>
             <a:pPr marL="343080" indent="-343080" defTabSz="457200">
               <a:lnSpc>
@@ -10791,7 +10928,7 @@
           </a:ln>
         </p:spPr>
         <p:txBody>
-          <a:bodyPr numCol="1" spcCol="0" lIns="91440" tIns="45720" rIns="91440" bIns="45720" anchor="ctr">
+          <a:bodyPr lIns="91440" tIns="45720" rIns="91440" bIns="45720" numCol="1" spcCol="0" anchor="ctr">
             <a:noAutofit/>
           </a:bodyPr>
           <a:lstStyle>
@@ -10828,7 +10965,7 @@
                 <a:latin typeface="TradeGothic"/>
                 <a:ea typeface="ＭＳ Ｐゴシック"/>
               </a:rPr>
-              <a:t>&lt;number&gt;</a:t>
+              <a:t>2</a:t>
             </a:fld>
             <a:endParaRPr lang="en-US" sz="1200" b="0" u="none" strike="noStrike">
               <a:solidFill>
@@ -10953,6 +11090,7 @@
           <a:bodyPr lIns="90000" tIns="45000" rIns="90000" bIns="45000" anchor="ctr">
             <a:noAutofit/>
           </a:bodyPr>
+          <a:lstStyle/>
           <a:p>
             <a:pPr algn="ctr" defTabSz="457200">
               <a:lnSpc>
@@ -10992,7 +11130,7 @@
           <p:nvPr/>
         </p:nvPicPr>
         <p:blipFill>
-          <a:blip r:embed="rId1"/>
+          <a:blip r:embed="rId3"/>
           <a:stretch/>
         </p:blipFill>
         <p:spPr>
@@ -11032,7 +11170,7 @@
             <a:noFill/>
           </a:ln>
           <a:effectLst>
-            <a:outerShdw blurRad="39960" dir="5400000" dist="23040" rotWithShape="0">
+            <a:outerShdw blurRad="39960" dist="23040" dir="5400000" rotWithShape="0">
               <a:srgbClr val="000000">
                 <a:alpha val="35000"/>
               </a:srgbClr>
@@ -11055,6 +11193,7 @@
           <a:bodyPr lIns="90000" tIns="45000" rIns="90000" bIns="45000" anchor="ctr">
             <a:noAutofit/>
           </a:bodyPr>
+          <a:lstStyle/>
           <a:p>
             <a:pPr algn="ctr" defTabSz="457200">
               <a:lnSpc>
@@ -11131,15 +11270,22 @@
           </a:ln>
         </p:spPr>
         <p:style>
-          <a:lnRef idx="0"/>
-          <a:fillRef idx="0"/>
-          <a:effectRef idx="0"/>
+          <a:lnRef idx="0">
+            <a:scrgbClr r="0" g="0" b="0"/>
+          </a:lnRef>
+          <a:fillRef idx="0">
+            <a:scrgbClr r="0" g="0" b="0"/>
+          </a:fillRef>
+          <a:effectRef idx="0">
+            <a:scrgbClr r="0" g="0" b="0"/>
+          </a:effectRef>
           <a:fontRef idx="minor"/>
         </p:style>
         <p:txBody>
           <a:bodyPr wrap="none" lIns="90000" tIns="45000" rIns="90000" bIns="45000" anchor="t">
             <a:spAutoFit/>
           </a:bodyPr>
+          <a:lstStyle/>
           <a:p>
             <a:pPr algn="ctr" defTabSz="457200">
               <a:lnSpc>
@@ -11192,7 +11338,7 @@
             <a:noFill/>
           </a:ln>
           <a:effectLst>
-            <a:outerShdw blurRad="39960" dir="5400000" dist="23040" rotWithShape="0">
+            <a:outerShdw blurRad="39960" dist="23040" dir="5400000" rotWithShape="0">
               <a:srgbClr val="000000">
                 <a:alpha val="35000"/>
               </a:srgbClr>
@@ -11215,6 +11361,7 @@
           <a:bodyPr lIns="90000" tIns="45000" rIns="90000" bIns="45000" anchor="ctr">
             <a:noAutofit/>
           </a:bodyPr>
+          <a:lstStyle/>
           <a:p>
             <a:pPr algn="ctr" defTabSz="457200">
               <a:lnSpc>
@@ -11291,15 +11438,22 @@
           </a:ln>
         </p:spPr>
         <p:style>
-          <a:lnRef idx="0"/>
-          <a:fillRef idx="0"/>
-          <a:effectRef idx="0"/>
+          <a:lnRef idx="0">
+            <a:scrgbClr r="0" g="0" b="0"/>
+          </a:lnRef>
+          <a:fillRef idx="0">
+            <a:scrgbClr r="0" g="0" b="0"/>
+          </a:fillRef>
+          <a:effectRef idx="0">
+            <a:scrgbClr r="0" g="0" b="0"/>
+          </a:effectRef>
           <a:fontRef idx="minor"/>
         </p:style>
         <p:txBody>
           <a:bodyPr wrap="none" lIns="90000" tIns="45000" rIns="90000" bIns="45000" anchor="t">
             <a:spAutoFit/>
           </a:bodyPr>
+          <a:lstStyle/>
           <a:p>
             <a:pPr algn="ctr" defTabSz="457200">
               <a:lnSpc>
@@ -11352,7 +11506,7 @@
             <a:noFill/>
           </a:ln>
           <a:effectLst>
-            <a:outerShdw blurRad="39960" dir="5400000" dist="23040" rotWithShape="0">
+            <a:outerShdw blurRad="39960" dist="23040" dir="5400000" rotWithShape="0">
               <a:srgbClr val="000000">
                 <a:alpha val="35000"/>
               </a:srgbClr>
@@ -11375,6 +11529,7 @@
           <a:bodyPr lIns="90000" tIns="45000" rIns="90000" bIns="45000" anchor="ctr">
             <a:noAutofit/>
           </a:bodyPr>
+          <a:lstStyle/>
           <a:p>
             <a:pPr algn="ctr" defTabSz="457200">
               <a:lnSpc>
@@ -11451,15 +11606,22 @@
           </a:ln>
         </p:spPr>
         <p:style>
-          <a:lnRef idx="0"/>
-          <a:fillRef idx="0"/>
-          <a:effectRef idx="0"/>
+          <a:lnRef idx="0">
+            <a:scrgbClr r="0" g="0" b="0"/>
+          </a:lnRef>
+          <a:fillRef idx="0">
+            <a:scrgbClr r="0" g="0" b="0"/>
+          </a:fillRef>
+          <a:effectRef idx="0">
+            <a:scrgbClr r="0" g="0" b="0"/>
+          </a:effectRef>
           <a:fontRef idx="minor"/>
         </p:style>
         <p:txBody>
           <a:bodyPr wrap="none" lIns="90000" tIns="45000" rIns="90000" bIns="45000" anchor="t">
             <a:spAutoFit/>
           </a:bodyPr>
+          <a:lstStyle/>
           <a:p>
             <a:pPr algn="ctr" defTabSz="457200">
               <a:lnSpc>
@@ -11512,7 +11674,7 @@
             <a:noFill/>
           </a:ln>
           <a:effectLst>
-            <a:outerShdw blurRad="39960" dir="5400000" dist="23040" rotWithShape="0">
+            <a:outerShdw blurRad="39960" dist="23040" dir="5400000" rotWithShape="0">
               <a:srgbClr val="000000">
                 <a:alpha val="35000"/>
               </a:srgbClr>
@@ -11535,6 +11697,7 @@
           <a:bodyPr lIns="90000" tIns="45000" rIns="90000" bIns="45000" anchor="ctr">
             <a:noAutofit/>
           </a:bodyPr>
+          <a:lstStyle/>
           <a:p>
             <a:pPr algn="ctr" defTabSz="457200">
               <a:lnSpc>
@@ -11593,19 +11756,14 @@
       </p:sp>
     </p:spTree>
   </p:cSld>
-  <mc:AlternateContent>
-    <mc:Choice Requires="p14">
-      <p:transition spd="slow" p14:dur="2000"/>
-    </mc:Choice>
-    <mc:Fallback>
-      <p:transition spd="slow"/>
-    </mc:Fallback>
-  </mc:AlternateContent>
+  <p:clrMapOvr>
+    <a:masterClrMapping/>
+  </p:clrMapOvr>
 </p:sld>
 </file>
 
 <file path=ppt/slides/slide3.xml><?xml version="1.0" encoding="utf-8"?>
-<p:sld xmlns:a="http://schemas.openxmlformats.org/drawingml/2006/main" xmlns:p="http://schemas.openxmlformats.org/presentationml/2006/main" xmlns:r="http://schemas.openxmlformats.org/officeDocument/2006/relationships" xmlns:p14="http://schemas.microsoft.com/office/powerpoint/2010/main" xmlns:p15="http://schemas.microsoft.com/office/powerpoint/2012/main" xmlns:mc="http://schemas.openxmlformats.org/markup-compatibility/2006">
+<p:sld xmlns:a="http://schemas.openxmlformats.org/drawingml/2006/main" xmlns:r="http://schemas.openxmlformats.org/officeDocument/2006/relationships" xmlns:p="http://schemas.openxmlformats.org/presentationml/2006/main">
   <p:cSld>
     <p:spTree>
       <p:nvGrpSpPr>
@@ -11642,7 +11800,7 @@
             <a:noFill/>
           </a:ln>
           <a:effectLst>
-            <a:outerShdw dir="5400000" dist="23040" rotWithShape="0">
+            <a:outerShdw dist="23040" dir="5400000" rotWithShape="0">
               <a:srgbClr val="808080">
                 <a:alpha val="35000"/>
               </a:srgbClr>
@@ -11650,17 +11808,23 @@
           </a:effectLst>
         </p:spPr>
         <p:style>
-          <a:lnRef idx="0"/>
-          <a:fillRef idx="0"/>
-          <a:effectRef idx="0"/>
+          <a:lnRef idx="0">
+            <a:scrgbClr r="0" g="0" b="0"/>
+          </a:lnRef>
+          <a:fillRef idx="0">
+            <a:scrgbClr r="0" g="0" b="0"/>
+          </a:fillRef>
+          <a:effectRef idx="0">
+            <a:scrgbClr r="0" g="0" b="0"/>
+          </a:effectRef>
           <a:fontRef idx="minor"/>
         </p:style>
         <p:txBody>
           <a:bodyPr lIns="90000" tIns="45000" rIns="90000" bIns="45000" anchor="ctr">
             <a:noAutofit/>
           </a:bodyPr>
-          <a:p>
-            <a:pPr/>
+          <a:lstStyle/>
+          <a:p>
             <a:endParaRPr lang="en-US" sz="1800" b="0" u="none" strike="noStrike">
               <a:solidFill>
                 <a:schemeClr val="accent2">
@@ -11698,9 +11862,10 @@
           </a:ln>
         </p:spPr>
         <p:txBody>
-          <a:bodyPr numCol="1" spcCol="0" lIns="91440" tIns="45720" rIns="91440" bIns="45720" anchor="ctr">
+          <a:bodyPr lIns="91440" tIns="45720" rIns="91440" bIns="45720" numCol="1" spcCol="0" anchor="ctr">
             <a:noAutofit/>
           </a:bodyPr>
+          <a:lstStyle/>
           <a:p>
             <a:pPr indent="0" algn="ctr" defTabSz="457200">
               <a:lnSpc>
@@ -11718,43 +11883,7 @@
                 <a:latin typeface="Times New Roman"/>
                 <a:ea typeface="ＭＳ Ｐゴシック"/>
               </a:rPr>
-              <a:t>TECHNIC</a:t>
-            </a:r>
-            <a:r>
-              <a:rPr lang="en-US" sz="3600" b="1" u="none" strike="noStrike">
-                <a:solidFill>
-                  <a:schemeClr val="dk1"/>
-                </a:solidFill>
-                <a:effectLst/>
-                <a:uFillTx/>
-                <a:latin typeface="Times New Roman"/>
-                <a:ea typeface="ＭＳ Ｐゴシック"/>
-              </a:rPr>
-              <a:t>AL </a:t>
-            </a:r>
-            <a:r>
-              <a:rPr lang="en-US" sz="3600" b="1" u="none" strike="noStrike">
-                <a:solidFill>
-                  <a:schemeClr val="dk1"/>
-                </a:solidFill>
-                <a:effectLst/>
-                <a:uFillTx/>
-                <a:latin typeface="Times New Roman"/>
-                <a:ea typeface="ＭＳ Ｐゴシック"/>
-              </a:rPr>
-              <a:t>APPROA</a:t>
-            </a:r>
-            <a:r>
-              <a:rPr lang="en-US" sz="3600" b="1" u="none" strike="noStrike">
-                <a:solidFill>
-                  <a:schemeClr val="dk1"/>
-                </a:solidFill>
-                <a:effectLst/>
-                <a:uFillTx/>
-                <a:latin typeface="Times New Roman"/>
-                <a:ea typeface="ＭＳ Ｐゴシック"/>
-              </a:rPr>
-              <a:t>CH</a:t>
+              <a:t>TECHNICAL APPROACH</a:t>
             </a:r>
             <a:endParaRPr lang="en-US" sz="3600" b="0" u="none" strike="noStrike">
               <a:solidFill>
@@ -11776,7 +11905,7 @@
         <p:spPr>
           <a:xfrm>
             <a:off x="612720" y="1188720"/>
-            <a:ext cx="6034680" cy="3972240"/>
+            <a:ext cx="6034680" cy="3581578"/>
           </a:xfrm>
           <a:prstGeom prst="rect">
             <a:avLst/>
@@ -11787,15 +11916,22 @@
           </a:ln>
         </p:spPr>
         <p:style>
-          <a:lnRef idx="0"/>
-          <a:fillRef idx="0"/>
-          <a:effectRef idx="0"/>
+          <a:lnRef idx="0">
+            <a:scrgbClr r="0" g="0" b="0"/>
+          </a:lnRef>
+          <a:fillRef idx="0">
+            <a:scrgbClr r="0" g="0" b="0"/>
+          </a:fillRef>
+          <a:effectRef idx="0">
+            <a:scrgbClr r="0" g="0" b="0"/>
+          </a:effectRef>
           <a:fontRef idx="minor"/>
         </p:style>
         <p:txBody>
           <a:bodyPr lIns="90000" tIns="45000" rIns="90000" bIns="45000" anchor="t">
             <a:spAutoFit/>
           </a:bodyPr>
+          <a:lstStyle/>
           <a:p>
             <a:pPr marL="343080" indent="-343080" defTabSz="457200">
               <a:lnSpc>
@@ -11812,7 +11948,7 @@
               </a:tabLst>
             </a:pPr>
             <a:r>
-              <a:rPr lang="en-US" sz="1300" b="1" u="none" strike="noStrike">
+              <a:rPr lang="en-US" sz="1300" b="1" u="none" strike="noStrike" dirty="0">
                 <a:solidFill>
                   <a:srgbClr val="4F81BD"/>
                 </a:solidFill>
@@ -11823,7 +11959,7 @@
               </a:rPr>
               <a:t>Technologies Used (4-Layer Modular Stack)</a:t>
             </a:r>
-            <a:endParaRPr lang="en-US" sz="1300" b="0" u="none" strike="noStrike">
+            <a:endParaRPr lang="en-US" sz="1300" b="0" u="none" strike="noStrike" dirty="0">
               <a:solidFill>
                 <a:srgbClr val="000000"/>
               </a:solidFill>
@@ -11848,7 +11984,7 @@
               </a:tabLst>
             </a:pPr>
             <a:r>
-              <a:rPr lang="en-US" sz="1300" b="0" u="none" strike="noStrike">
+              <a:rPr lang="en-US" sz="1300" b="0" u="none" strike="noStrike" dirty="0">
                 <a:solidFill>
                   <a:srgbClr val="0F1A14"/>
                 </a:solidFill>
@@ -11860,7 +11996,7 @@
               <a:t>•  </a:t>
             </a:r>
             <a:r>
-              <a:rPr lang="en-US" sz="1300" b="1" u="none" strike="noStrike">
+              <a:rPr lang="en-US" sz="1300" b="1" u="none" strike="noStrike" dirty="0">
                 <a:solidFill>
                   <a:srgbClr val="0B5D3B"/>
                 </a:solidFill>
@@ -11872,7 +12008,7 @@
               <a:t>Client Layer: </a:t>
             </a:r>
             <a:r>
-              <a:rPr lang="en-US" sz="1300" b="0" u="none" strike="noStrike">
+              <a:rPr lang="en-US" sz="1300" b="0" u="none" strike="noStrike" dirty="0">
                 <a:solidFill>
                   <a:srgbClr val="0F1A14"/>
                 </a:solidFill>
@@ -11881,9 +12017,33 @@
                 <a:latin typeface="Calibri"/>
                 <a:ea typeface="ＭＳ Ｐゴシック"/>
               </a:rPr>
-              <a:t>Next.js 14 App Router, React 18, TypeScript 5.7, Tailwind CSS, MapLibre GL 5.6 (pinned), Framer Motion, Lenis.</a:t>
-            </a:r>
-            <a:endParaRPr lang="en-US" sz="1300" b="0" u="none" strike="noStrike">
+              <a:t>Next.js 14 App Router, React 18, TypeScript 5.7, Tailwind CSS, </a:t>
+            </a:r>
+            <a:r>
+              <a:rPr lang="en-US" sz="1300" b="0" u="none" strike="noStrike" dirty="0" err="1">
+                <a:solidFill>
+                  <a:srgbClr val="0F1A14"/>
+                </a:solidFill>
+                <a:effectLst/>
+                <a:uFillTx/>
+                <a:latin typeface="Calibri"/>
+                <a:ea typeface="ＭＳ Ｐゴシック"/>
+              </a:rPr>
+              <a:t>MapLibre</a:t>
+            </a:r>
+            <a:r>
+              <a:rPr lang="en-US" sz="1300" b="0" u="none" strike="noStrike" dirty="0">
+                <a:solidFill>
+                  <a:srgbClr val="0F1A14"/>
+                </a:solidFill>
+                <a:effectLst/>
+                <a:uFillTx/>
+                <a:latin typeface="Calibri"/>
+                <a:ea typeface="ＭＳ Ｐゴシック"/>
+              </a:rPr>
+              <a:t> GL 5.6 (pinned), Framer Motion, Lenis.</a:t>
+            </a:r>
+            <a:endParaRPr lang="en-US" sz="1300" b="0" u="none" strike="noStrike" dirty="0">
               <a:solidFill>
                 <a:srgbClr val="000000"/>
               </a:solidFill>
@@ -11908,7 +12068,7 @@
               </a:tabLst>
             </a:pPr>
             <a:r>
-              <a:rPr lang="en-US" sz="1300" b="0" u="none" strike="noStrike">
+              <a:rPr lang="en-US" sz="1300" b="0" u="none" strike="noStrike" dirty="0">
                 <a:solidFill>
                   <a:srgbClr val="0F1A14"/>
                 </a:solidFill>
@@ -11920,7 +12080,7 @@
               <a:t>•  </a:t>
             </a:r>
             <a:r>
-              <a:rPr lang="en-US" sz="1300" b="1" u="none" strike="noStrike">
+              <a:rPr lang="en-US" sz="1300" b="1" u="none" strike="noStrike" dirty="0">
                 <a:solidFill>
                   <a:srgbClr val="0B5D3B"/>
                 </a:solidFill>
@@ -11932,7 +12092,7 @@
               <a:t>Gateway &amp; Services: </a:t>
             </a:r>
             <a:r>
-              <a:rPr lang="en-US" sz="1300" b="0" u="none" strike="noStrike">
+              <a:rPr lang="en-US" sz="1300" b="0" u="none" strike="noStrike" dirty="0">
                 <a:solidFill>
                   <a:srgbClr val="0F1A14"/>
                 </a:solidFill>
@@ -11941,9 +12101,57 @@
                 <a:latin typeface="Calibri"/>
                 <a:ea typeface="ＭＳ Ｐゴシック"/>
               </a:rPr>
-              <a:t>Next.js Proxy, FastAPI, SQLModel/SQLite (zero-ops sync), JWT OTP + Google OAuth with server-side allowlist RBAC.</a:t>
-            </a:r>
-            <a:endParaRPr lang="en-US" sz="1300" b="0" u="none" strike="noStrike">
+              <a:t>Next.js Proxy, </a:t>
+            </a:r>
+            <a:r>
+              <a:rPr lang="en-US" sz="1300" b="0" u="none" strike="noStrike" dirty="0" err="1">
+                <a:solidFill>
+                  <a:srgbClr val="0F1A14"/>
+                </a:solidFill>
+                <a:effectLst/>
+                <a:uFillTx/>
+                <a:latin typeface="Calibri"/>
+                <a:ea typeface="ＭＳ Ｐゴシック"/>
+              </a:rPr>
+              <a:t>FastAPI</a:t>
+            </a:r>
+            <a:r>
+              <a:rPr lang="en-US" sz="1300" b="0" u="none" strike="noStrike" dirty="0">
+                <a:solidFill>
+                  <a:srgbClr val="0F1A14"/>
+                </a:solidFill>
+                <a:effectLst/>
+                <a:uFillTx/>
+                <a:latin typeface="Calibri"/>
+                <a:ea typeface="ＭＳ Ｐゴシック"/>
+              </a:rPr>
+              <a:t>, </a:t>
+            </a:r>
+            <a:r>
+              <a:rPr lang="en-US" sz="1300" b="0" u="none" strike="noStrike" dirty="0" err="1">
+                <a:solidFill>
+                  <a:srgbClr val="0F1A14"/>
+                </a:solidFill>
+                <a:effectLst/>
+                <a:uFillTx/>
+                <a:latin typeface="Calibri"/>
+                <a:ea typeface="ＭＳ Ｐゴシック"/>
+              </a:rPr>
+              <a:t>SQLModel</a:t>
+            </a:r>
+            <a:r>
+              <a:rPr lang="en-US" sz="1300" b="0" u="none" strike="noStrike" dirty="0">
+                <a:solidFill>
+                  <a:srgbClr val="0F1A14"/>
+                </a:solidFill>
+                <a:effectLst/>
+                <a:uFillTx/>
+                <a:latin typeface="Calibri"/>
+                <a:ea typeface="ＭＳ Ｐゴシック"/>
+              </a:rPr>
+              <a:t>/SQLite (zero-ops sync), JWT OTP + Google OAuth with server-side allowlist RBAC.</a:t>
+            </a:r>
+            <a:endParaRPr lang="en-US" sz="1300" b="0" u="none" strike="noStrike" dirty="0">
               <a:solidFill>
                 <a:srgbClr val="000000"/>
               </a:solidFill>
@@ -11968,7 +12176,7 @@
               </a:tabLst>
             </a:pPr>
             <a:r>
-              <a:rPr lang="en-US" sz="1300" b="0" u="none" strike="noStrike">
+              <a:rPr lang="en-US" sz="1300" b="0" u="none" strike="noStrike" dirty="0">
                 <a:solidFill>
                   <a:srgbClr val="0F1A14"/>
                 </a:solidFill>
@@ -11980,7 +12188,7 @@
               <a:t>•  </a:t>
             </a:r>
             <a:r>
-              <a:rPr lang="en-US" sz="1300" b="1" u="none" strike="noStrike">
+              <a:rPr lang="en-US" sz="1300" b="1" u="none" strike="noStrike" dirty="0">
                 <a:solidFill>
                   <a:srgbClr val="0B5D3B"/>
                 </a:solidFill>
@@ -11992,7 +12200,7 @@
               <a:t>AI &amp; Spatial Pipeline: </a:t>
             </a:r>
             <a:r>
-              <a:rPr lang="en-US" sz="1300" b="0" u="none" strike="noStrike">
+              <a:rPr lang="en-US" sz="1300" b="0" u="none" strike="noStrike" dirty="0" err="1">
                 <a:solidFill>
                   <a:srgbClr val="0F1A14"/>
                 </a:solidFill>
@@ -12001,9 +12209,45 @@
                 <a:latin typeface="Calibri"/>
                 <a:ea typeface="ＭＳ Ｐゴシック"/>
               </a:rPr>
-              <a:t>Groq LPU (openai/gpt-oss-20b for trilingual narratives &amp; SSE advisor), Overpass API (OSM live shops) with dual-endpoint retries.</a:t>
-            </a:r>
-            <a:endParaRPr lang="en-US" sz="1300" b="0" u="none" strike="noStrike">
+              <a:t>Groq</a:t>
+            </a:r>
+            <a:r>
+              <a:rPr lang="en-US" sz="1300" b="0" u="none" strike="noStrike" dirty="0">
+                <a:solidFill>
+                  <a:srgbClr val="0F1A14"/>
+                </a:solidFill>
+                <a:effectLst/>
+                <a:uFillTx/>
+                <a:latin typeface="Calibri"/>
+                <a:ea typeface="ＭＳ Ｐゴシック"/>
+              </a:rPr>
+              <a:t> LPU (</a:t>
+            </a:r>
+            <a:r>
+              <a:rPr lang="en-US" sz="1300" b="0" u="none" strike="noStrike" dirty="0" err="1">
+                <a:solidFill>
+                  <a:srgbClr val="0F1A14"/>
+                </a:solidFill>
+                <a:effectLst/>
+                <a:uFillTx/>
+                <a:latin typeface="Calibri"/>
+                <a:ea typeface="ＭＳ Ｐゴシック"/>
+              </a:rPr>
+              <a:t>openai</a:t>
+            </a:r>
+            <a:r>
+              <a:rPr lang="en-US" sz="1300" b="0" u="none" strike="noStrike" dirty="0">
+                <a:solidFill>
+                  <a:srgbClr val="0F1A14"/>
+                </a:solidFill>
+                <a:effectLst/>
+                <a:uFillTx/>
+                <a:latin typeface="Calibri"/>
+                <a:ea typeface="ＭＳ Ｐゴシック"/>
+              </a:rPr>
+              <a:t>/gpt-oss-20b for trilingual narratives &amp; SSE advisor), Overpass API (OSM live shops) with dual-endpoint retries.</a:t>
+            </a:r>
+            <a:endParaRPr lang="en-US" sz="1300" b="0" u="none" strike="noStrike" dirty="0">
               <a:solidFill>
                 <a:srgbClr val="000000"/>
               </a:solidFill>
@@ -12028,7 +12272,7 @@
               </a:tabLst>
             </a:pPr>
             <a:r>
-              <a:rPr lang="en-US" sz="1300" b="0" u="none" strike="noStrike">
+              <a:rPr lang="en-US" sz="1300" b="0" u="none" strike="noStrike" dirty="0">
                 <a:solidFill>
                   <a:srgbClr val="0F1A14"/>
                 </a:solidFill>
@@ -12040,7 +12284,7 @@
               <a:t>•  </a:t>
             </a:r>
             <a:r>
-              <a:rPr lang="en-US" sz="1300" b="1" u="none" strike="noStrike">
+              <a:rPr lang="en-US" sz="1300" b="1" u="none" strike="noStrike" dirty="0">
                 <a:solidFill>
                   <a:srgbClr val="0B5D3B"/>
                 </a:solidFill>
@@ -12052,7 +12296,7 @@
               <a:t>Data Foundation: </a:t>
             </a:r>
             <a:r>
-              <a:rPr lang="en-US" sz="1300" b="0" u="none" strike="noStrike">
+              <a:rPr lang="en-US" sz="1300" b="0" u="none" strike="noStrike" dirty="0">
                 <a:solidFill>
                   <a:srgbClr val="0F1A14"/>
                 </a:solidFill>
@@ -12061,9 +12305,57 @@
                 <a:latin typeface="Calibri"/>
                 <a:ea typeface="ＭＳ Ｐゴシック"/>
               </a:rPr>
-              <a:t>Integrated Census 2011 PCA, Mission Antyodaya 2020 rural infrastructure, and Agmarknet commodity pricing datasets.</a:t>
-            </a:r>
-            <a:endParaRPr lang="en-US" sz="1300" b="0" u="none" strike="noStrike">
+              <a:t>Integrated Census 2011 PCA, Mission </a:t>
+            </a:r>
+            <a:r>
+              <a:rPr lang="en-US" sz="1300" b="0" u="none" strike="noStrike" dirty="0" err="1">
+                <a:solidFill>
+                  <a:srgbClr val="0F1A14"/>
+                </a:solidFill>
+                <a:effectLst/>
+                <a:uFillTx/>
+                <a:latin typeface="Calibri"/>
+                <a:ea typeface="ＭＳ Ｐゴシック"/>
+              </a:rPr>
+              <a:t>Antyodaya</a:t>
+            </a:r>
+            <a:r>
+              <a:rPr lang="en-US" sz="1300" b="0" u="none" strike="noStrike" dirty="0">
+                <a:solidFill>
+                  <a:srgbClr val="0F1A14"/>
+                </a:solidFill>
+                <a:effectLst/>
+                <a:uFillTx/>
+                <a:latin typeface="Calibri"/>
+                <a:ea typeface="ＭＳ Ｐゴシック"/>
+              </a:rPr>
+              <a:t> 2020 rural infrastructure, and </a:t>
+            </a:r>
+            <a:r>
+              <a:rPr lang="en-US" sz="1300" b="0" u="none" strike="noStrike" dirty="0" err="1">
+                <a:solidFill>
+                  <a:srgbClr val="0F1A14"/>
+                </a:solidFill>
+                <a:effectLst/>
+                <a:uFillTx/>
+                <a:latin typeface="Calibri"/>
+                <a:ea typeface="ＭＳ Ｐゴシック"/>
+              </a:rPr>
+              <a:t>Agmarknet</a:t>
+            </a:r>
+            <a:r>
+              <a:rPr lang="en-US" sz="1300" b="0" u="none" strike="noStrike" dirty="0">
+                <a:solidFill>
+                  <a:srgbClr val="0F1A14"/>
+                </a:solidFill>
+                <a:effectLst/>
+                <a:uFillTx/>
+                <a:latin typeface="Calibri"/>
+                <a:ea typeface="ＭＳ Ｐゴシック"/>
+              </a:rPr>
+              <a:t> commodity pricing datasets.</a:t>
+            </a:r>
+            <a:endParaRPr lang="en-US" sz="1300" b="0" u="none" strike="noStrike" dirty="0">
               <a:solidFill>
                 <a:srgbClr val="000000"/>
               </a:solidFill>
@@ -12088,7 +12380,7 @@
               </a:tabLst>
             </a:pPr>
             <a:r>
-              <a:rPr lang="en-US" sz="1300" b="1" u="none" strike="noStrike">
+              <a:rPr lang="en-US" sz="1300" b="1" u="none" strike="noStrike" dirty="0">
                 <a:solidFill>
                   <a:srgbClr val="4F81BD"/>
                 </a:solidFill>
@@ -12099,7 +12391,7 @@
               </a:rPr>
               <a:t>Methodology &amp; Implementation Process</a:t>
             </a:r>
-            <a:endParaRPr lang="en-US" sz="1300" b="0" u="none" strike="noStrike">
+            <a:endParaRPr lang="en-US" sz="1300" b="0" u="none" strike="noStrike" dirty="0">
               <a:solidFill>
                 <a:srgbClr val="000000"/>
               </a:solidFill>
@@ -12124,7 +12416,7 @@
               </a:tabLst>
             </a:pPr>
             <a:r>
-              <a:rPr lang="en-US" sz="1300" b="0" u="none" strike="noStrike">
+              <a:rPr lang="en-US" sz="1300" b="0" u="none" strike="noStrike" dirty="0">
                 <a:solidFill>
                   <a:srgbClr val="0F1A14"/>
                 </a:solidFill>
@@ -12136,7 +12428,7 @@
               <a:t>•  </a:t>
             </a:r>
             <a:r>
-              <a:rPr lang="en-US" sz="1300" b="1" u="none" strike="noStrike">
+              <a:rPr lang="en-US" sz="1300" b="1" u="none" strike="noStrike" dirty="0">
                 <a:solidFill>
                   <a:srgbClr val="0B5D3B"/>
                 </a:solidFill>
@@ -12145,10 +12437,32 @@
                 <a:latin typeface="Calibri"/>
                 <a:ea typeface="ＭＳ Ｐゴシック"/>
               </a:rPr>
-              <a:t>1. Zero-Hallucination Engine: </a:t>
-            </a:r>
-            <a:r>
-              <a:rPr lang="en-US" sz="1300" b="0" u="none" strike="noStrike">
+              <a:t>1.</a:t>
+            </a:r>
+            <a:r>
+              <a:rPr lang="en-US" sz="1300" b="1" dirty="0">
+                <a:solidFill>
+                  <a:srgbClr val="0B5D3B"/>
+                </a:solidFill>
+                <a:latin typeface="Calibri"/>
+                <a:ea typeface="ＭＳ Ｐゴシック"/>
+              </a:rPr>
+              <a:t>Deterministic Financial Engine</a:t>
+            </a:r>
+            <a:r>
+              <a:rPr lang="en-US" sz="1300" b="1" u="none" strike="noStrike" dirty="0">
+                <a:solidFill>
+                  <a:srgbClr val="0B5D3B"/>
+                </a:solidFill>
+                <a:effectLst/>
+                <a:uFillTx/>
+                <a:latin typeface="Calibri"/>
+                <a:ea typeface="ＭＳ Ｐゴシック"/>
+              </a:rPr>
+              <a:t>: </a:t>
+            </a:r>
+            <a:r>
+              <a:rPr lang="en-US" sz="1300" b="0" u="none" strike="noStrike" dirty="0">
                 <a:solidFill>
                   <a:srgbClr val="0F1A14"/>
                 </a:solidFill>
@@ -12157,9 +12471,33 @@
                 <a:latin typeface="Calibri"/>
                 <a:ea typeface="ＭＳ Ｐゴシック"/>
               </a:rPr>
-              <a:t>Deterministic financial &amp; feasibility math strictly verified with 56 automated pytest unit/integration tests.</a:t>
-            </a:r>
-            <a:endParaRPr lang="en-US" sz="1300" b="0" u="none" strike="noStrike">
+              <a:t>Deterministic financial &amp; feasibility math strictly verified with 56 automated </a:t>
+            </a:r>
+            <a:r>
+              <a:rPr lang="en-US" sz="1300" b="0" u="none" strike="noStrike" dirty="0" err="1">
+                <a:solidFill>
+                  <a:srgbClr val="0F1A14"/>
+                </a:solidFill>
+                <a:effectLst/>
+                <a:uFillTx/>
+                <a:latin typeface="Calibri"/>
+                <a:ea typeface="ＭＳ Ｐゴシック"/>
+              </a:rPr>
+              <a:t>pytest</a:t>
+            </a:r>
+            <a:r>
+              <a:rPr lang="en-US" sz="1300" b="0" u="none" strike="noStrike" dirty="0">
+                <a:solidFill>
+                  <a:srgbClr val="0F1A14"/>
+                </a:solidFill>
+                <a:effectLst/>
+                <a:uFillTx/>
+                <a:latin typeface="Calibri"/>
+                <a:ea typeface="ＭＳ Ｐゴシック"/>
+              </a:rPr>
+              <a:t> unit/integration tests.</a:t>
+            </a:r>
+            <a:endParaRPr lang="en-US" sz="1300" b="0" u="none" strike="noStrike" dirty="0">
               <a:solidFill>
                 <a:srgbClr val="000000"/>
               </a:solidFill>
@@ -12184,7 +12522,7 @@
               </a:tabLst>
             </a:pPr>
             <a:r>
-              <a:rPr lang="en-US" sz="1300" b="0" u="none" strike="noStrike">
+              <a:rPr lang="en-US" sz="1300" b="0" u="none" strike="noStrike" dirty="0">
                 <a:solidFill>
                   <a:srgbClr val="0F1A14"/>
                 </a:solidFill>
@@ -12196,7 +12534,7 @@
               <a:t>•  </a:t>
             </a:r>
             <a:r>
-              <a:rPr lang="en-US" sz="1300" b="1" u="none" strike="noStrike">
+              <a:rPr lang="en-US" sz="1300" b="1" u="none" strike="noStrike" dirty="0">
                 <a:solidFill>
                   <a:srgbClr val="0B5D3B"/>
                 </a:solidFill>
@@ -12208,7 +12546,7 @@
               <a:t>2. Ground-Truth Ingestion: </a:t>
             </a:r>
             <a:r>
-              <a:rPr lang="en-US" sz="1300" b="0" u="none" strike="noStrike">
+              <a:rPr lang="en-US" sz="1300" b="0" u="none" strike="noStrike" dirty="0">
                 <a:solidFill>
                   <a:srgbClr val="0F1A14"/>
                 </a:solidFill>
@@ -12219,7 +12557,7 @@
               </a:rPr>
               <a:t>Directly computes consumer volume and monthly demand from village household counts and category spend benchmarks.</a:t>
             </a:r>
-            <a:endParaRPr lang="en-US" sz="1300" b="0" u="none" strike="noStrike">
+            <a:endParaRPr lang="en-US" sz="1300" b="0" u="none" strike="noStrike" dirty="0">
               <a:solidFill>
                 <a:srgbClr val="000000"/>
               </a:solidFill>
@@ -12244,7 +12582,7 @@
               </a:tabLst>
             </a:pPr>
             <a:r>
-              <a:rPr lang="en-US" sz="1300" b="0" u="none" strike="noStrike">
+              <a:rPr lang="en-US" sz="1300" b="0" u="none" strike="noStrike" dirty="0">
                 <a:solidFill>
                   <a:srgbClr val="0F1A14"/>
                 </a:solidFill>
@@ -12256,7 +12594,7 @@
               <a:t>•  </a:t>
             </a:r>
             <a:r>
-              <a:rPr lang="en-US" sz="1300" b="1" u="none" strike="noStrike">
+              <a:rPr lang="en-US" sz="1300" b="1" u="none" strike="noStrike" dirty="0">
                 <a:solidFill>
                   <a:srgbClr val="0B5D3B"/>
                 </a:solidFill>
@@ -12268,18 +12606,10 @@
               <a:t>3. Multi-Tier Resilience: </a:t>
             </a:r>
             <a:r>
-              <a:rPr lang="en-US" sz="1300" b="0" u="none" strike="noStrike">
-                <a:solidFill>
-                  <a:srgbClr val="0F1A14"/>
-                </a:solidFill>
-                <a:effectLst/>
-                <a:uFillTx/>
-                <a:latin typeface="Calibri"/>
-                <a:ea typeface="ＭＳ Ｐゴシック"/>
-              </a:rPr>
-              <a:t>Guaranteed 100% uptime with pre-seeded regional fallbacks; zero blank screens under low rural bandwidth.</a:t>
-            </a:r>
-            <a:endParaRPr lang="en-US" sz="1300" b="0" u="none" strike="noStrike">
+              <a:rPr lang="en-IN" sz="1400" dirty="0"/>
+              <a:t>Resilient operation with pre-seeded regional fallbacks</a:t>
+            </a:r>
+            <a:endParaRPr lang="en-US" sz="1300" b="0" u="none" strike="noStrike" dirty="0">
               <a:solidFill>
                 <a:srgbClr val="000000"/>
               </a:solidFill>
@@ -12314,7 +12644,7 @@
           </a:ln>
         </p:spPr>
         <p:txBody>
-          <a:bodyPr numCol="1" spcCol="0" lIns="91440" tIns="45720" rIns="91440" bIns="45720" anchor="ctr">
+          <a:bodyPr lIns="91440" tIns="45720" rIns="91440" bIns="45720" numCol="1" spcCol="0" anchor="ctr">
             <a:noAutofit/>
           </a:bodyPr>
           <a:lstStyle>
@@ -12351,7 +12681,7 @@
                 <a:latin typeface="TradeGothic"/>
                 <a:ea typeface="ＭＳ Ｐゴシック"/>
               </a:rPr>
-              <a:t>&lt;number&gt;</a:t>
+              <a:t>3</a:t>
             </a:fld>
             <a:endParaRPr lang="en-US" sz="1200" b="0" u="none" strike="noStrike">
               <a:solidFill>
@@ -12476,6 +12806,7 @@
           <a:bodyPr lIns="90000" tIns="45000" rIns="90000" bIns="45000" anchor="ctr">
             <a:noAutofit/>
           </a:bodyPr>
+          <a:lstStyle/>
           <a:p>
             <a:pPr algn="ctr" defTabSz="457200">
               <a:lnSpc>
@@ -12515,7 +12846,7 @@
           <p:nvPr/>
         </p:nvPicPr>
         <p:blipFill>
-          <a:blip r:embed="rId1"/>
+          <a:blip r:embed="rId3"/>
           <a:stretch/>
         </p:blipFill>
         <p:spPr>
@@ -12539,7 +12870,7 @@
           <p:nvPr/>
         </p:nvPicPr>
         <p:blipFill>
-          <a:blip r:embed="rId2"/>
+          <a:blip r:embed="rId4"/>
           <a:stretch/>
         </p:blipFill>
         <p:spPr>
@@ -12576,15 +12907,22 @@
           </a:ln>
         </p:spPr>
         <p:style>
-          <a:lnRef idx="0"/>
-          <a:fillRef idx="0"/>
-          <a:effectRef idx="0"/>
+          <a:lnRef idx="0">
+            <a:scrgbClr r="0" g="0" b="0"/>
+          </a:lnRef>
+          <a:fillRef idx="0">
+            <a:scrgbClr r="0" g="0" b="0"/>
+          </a:fillRef>
+          <a:effectRef idx="0">
+            <a:scrgbClr r="0" g="0" b="0"/>
+          </a:effectRef>
           <a:fontRef idx="minor"/>
         </p:style>
         <p:txBody>
           <a:bodyPr lIns="90000" tIns="45000" rIns="90000" bIns="45000" anchor="t">
             <a:spAutoFit/>
           </a:bodyPr>
+          <a:lstStyle/>
           <a:p>
             <a:pPr algn="ctr" defTabSz="457200">
               <a:lnSpc>
@@ -12640,7 +12978,7 @@
             <a:noFill/>
           </a:ln>
           <a:effectLst>
-            <a:outerShdw blurRad="39960" dir="5400000" dist="23040" rotWithShape="0">
+            <a:outerShdw blurRad="39960" dist="23040" dir="5400000" rotWithShape="0">
               <a:srgbClr val="000000">
                 <a:alpha val="35000"/>
               </a:srgbClr>
@@ -12663,6 +13001,7 @@
           <a:bodyPr lIns="90000" tIns="45000" rIns="90000" bIns="45000" anchor="ctr">
             <a:noAutofit/>
           </a:bodyPr>
+          <a:lstStyle/>
           <a:p>
             <a:pPr algn="ctr" defTabSz="457200">
               <a:lnSpc>
@@ -12739,15 +13078,22 @@
           </a:ln>
         </p:spPr>
         <p:style>
-          <a:lnRef idx="0"/>
-          <a:fillRef idx="0"/>
-          <a:effectRef idx="0"/>
+          <a:lnRef idx="0">
+            <a:scrgbClr r="0" g="0" b="0"/>
+          </a:lnRef>
+          <a:fillRef idx="0">
+            <a:scrgbClr r="0" g="0" b="0"/>
+          </a:fillRef>
+          <a:effectRef idx="0">
+            <a:scrgbClr r="0" g="0" b="0"/>
+          </a:effectRef>
           <a:fontRef idx="minor"/>
         </p:style>
         <p:txBody>
           <a:bodyPr wrap="none" lIns="90000" tIns="45000" rIns="90000" bIns="45000" anchor="t">
             <a:spAutoFit/>
           </a:bodyPr>
+          <a:lstStyle/>
           <a:p>
             <a:pPr algn="ctr" defTabSz="457200">
               <a:lnSpc>
@@ -12800,7 +13146,7 @@
             <a:noFill/>
           </a:ln>
           <a:effectLst>
-            <a:outerShdw blurRad="39960" dir="5400000" dist="23040" rotWithShape="0">
+            <a:outerShdw blurRad="39960" dist="23040" dir="5400000" rotWithShape="0">
               <a:srgbClr val="000000">
                 <a:alpha val="35000"/>
               </a:srgbClr>
@@ -12823,6 +13169,7 @@
           <a:bodyPr lIns="90000" tIns="45000" rIns="90000" bIns="45000" anchor="ctr">
             <a:noAutofit/>
           </a:bodyPr>
+          <a:lstStyle/>
           <a:p>
             <a:pPr algn="ctr" defTabSz="457200">
               <a:lnSpc>
@@ -12945,15 +13292,22 @@
           </a:ln>
         </p:spPr>
         <p:style>
-          <a:lnRef idx="0"/>
-          <a:fillRef idx="0"/>
-          <a:effectRef idx="0"/>
+          <a:lnRef idx="0">
+            <a:scrgbClr r="0" g="0" b="0"/>
+          </a:lnRef>
+          <a:fillRef idx="0">
+            <a:scrgbClr r="0" g="0" b="0"/>
+          </a:fillRef>
+          <a:effectRef idx="0">
+            <a:scrgbClr r="0" g="0" b="0"/>
+          </a:effectRef>
           <a:fontRef idx="minor"/>
         </p:style>
         <p:txBody>
           <a:bodyPr wrap="none" lIns="90000" tIns="45000" rIns="90000" bIns="45000" anchor="t">
             <a:spAutoFit/>
           </a:bodyPr>
+          <a:lstStyle/>
           <a:p>
             <a:pPr algn="ctr" defTabSz="457200">
               <a:lnSpc>
@@ -13006,7 +13360,7 @@
             <a:noFill/>
           </a:ln>
           <a:effectLst>
-            <a:outerShdw blurRad="39960" dir="5400000" dist="23040" rotWithShape="0">
+            <a:outerShdw blurRad="39960" dist="23040" dir="5400000" rotWithShape="0">
               <a:srgbClr val="000000">
                 <a:alpha val="35000"/>
               </a:srgbClr>
@@ -13029,6 +13383,7 @@
           <a:bodyPr lIns="90000" tIns="45000" rIns="90000" bIns="45000" anchor="ctr">
             <a:noAutofit/>
           </a:bodyPr>
+          <a:lstStyle/>
           <a:p>
             <a:pPr algn="ctr" defTabSz="457200">
               <a:lnSpc>
@@ -13087,19 +13442,14 @@
       </p:sp>
     </p:spTree>
   </p:cSld>
-  <mc:AlternateContent>
-    <mc:Choice Requires="p14">
-      <p:transition spd="slow" p14:dur="2000"/>
-    </mc:Choice>
-    <mc:Fallback>
-      <p:transition spd="slow"/>
-    </mc:Fallback>
-  </mc:AlternateContent>
+  <p:clrMapOvr>
+    <a:masterClrMapping/>
+  </p:clrMapOvr>
 </p:sld>
 </file>
 
 <file path=ppt/slides/slide4.xml><?xml version="1.0" encoding="utf-8"?>
-<p:sld xmlns:a="http://schemas.openxmlformats.org/drawingml/2006/main" xmlns:p="http://schemas.openxmlformats.org/presentationml/2006/main" xmlns:r="http://schemas.openxmlformats.org/officeDocument/2006/relationships" xmlns:p14="http://schemas.microsoft.com/office/powerpoint/2010/main" xmlns:p15="http://schemas.microsoft.com/office/powerpoint/2012/main" xmlns:mc="http://schemas.openxmlformats.org/markup-compatibility/2006">
+<p:sld xmlns:a="http://schemas.openxmlformats.org/drawingml/2006/main" xmlns:r="http://schemas.openxmlformats.org/officeDocument/2006/relationships" xmlns:p="http://schemas.openxmlformats.org/presentationml/2006/main">
   <p:cSld>
     <p:spTree>
       <p:nvGrpSpPr>
@@ -13136,7 +13486,7 @@
             <a:noFill/>
           </a:ln>
           <a:effectLst>
-            <a:outerShdw dir="5400000" dist="23040" rotWithShape="0">
+            <a:outerShdw dist="23040" dir="5400000" rotWithShape="0">
               <a:srgbClr val="808080">
                 <a:alpha val="35000"/>
               </a:srgbClr>
@@ -13144,17 +13494,23 @@
           </a:effectLst>
         </p:spPr>
         <p:style>
-          <a:lnRef idx="0"/>
-          <a:fillRef idx="0"/>
-          <a:effectRef idx="0"/>
+          <a:lnRef idx="0">
+            <a:scrgbClr r="0" g="0" b="0"/>
+          </a:lnRef>
+          <a:fillRef idx="0">
+            <a:scrgbClr r="0" g="0" b="0"/>
+          </a:fillRef>
+          <a:effectRef idx="0">
+            <a:scrgbClr r="0" g="0" b="0"/>
+          </a:effectRef>
           <a:fontRef idx="minor"/>
         </p:style>
         <p:txBody>
           <a:bodyPr lIns="90000" tIns="45000" rIns="90000" bIns="45000" anchor="ctr">
             <a:noAutofit/>
           </a:bodyPr>
-          <a:p>
-            <a:pPr/>
+          <a:lstStyle/>
+          <a:p>
             <a:endParaRPr lang="en-US" sz="1800" b="0" u="none" strike="noStrike">
               <a:solidFill>
                 <a:srgbClr val="953735"/>
@@ -13190,9 +13546,10 @@
           </a:ln>
         </p:spPr>
         <p:txBody>
-          <a:bodyPr numCol="1" spcCol="0" lIns="91440" tIns="45720" rIns="91440" bIns="45720" anchor="ctr">
+          <a:bodyPr lIns="91440" tIns="45720" rIns="91440" bIns="45720" numCol="1" spcCol="0" anchor="ctr">
             <a:noAutofit/>
           </a:bodyPr>
+          <a:lstStyle/>
           <a:p>
             <a:pPr indent="0" algn="ctr" defTabSz="457200">
               <a:lnSpc>
@@ -13243,15 +13600,22 @@
           </a:ln>
         </p:spPr>
         <p:style>
-          <a:lnRef idx="0"/>
-          <a:fillRef idx="0"/>
-          <a:effectRef idx="0"/>
+          <a:lnRef idx="0">
+            <a:scrgbClr r="0" g="0" b="0"/>
+          </a:lnRef>
+          <a:fillRef idx="0">
+            <a:scrgbClr r="0" g="0" b="0"/>
+          </a:fillRef>
+          <a:effectRef idx="0">
+            <a:scrgbClr r="0" g="0" b="0"/>
+          </a:effectRef>
           <a:fontRef idx="minor"/>
         </p:style>
         <p:txBody>
           <a:bodyPr lIns="90000" tIns="45000" rIns="90000" bIns="45000" anchor="t">
             <a:spAutoFit/>
           </a:bodyPr>
+          <a:lstStyle/>
           <a:p>
             <a:pPr marL="343080" indent="-343080" defTabSz="457200">
               <a:lnSpc>
@@ -13576,7 +13940,7 @@
           </a:ln>
         </p:spPr>
         <p:txBody>
-          <a:bodyPr numCol="1" spcCol="0" lIns="91440" tIns="45720" rIns="91440" bIns="45720" anchor="ctr">
+          <a:bodyPr lIns="91440" tIns="45720" rIns="91440" bIns="45720" numCol="1" spcCol="0" anchor="ctr">
             <a:noAutofit/>
           </a:bodyPr>
           <a:lstStyle>
@@ -13619,7 +13983,7 @@
                 <a:latin typeface="TradeGothic"/>
                 <a:ea typeface="ＭＳ Ｐゴシック"/>
               </a:rPr>
-              <a:t>&lt;number&gt;</a:t>
+              <a:t>4</a:t>
             </a:fld>
             <a:endParaRPr lang="en-US" sz="1200" b="0" u="none" strike="noStrike">
               <a:solidFill>
@@ -13750,6 +14114,7 @@
           <a:bodyPr lIns="90000" tIns="45000" rIns="90000" bIns="45000" anchor="ctr">
             <a:noAutofit/>
           </a:bodyPr>
+          <a:lstStyle/>
           <a:p>
             <a:pPr algn="ctr" defTabSz="457200">
               <a:lnSpc>
@@ -13789,7 +14154,7 @@
           <p:nvPr/>
         </p:nvPicPr>
         <p:blipFill>
-          <a:blip r:embed="rId1"/>
+          <a:blip r:embed="rId3"/>
           <a:stretch/>
         </p:blipFill>
         <p:spPr>
@@ -13814,23 +14179,40 @@
         </p:nvGraphicFramePr>
         <p:xfrm>
           <a:off x="612720" y="2606040"/>
-          <a:ext cx="10972440" cy="3061440"/>
+          <a:ext cx="10972800" cy="3061800"/>
         </p:xfrm>
         <a:graphic>
           <a:graphicData uri="http://schemas.openxmlformats.org/drawingml/2006/table">
             <a:tbl>
               <a:tblPr/>
               <a:tblGrid>
-                <a:gridCol w="3108960"/>
-                <a:gridCol w="6035040"/>
-                <a:gridCol w="1828800"/>
+                <a:gridCol w="3108960">
+                  <a:extLst>
+                    <a:ext uri="{9D8B030D-6E8A-4147-A177-3AD203B41FA5}">
+                      <a16:colId xmlns:a16="http://schemas.microsoft.com/office/drawing/2014/main" val="20000"/>
+                    </a:ext>
+                  </a:extLst>
+                </a:gridCol>
+                <a:gridCol w="6035040">
+                  <a:extLst>
+                    <a:ext uri="{9D8B030D-6E8A-4147-A177-3AD203B41FA5}">
+                      <a16:colId xmlns:a16="http://schemas.microsoft.com/office/drawing/2014/main" val="20001"/>
+                    </a:ext>
+                  </a:extLst>
+                </a:gridCol>
+                <a:gridCol w="1828800">
+                  <a:extLst>
+                    <a:ext uri="{9D8B030D-6E8A-4147-A177-3AD203B41FA5}">
+                      <a16:colId xmlns:a16="http://schemas.microsoft.com/office/drawing/2014/main" val="20002"/>
+                    </a:ext>
+                  </a:extLst>
+                </a:gridCol>
               </a:tblGrid>
               <a:tr h="612360">
                 <a:tc>
                   <a:txBody>
-                    <a:bodyPr anchor="t">
-                      <a:noAutofit/>
-                    </a:bodyPr>
+                    <a:bodyPr/>
+                    <a:lstStyle/>
                     <a:p>
                       <a:pPr defTabSz="457200">
                         <a:lnSpc>
@@ -13858,7 +14240,7 @@
                       </a:endParaRPr>
                     </a:p>
                   </a:txBody>
-                  <a:tcPr anchor="t" marL="91440" marR="91440" marT="45720" marB="45720">
+                  <a:tcPr>
                     <a:lnL w="12240">
                       <a:solidFill>
                         <a:srgbClr val="FFFFFF"/>
@@ -13890,9 +14272,8 @@
                 </a:tc>
                 <a:tc>
                   <a:txBody>
-                    <a:bodyPr anchor="t">
-                      <a:noAutofit/>
-                    </a:bodyPr>
+                    <a:bodyPr/>
+                    <a:lstStyle/>
                     <a:p>
                       <a:pPr defTabSz="457200">
                         <a:lnSpc>
@@ -13920,7 +14301,7 @@
                       </a:endParaRPr>
                     </a:p>
                   </a:txBody>
-                  <a:tcPr anchor="t" marL="91440" marR="91440" marT="45720" marB="45720">
+                  <a:tcPr>
                     <a:lnL w="12240">
                       <a:solidFill>
                         <a:srgbClr val="FFFFFF"/>
@@ -13952,9 +14333,8 @@
                 </a:tc>
                 <a:tc>
                   <a:txBody>
-                    <a:bodyPr anchor="t">
-                      <a:noAutofit/>
-                    </a:bodyPr>
+                    <a:bodyPr/>
+                    <a:lstStyle/>
                     <a:p>
                       <a:pPr defTabSz="457200">
                         <a:lnSpc>
@@ -13982,7 +14362,7 @@
                       </a:endParaRPr>
                     </a:p>
                   </a:txBody>
-                  <a:tcPr anchor="t" marL="91440" marR="91440" marT="45720" marB="45720">
+                  <a:tcPr>
                     <a:lnL w="12240">
                       <a:solidFill>
                         <a:srgbClr val="FFFFFF"/>
@@ -14012,13 +14392,17 @@
                     </a:solidFill>
                   </a:tcPr>
                 </a:tc>
+                <a:extLst>
+                  <a:ext uri="{0D108BD9-81ED-4DB2-BD59-A6C34878D82A}">
+                    <a16:rowId xmlns:a16="http://schemas.microsoft.com/office/drawing/2014/main" val="10000"/>
+                  </a:ext>
+                </a:extLst>
               </a:tr>
               <a:tr h="612360">
                 <a:tc>
                   <a:txBody>
-                    <a:bodyPr anchor="t">
-                      <a:noAutofit/>
-                    </a:bodyPr>
+                    <a:bodyPr/>
+                    <a:lstStyle/>
                     <a:p>
                       <a:pPr defTabSz="457200">
                         <a:lnSpc>
@@ -14046,7 +14430,7 @@
                       </a:endParaRPr>
                     </a:p>
                   </a:txBody>
-                  <a:tcPr anchor="t" marL="91440" marR="91440" marT="45720" marB="45720">
+                  <a:tcPr>
                     <a:lnL w="12240">
                       <a:solidFill>
                         <a:srgbClr val="FFFFFF"/>
@@ -14078,9 +14462,8 @@
                 </a:tc>
                 <a:tc>
                   <a:txBody>
-                    <a:bodyPr anchor="t">
-                      <a:noAutofit/>
-                    </a:bodyPr>
+                    <a:bodyPr/>
+                    <a:lstStyle/>
                     <a:p>
                       <a:pPr defTabSz="457200">
                         <a:lnSpc>
@@ -14108,7 +14491,7 @@
                       </a:endParaRPr>
                     </a:p>
                   </a:txBody>
-                  <a:tcPr anchor="t" marL="91440" marR="91440" marT="45720" marB="45720">
+                  <a:tcPr>
                     <a:lnL w="12240">
                       <a:solidFill>
                         <a:srgbClr val="FFFFFF"/>
@@ -14140,9 +14523,8 @@
                 </a:tc>
                 <a:tc>
                   <a:txBody>
-                    <a:bodyPr anchor="t">
-                      <a:noAutofit/>
-                    </a:bodyPr>
+                    <a:bodyPr/>
+                    <a:lstStyle/>
                     <a:p>
                       <a:pPr defTabSz="457200">
                         <a:lnSpc>
@@ -14170,7 +14552,7 @@
                       </a:endParaRPr>
                     </a:p>
                   </a:txBody>
-                  <a:tcPr anchor="t" marL="91440" marR="91440" marT="45720" marB="45720">
+                  <a:tcPr>
                     <a:lnL w="12240">
                       <a:solidFill>
                         <a:srgbClr val="FFFFFF"/>
@@ -14200,13 +14582,17 @@
                     </a:solidFill>
                   </a:tcPr>
                 </a:tc>
+                <a:extLst>
+                  <a:ext uri="{0D108BD9-81ED-4DB2-BD59-A6C34878D82A}">
+                    <a16:rowId xmlns:a16="http://schemas.microsoft.com/office/drawing/2014/main" val="10001"/>
+                  </a:ext>
+                </a:extLst>
               </a:tr>
               <a:tr h="612360">
                 <a:tc>
                   <a:txBody>
-                    <a:bodyPr anchor="t">
-                      <a:noAutofit/>
-                    </a:bodyPr>
+                    <a:bodyPr/>
+                    <a:lstStyle/>
                     <a:p>
                       <a:pPr defTabSz="457200">
                         <a:lnSpc>
@@ -14234,7 +14620,7 @@
                       </a:endParaRPr>
                     </a:p>
                   </a:txBody>
-                  <a:tcPr anchor="t" marL="91440" marR="91440" marT="45720" marB="45720">
+                  <a:tcPr>
                     <a:lnL w="12240">
                       <a:solidFill>
                         <a:srgbClr val="FFFFFF"/>
@@ -14266,9 +14652,8 @@
                 </a:tc>
                 <a:tc>
                   <a:txBody>
-                    <a:bodyPr anchor="t">
-                      <a:noAutofit/>
-                    </a:bodyPr>
+                    <a:bodyPr/>
+                    <a:lstStyle/>
                     <a:p>
                       <a:pPr defTabSz="457200">
                         <a:lnSpc>
@@ -14296,7 +14681,7 @@
                       </a:endParaRPr>
                     </a:p>
                   </a:txBody>
-                  <a:tcPr anchor="t" marL="91440" marR="91440" marT="45720" marB="45720">
+                  <a:tcPr>
                     <a:lnL w="12240">
                       <a:solidFill>
                         <a:srgbClr val="FFFFFF"/>
@@ -14328,9 +14713,8 @@
                 </a:tc>
                 <a:tc>
                   <a:txBody>
-                    <a:bodyPr anchor="t">
-                      <a:noAutofit/>
-                    </a:bodyPr>
+                    <a:bodyPr/>
+                    <a:lstStyle/>
                     <a:p>
                       <a:pPr defTabSz="457200">
                         <a:lnSpc>
@@ -14358,7 +14742,7 @@
                       </a:endParaRPr>
                     </a:p>
                   </a:txBody>
-                  <a:tcPr anchor="t" marL="91440" marR="91440" marT="45720" marB="45720">
+                  <a:tcPr>
                     <a:lnL w="12240">
                       <a:solidFill>
                         <a:srgbClr val="FFFFFF"/>
@@ -14388,13 +14772,17 @@
                     </a:solidFill>
                   </a:tcPr>
                 </a:tc>
+                <a:extLst>
+                  <a:ext uri="{0D108BD9-81ED-4DB2-BD59-A6C34878D82A}">
+                    <a16:rowId xmlns:a16="http://schemas.microsoft.com/office/drawing/2014/main" val="10002"/>
+                  </a:ext>
+                </a:extLst>
               </a:tr>
               <a:tr h="612360">
                 <a:tc>
                   <a:txBody>
-                    <a:bodyPr anchor="t">
-                      <a:noAutofit/>
-                    </a:bodyPr>
+                    <a:bodyPr/>
+                    <a:lstStyle/>
                     <a:p>
                       <a:pPr defTabSz="457200">
                         <a:lnSpc>
@@ -14422,7 +14810,7 @@
                       </a:endParaRPr>
                     </a:p>
                   </a:txBody>
-                  <a:tcPr anchor="t" marL="91440" marR="91440" marT="45720" marB="45720">
+                  <a:tcPr>
                     <a:lnL w="12240">
                       <a:solidFill>
                         <a:srgbClr val="FFFFFF"/>
@@ -14454,9 +14842,8 @@
                 </a:tc>
                 <a:tc>
                   <a:txBody>
-                    <a:bodyPr anchor="t">
-                      <a:noAutofit/>
-                    </a:bodyPr>
+                    <a:bodyPr/>
+                    <a:lstStyle/>
                     <a:p>
                       <a:pPr defTabSz="457200">
                         <a:lnSpc>
@@ -14528,7 +14915,7 @@
                       </a:endParaRPr>
                     </a:p>
                   </a:txBody>
-                  <a:tcPr anchor="t" marL="91440" marR="91440" marT="45720" marB="45720">
+                  <a:tcPr>
                     <a:lnL w="12240">
                       <a:solidFill>
                         <a:srgbClr val="FFFFFF"/>
@@ -14560,9 +14947,8 @@
                 </a:tc>
                 <a:tc>
                   <a:txBody>
-                    <a:bodyPr anchor="t">
-                      <a:noAutofit/>
-                    </a:bodyPr>
+                    <a:bodyPr/>
+                    <a:lstStyle/>
                     <a:p>
                       <a:pPr defTabSz="457200">
                         <a:lnSpc>
@@ -14590,7 +14976,7 @@
                       </a:endParaRPr>
                     </a:p>
                   </a:txBody>
-                  <a:tcPr anchor="t" marL="91440" marR="91440" marT="45720" marB="45720">
+                  <a:tcPr>
                     <a:lnL w="12240">
                       <a:solidFill>
                         <a:srgbClr val="FFFFFF"/>
@@ -14620,13 +15006,17 @@
                     </a:solidFill>
                   </a:tcPr>
                 </a:tc>
+                <a:extLst>
+                  <a:ext uri="{0D108BD9-81ED-4DB2-BD59-A6C34878D82A}">
+                    <a16:rowId xmlns:a16="http://schemas.microsoft.com/office/drawing/2014/main" val="10003"/>
+                  </a:ext>
+                </a:extLst>
               </a:tr>
               <a:tr h="612360">
                 <a:tc>
                   <a:txBody>
-                    <a:bodyPr anchor="t">
-                      <a:noAutofit/>
-                    </a:bodyPr>
+                    <a:bodyPr/>
+                    <a:lstStyle/>
                     <a:p>
                       <a:pPr defTabSz="457200">
                         <a:lnSpc>
@@ -14654,7 +15044,7 @@
                       </a:endParaRPr>
                     </a:p>
                   </a:txBody>
-                  <a:tcPr anchor="t" marL="91440" marR="91440" marT="45720" marB="45720">
+                  <a:tcPr>
                     <a:lnL w="12240">
                       <a:solidFill>
                         <a:srgbClr val="FFFFFF"/>
@@ -14686,9 +15076,8 @@
                 </a:tc>
                 <a:tc>
                   <a:txBody>
-                    <a:bodyPr anchor="t">
-                      <a:noAutofit/>
-                    </a:bodyPr>
+                    <a:bodyPr/>
+                    <a:lstStyle/>
                     <a:p>
                       <a:pPr defTabSz="457200">
                         <a:lnSpc>
@@ -14716,7 +15105,7 @@
                       </a:endParaRPr>
                     </a:p>
                   </a:txBody>
-                  <a:tcPr anchor="t" marL="91440" marR="91440" marT="45720" marB="45720">
+                  <a:tcPr>
                     <a:lnL w="12240">
                       <a:solidFill>
                         <a:srgbClr val="FFFFFF"/>
@@ -14748,9 +15137,8 @@
                 </a:tc>
                 <a:tc>
                   <a:txBody>
-                    <a:bodyPr anchor="t">
-                      <a:noAutofit/>
-                    </a:bodyPr>
+                    <a:bodyPr/>
+                    <a:lstStyle/>
                     <a:p>
                       <a:pPr defTabSz="457200">
                         <a:lnSpc>
@@ -14778,7 +15166,7 @@
                       </a:endParaRPr>
                     </a:p>
                   </a:txBody>
-                  <a:tcPr anchor="t" marL="91440" marR="91440" marT="45720" marB="45720">
+                  <a:tcPr>
                     <a:lnL w="12240">
                       <a:solidFill>
                         <a:srgbClr val="FFFFFF"/>
@@ -14808,6 +15196,11 @@
                     </a:solidFill>
                   </a:tcPr>
                 </a:tc>
+                <a:extLst>
+                  <a:ext uri="{0D108BD9-81ED-4DB2-BD59-A6C34878D82A}">
+                    <a16:rowId xmlns:a16="http://schemas.microsoft.com/office/drawing/2014/main" val="10004"/>
+                  </a:ext>
+                </a:extLst>
               </a:tr>
             </a:tbl>
           </a:graphicData>
@@ -14815,19 +15208,14 @@
       </p:graphicFrame>
     </p:spTree>
   </p:cSld>
-  <mc:AlternateContent>
-    <mc:Choice Requires="p14">
-      <p:transition spd="slow" p14:dur="2000"/>
-    </mc:Choice>
-    <mc:Fallback>
-      <p:transition spd="slow"/>
-    </mc:Fallback>
-  </mc:AlternateContent>
+  <p:clrMapOvr>
+    <a:masterClrMapping/>
+  </p:clrMapOvr>
 </p:sld>
 </file>
 
 <file path=ppt/slides/slide5.xml><?xml version="1.0" encoding="utf-8"?>
-<p:sld xmlns:a="http://schemas.openxmlformats.org/drawingml/2006/main" xmlns:p="http://schemas.openxmlformats.org/presentationml/2006/main" xmlns:r="http://schemas.openxmlformats.org/officeDocument/2006/relationships" xmlns:p14="http://schemas.microsoft.com/office/powerpoint/2010/main" xmlns:p15="http://schemas.microsoft.com/office/powerpoint/2012/main" xmlns:mc="http://schemas.openxmlformats.org/markup-compatibility/2006">
+<p:sld xmlns:a="http://schemas.openxmlformats.org/drawingml/2006/main" xmlns:r="http://schemas.openxmlformats.org/officeDocument/2006/relationships" xmlns:p="http://schemas.openxmlformats.org/presentationml/2006/main">
   <p:cSld>
     <p:spTree>
       <p:nvGrpSpPr>
@@ -14864,7 +15252,7 @@
             <a:noFill/>
           </a:ln>
           <a:effectLst>
-            <a:outerShdw dir="5400000" dist="23040" rotWithShape="0">
+            <a:outerShdw dist="23040" dir="5400000" rotWithShape="0">
               <a:srgbClr val="808080">
                 <a:alpha val="35000"/>
               </a:srgbClr>
@@ -14872,17 +15260,23 @@
           </a:effectLst>
         </p:spPr>
         <p:style>
-          <a:lnRef idx="0"/>
-          <a:fillRef idx="0"/>
-          <a:effectRef idx="0"/>
+          <a:lnRef idx="0">
+            <a:scrgbClr r="0" g="0" b="0"/>
+          </a:lnRef>
+          <a:fillRef idx="0">
+            <a:scrgbClr r="0" g="0" b="0"/>
+          </a:fillRef>
+          <a:effectRef idx="0">
+            <a:scrgbClr r="0" g="0" b="0"/>
+          </a:effectRef>
           <a:fontRef idx="minor"/>
         </p:style>
         <p:txBody>
           <a:bodyPr lIns="90000" tIns="45000" rIns="90000" bIns="45000" anchor="ctr">
             <a:noAutofit/>
           </a:bodyPr>
-          <a:p>
-            <a:pPr/>
+          <a:lstStyle/>
+          <a:p>
             <a:endParaRPr lang="en-US" sz="1800" b="0" u="none" strike="noStrike">
               <a:solidFill>
                 <a:srgbClr val="953735"/>
@@ -14918,9 +15312,10 @@
           </a:ln>
         </p:spPr>
         <p:txBody>
-          <a:bodyPr numCol="1" spcCol="0" lIns="91440" tIns="45720" rIns="91440" bIns="45720" anchor="ctr">
+          <a:bodyPr lIns="91440" tIns="45720" rIns="91440" bIns="45720" numCol="1" spcCol="0" anchor="ctr">
             <a:noAutofit/>
           </a:bodyPr>
+          <a:lstStyle/>
           <a:p>
             <a:pPr indent="0" algn="ctr" defTabSz="457200">
               <a:lnSpc>
@@ -14971,15 +15366,22 @@
           </a:ln>
         </p:spPr>
         <p:style>
-          <a:lnRef idx="0"/>
-          <a:fillRef idx="0"/>
-          <a:effectRef idx="0"/>
+          <a:lnRef idx="0">
+            <a:scrgbClr r="0" g="0" b="0"/>
+          </a:lnRef>
+          <a:fillRef idx="0">
+            <a:scrgbClr r="0" g="0" b="0"/>
+          </a:fillRef>
+          <a:effectRef idx="0">
+            <a:scrgbClr r="0" g="0" b="0"/>
+          </a:effectRef>
           <a:fontRef idx="minor"/>
         </p:style>
         <p:txBody>
           <a:bodyPr lIns="90000" tIns="45000" rIns="90000" bIns="45000" anchor="t">
             <a:spAutoFit/>
           </a:bodyPr>
+          <a:lstStyle/>
           <a:p>
             <a:pPr marL="343080" indent="-343080" defTabSz="457200">
               <a:lnSpc>
@@ -15378,7 +15780,7 @@
           </a:ln>
         </p:spPr>
         <p:txBody>
-          <a:bodyPr numCol="1" spcCol="0" lIns="91440" tIns="45720" rIns="91440" bIns="45720" anchor="ctr">
+          <a:bodyPr lIns="91440" tIns="45720" rIns="91440" bIns="45720" numCol="1" spcCol="0" anchor="ctr">
             <a:noAutofit/>
           </a:bodyPr>
           <a:lstStyle>
@@ -15421,7 +15823,7 @@
                 <a:latin typeface="TradeGothic"/>
                 <a:ea typeface="ＭＳ Ｐゴシック"/>
               </a:rPr>
-              <a:t>&lt;number&gt;</a:t>
+              <a:t>5</a:t>
             </a:fld>
             <a:endParaRPr lang="en-US" sz="1200" b="0" u="none" strike="noStrike">
               <a:solidFill>
@@ -15552,6 +15954,7 @@
           <a:bodyPr lIns="90000" tIns="45000" rIns="90000" bIns="45000" anchor="ctr">
             <a:noAutofit/>
           </a:bodyPr>
+          <a:lstStyle/>
           <a:p>
             <a:pPr algn="ctr" defTabSz="457200">
               <a:lnSpc>
@@ -15591,7 +15994,7 @@
           <p:nvPr/>
         </p:nvPicPr>
         <p:blipFill>
-          <a:blip r:embed="rId1"/>
+          <a:blip r:embed="rId3"/>
           <a:stretch/>
         </p:blipFill>
         <p:spPr>
@@ -15615,7 +16018,7 @@
           <p:nvPr/>
         </p:nvPicPr>
         <p:blipFill>
-          <a:blip r:embed="rId2"/>
+          <a:blip r:embed="rId4"/>
           <a:stretch/>
         </p:blipFill>
         <p:spPr>
@@ -15652,15 +16055,22 @@
           </a:ln>
         </p:spPr>
         <p:style>
-          <a:lnRef idx="0"/>
-          <a:fillRef idx="0"/>
-          <a:effectRef idx="0"/>
+          <a:lnRef idx="0">
+            <a:scrgbClr r="0" g="0" b="0"/>
+          </a:lnRef>
+          <a:fillRef idx="0">
+            <a:scrgbClr r="0" g="0" b="0"/>
+          </a:fillRef>
+          <a:effectRef idx="0">
+            <a:scrgbClr r="0" g="0" b="0"/>
+          </a:effectRef>
           <a:fontRef idx="minor"/>
         </p:style>
         <p:txBody>
           <a:bodyPr lIns="90000" tIns="45000" rIns="90000" bIns="45000" anchor="t">
             <a:spAutoFit/>
           </a:bodyPr>
+          <a:lstStyle/>
           <a:p>
             <a:pPr algn="ctr" defTabSz="457200">
               <a:lnSpc>
@@ -15713,15 +16123,22 @@
           </a:ln>
         </p:spPr>
         <p:style>
-          <a:lnRef idx="0"/>
-          <a:fillRef idx="0"/>
-          <a:effectRef idx="0"/>
+          <a:lnRef idx="0">
+            <a:scrgbClr r="0" g="0" b="0"/>
+          </a:lnRef>
+          <a:fillRef idx="0">
+            <a:scrgbClr r="0" g="0" b="0"/>
+          </a:fillRef>
+          <a:effectRef idx="0">
+            <a:scrgbClr r="0" g="0" b="0"/>
+          </a:effectRef>
           <a:fontRef idx="minor"/>
         </p:style>
         <p:txBody>
           <a:bodyPr lIns="90000" tIns="45000" rIns="90000" bIns="45000" anchor="t">
             <a:spAutoFit/>
           </a:bodyPr>
+          <a:lstStyle/>
           <a:p>
             <a:pPr defTabSz="457200">
               <a:lnSpc>
@@ -15777,7 +16194,7 @@
             <a:noFill/>
           </a:ln>
           <a:effectLst>
-            <a:outerShdw blurRad="39960" dir="5400000" dist="23040" rotWithShape="0">
+            <a:outerShdw blurRad="39960" dist="23040" dir="5400000" rotWithShape="0">
               <a:srgbClr val="000000">
                 <a:alpha val="35000"/>
               </a:srgbClr>
@@ -15800,6 +16217,7 @@
           <a:bodyPr lIns="90000" tIns="45000" rIns="90000" bIns="45000" anchor="ctr">
             <a:noAutofit/>
           </a:bodyPr>
+          <a:lstStyle/>
           <a:p>
             <a:pPr algn="ctr" defTabSz="457200">
               <a:lnSpc>
@@ -15879,7 +16297,7 @@
             <a:noFill/>
           </a:ln>
           <a:effectLst>
-            <a:outerShdw blurRad="39960" dir="5400000" dist="23040" rotWithShape="0">
+            <a:outerShdw blurRad="39960" dist="23040" dir="5400000" rotWithShape="0">
               <a:srgbClr val="000000">
                 <a:alpha val="35000"/>
               </a:srgbClr>
@@ -15902,6 +16320,7 @@
           <a:bodyPr lIns="90000" tIns="45000" rIns="90000" bIns="45000" anchor="ctr">
             <a:noAutofit/>
           </a:bodyPr>
+          <a:lstStyle/>
           <a:p>
             <a:pPr algn="ctr" defTabSz="457200">
               <a:lnSpc>
@@ -15960,19 +16379,14 @@
       </p:sp>
     </p:spTree>
   </p:cSld>
-  <mc:AlternateContent>
-    <mc:Choice Requires="p14">
-      <p:transition spd="slow" p14:dur="2000"/>
-    </mc:Choice>
-    <mc:Fallback>
-      <p:transition spd="slow"/>
-    </mc:Fallback>
-  </mc:AlternateContent>
+  <p:clrMapOvr>
+    <a:masterClrMapping/>
+  </p:clrMapOvr>
 </p:sld>
 </file>
 
 <file path=ppt/slides/slide6.xml><?xml version="1.0" encoding="utf-8"?>
-<p:sld xmlns:a="http://schemas.openxmlformats.org/drawingml/2006/main" xmlns:p="http://schemas.openxmlformats.org/presentationml/2006/main" xmlns:r="http://schemas.openxmlformats.org/officeDocument/2006/relationships" xmlns:p14="http://schemas.microsoft.com/office/powerpoint/2010/main" xmlns:p15="http://schemas.microsoft.com/office/powerpoint/2012/main" xmlns:mc="http://schemas.openxmlformats.org/markup-compatibility/2006">
+<p:sld xmlns:a="http://schemas.openxmlformats.org/drawingml/2006/main" xmlns:r="http://schemas.openxmlformats.org/officeDocument/2006/relationships" xmlns:p="http://schemas.openxmlformats.org/presentationml/2006/main">
   <p:cSld>
     <p:spTree>
       <p:nvGrpSpPr>
@@ -16009,7 +16423,7 @@
             <a:noFill/>
           </a:ln>
           <a:effectLst>
-            <a:outerShdw dir="5400000" dist="23040" rotWithShape="0">
+            <a:outerShdw dist="23040" dir="5400000" rotWithShape="0">
               <a:srgbClr val="808080">
                 <a:alpha val="35000"/>
               </a:srgbClr>
@@ -16017,17 +16431,23 @@
           </a:effectLst>
         </p:spPr>
         <p:style>
-          <a:lnRef idx="0"/>
-          <a:fillRef idx="0"/>
-          <a:effectRef idx="0"/>
+          <a:lnRef idx="0">
+            <a:scrgbClr r="0" g="0" b="0"/>
+          </a:lnRef>
+          <a:fillRef idx="0">
+            <a:scrgbClr r="0" g="0" b="0"/>
+          </a:fillRef>
+          <a:effectRef idx="0">
+            <a:scrgbClr r="0" g="0" b="0"/>
+          </a:effectRef>
           <a:fontRef idx="minor"/>
         </p:style>
         <p:txBody>
           <a:bodyPr lIns="90000" tIns="45000" rIns="90000" bIns="45000" anchor="ctr">
             <a:noAutofit/>
           </a:bodyPr>
-          <a:p>
-            <a:pPr/>
+          <a:lstStyle/>
+          <a:p>
             <a:endParaRPr lang="en-US" sz="1800" b="0" u="none" strike="noStrike">
               <a:solidFill>
                 <a:srgbClr val="953735"/>
@@ -16063,9 +16483,10 @@
           </a:ln>
         </p:spPr>
         <p:txBody>
-          <a:bodyPr numCol="1" spcCol="0" lIns="91440" tIns="45720" rIns="91440" bIns="45720" anchor="ctr">
+          <a:bodyPr lIns="91440" tIns="45720" rIns="91440" bIns="45720" numCol="1" spcCol="0" anchor="ctr">
             <a:noAutofit/>
           </a:bodyPr>
+          <a:lstStyle/>
           <a:p>
             <a:pPr indent="0" algn="ctr" defTabSz="457200">
               <a:lnSpc>
@@ -16105,7 +16526,7 @@
         <p:spPr>
           <a:xfrm>
             <a:off x="612720" y="1188720"/>
-            <a:ext cx="10972440" cy="4395240"/>
+            <a:ext cx="10972440" cy="3671346"/>
           </a:xfrm>
           <a:prstGeom prst="rect">
             <a:avLst/>
@@ -16116,15 +16537,22 @@
           </a:ln>
         </p:spPr>
         <p:style>
-          <a:lnRef idx="0"/>
-          <a:fillRef idx="0"/>
-          <a:effectRef idx="0"/>
+          <a:lnRef idx="0">
+            <a:scrgbClr r="0" g="0" b="0"/>
+          </a:lnRef>
+          <a:fillRef idx="0">
+            <a:scrgbClr r="0" g="0" b="0"/>
+          </a:fillRef>
+          <a:effectRef idx="0">
+            <a:scrgbClr r="0" g="0" b="0"/>
+          </a:effectRef>
           <a:fontRef idx="minor"/>
         </p:style>
         <p:txBody>
           <a:bodyPr lIns="90000" tIns="45000" rIns="90000" bIns="45000" anchor="t">
             <a:spAutoFit/>
           </a:bodyPr>
+          <a:lstStyle/>
           <a:p>
             <a:pPr marL="343080" indent="-343080" defTabSz="457200">
               <a:lnSpc>
@@ -16141,7 +16569,7 @@
               </a:tabLst>
             </a:pPr>
             <a:r>
-              <a:rPr lang="en-US" sz="1800" b="0" u="none" strike="noStrike">
+              <a:rPr lang="en-US" sz="1800" b="0" u="none" strike="noStrike" dirty="0">
                 <a:solidFill>
                   <a:srgbClr val="0F1A14"/>
                 </a:solidFill>
@@ -16153,7 +16581,7 @@
               <a:t>•  </a:t>
             </a:r>
             <a:r>
-              <a:rPr lang="en-US" sz="1800" b="1" u="none" strike="noStrike">
+              <a:rPr lang="en-US" sz="1800" b="1" u="none" strike="noStrike" dirty="0">
                 <a:solidFill>
                   <a:srgbClr val="0B5D3B"/>
                 </a:solidFill>
@@ -16165,7 +16593,7 @@
               <a:t>Scheme Directives (PS-verbatim): </a:t>
             </a:r>
             <a:r>
-              <a:rPr lang="en-US" sz="1800" b="0" u="none" strike="noStrike">
+              <a:rPr lang="en-US" sz="1800" b="0" u="none" strike="noStrike" dirty="0" err="1">
                 <a:solidFill>
                   <a:srgbClr val="0F1A14"/>
                 </a:solidFill>
@@ -16174,10 +16602,22 @@
                 <a:latin typeface="Calibri"/>
                 <a:ea typeface="ＭＳ Ｐゴシック"/>
               </a:rPr>
-              <a:t>MoSJE, NBCFDC &amp; NSFDC Concessional Loan Guidelines — Micro Finance (≤ ₹1.40L @ 6.5%) &amp; Term Loan (≤ ₹50L @ 8%) — </a:t>
-            </a:r>
-            <a:r>
-              <a:rPr lang="en-US" sz="1800" b="0" u="none" strike="noStrike">
+              <a:t>MoSJE</a:t>
+            </a:r>
+            <a:r>
+              <a:rPr lang="en-US" sz="1800" b="0" u="none" strike="noStrike" dirty="0">
+                <a:solidFill>
+                  <a:srgbClr val="0F1A14"/>
+                </a:solidFill>
+                <a:effectLst/>
+                <a:uFillTx/>
+                <a:latin typeface="Calibri"/>
+                <a:ea typeface="ＭＳ Ｐゴシック"/>
+              </a:rPr>
+              <a:t>, NBCFDC &amp; NSFDC Concessional Loan Guidelines — Micro Finance (≤ ₹1.40L @ 6.5%) &amp; Term Loan (≤ ₹50L @ 8%) — </a:t>
+            </a:r>
+            <a:r>
+              <a:rPr lang="en-US" sz="1800" b="0" u="none" strike="noStrike" dirty="0">
                 <a:solidFill>
                   <a:srgbClr val="054AB0"/>
                 </a:solidFill>
@@ -16185,11 +16625,12 @@
                 <a:uFillTx/>
                 <a:latin typeface="Calibri"/>
                 <a:ea typeface="ＭＳ Ｐゴシック"/>
+                <a:hlinkClick r:id="rId3"/>
               </a:rPr>
               <a:t>nsfdc.nic.in/scheme</a:t>
             </a:r>
             <a:r>
-              <a:rPr lang="en-US" sz="1800" b="0" u="none" strike="noStrike">
+              <a:rPr lang="en-US" sz="1800" b="0" u="none" strike="noStrike" dirty="0">
                 <a:solidFill>
                   <a:srgbClr val="0F1A14"/>
                 </a:solidFill>
@@ -16197,11 +16638,24 @@
                 <a:uFillTx/>
                 <a:latin typeface="Calibri"/>
                 <a:ea typeface="ＭＳ Ｐゴシック"/>
-              </a:rPr>
-              <a:t> · </a:t>
-            </a:r>
-            <a:r>
-              <a:rPr lang="en-US" sz="1800" b="0" u="none" strike="noStrike">
+                <a:hlinkClick r:id="rId3"/>
+              </a:rPr>
+              <a:t> </a:t>
+            </a:r>
+            <a:r>
+              <a:rPr lang="en-US" sz="1800" b="0" u="none" strike="noStrike" dirty="0">
+                <a:solidFill>
+                  <a:srgbClr val="0F1A14"/>
+                </a:solidFill>
+                <a:effectLst/>
+                <a:uFillTx/>
+                <a:latin typeface="Calibri"/>
+                <a:ea typeface="ＭＳ Ｐゴシック"/>
+              </a:rPr>
+              <a:t>· </a:t>
+            </a:r>
+            <a:r>
+              <a:rPr lang="en-US" sz="1800" b="0" u="none" strike="noStrike" dirty="0">
                 <a:solidFill>
                   <a:srgbClr val="054AB0"/>
                 </a:solidFill>
@@ -16209,22 +16663,22 @@
                 <a:uFillTx/>
                 <a:latin typeface="Calibri"/>
                 <a:ea typeface="ＭＳ Ｐゴシック"/>
+                <a:hlinkClick r:id="rId4"/>
               </a:rPr>
               <a:t>nbcfdc.gov.in</a:t>
             </a:r>
             <a:r>
-              <a:rPr lang="en-US" sz="1800" b="0" u="none" strike="noStrike">
+              <a:rPr lang="en-US" dirty="0">
                 <a:solidFill>
                   <a:srgbClr val="0F1A14"/>
                 </a:solidFill>
-                <a:effectLst/>
-                <a:uFillTx/>
-                <a:latin typeface="Calibri"/>
-                <a:ea typeface="ＭＳ Ｐゴシック"/>
+                <a:latin typeface="Calibri"/>
+                <a:ea typeface="ＭＳ Ｐゴシック"/>
+                <a:hlinkClick r:id="rId4"/>
               </a:rPr>
               <a:t>.</a:t>
             </a:r>
-            <a:endParaRPr lang="en-US" sz="1800" b="0" u="none" strike="noStrike">
+            <a:endParaRPr lang="en-US" sz="1800" b="0" u="none" strike="noStrike" dirty="0">
               <a:solidFill>
                 <a:srgbClr val="000000"/>
               </a:solidFill>
@@ -16249,7 +16703,7 @@
               </a:tabLst>
             </a:pPr>
             <a:r>
-              <a:rPr lang="en-US" sz="1800" b="0" u="none" strike="noStrike">
+              <a:rPr lang="en-US" sz="1800" b="0" u="none" strike="noStrike" dirty="0">
                 <a:solidFill>
                   <a:srgbClr val="0F1A14"/>
                 </a:solidFill>
@@ -16261,7 +16715,7 @@
               <a:t>•  </a:t>
             </a:r>
             <a:r>
-              <a:rPr lang="en-US" sz="1800" b="1" u="none" strike="noStrike">
+              <a:rPr lang="en-US" sz="1800" b="1" u="none" strike="noStrike" dirty="0">
                 <a:solidFill>
                   <a:srgbClr val="0B5D3B"/>
                 </a:solidFill>
@@ -16273,7 +16727,7 @@
               <a:t>Rural Infrastructure &amp; Demographics: </a:t>
             </a:r>
             <a:r>
-              <a:rPr lang="en-US" sz="1800" b="0" u="none" strike="noStrike">
+              <a:rPr lang="en-US" sz="1800" b="0" u="none" strike="noStrike" dirty="0">
                 <a:solidFill>
                   <a:srgbClr val="0F1A14"/>
                 </a:solidFill>
@@ -16282,10 +16736,34 @@
                 <a:latin typeface="Calibri"/>
                 <a:ea typeface="ＭＳ Ｐゴシック"/>
               </a:rPr>
-              <a:t>Ministry of Rural Development (MoRD) — Mission Antyodaya Survey (2020) &amp; Census of India 2011 Primary Census Abstract (PCA) — </a:t>
-            </a:r>
-            <a:r>
-              <a:rPr lang="en-US" sz="1800" b="0" u="none" strike="noStrike">
+              <a:t>Ministry of Rural Development (MoRD) — Mission </a:t>
+            </a:r>
+            <a:r>
+              <a:rPr lang="en-US" sz="1800" b="0" u="none" strike="noStrike" dirty="0" err="1">
+                <a:solidFill>
+                  <a:srgbClr val="0F1A14"/>
+                </a:solidFill>
+                <a:effectLst/>
+                <a:uFillTx/>
+                <a:latin typeface="Calibri"/>
+                <a:ea typeface="ＭＳ Ｐゴシック"/>
+              </a:rPr>
+              <a:t>Antyodaya</a:t>
+            </a:r>
+            <a:r>
+              <a:rPr lang="en-US" sz="1800" b="0" u="none" strike="noStrike" dirty="0">
+                <a:solidFill>
+                  <a:srgbClr val="0F1A14"/>
+                </a:solidFill>
+                <a:effectLst/>
+                <a:uFillTx/>
+                <a:latin typeface="Calibri"/>
+                <a:ea typeface="ＭＳ Ｐゴシック"/>
+              </a:rPr>
+              <a:t> Survey (2020) &amp; Census of India 2011 Primary Census Abstract (PCA) — </a:t>
+            </a:r>
+            <a:r>
+              <a:rPr lang="en-US" sz="1800" b="0" u="none" strike="noStrike" dirty="0">
                 <a:solidFill>
                   <a:srgbClr val="054AB0"/>
                 </a:solidFill>
@@ -16293,11 +16771,12 @@
                 <a:uFillTx/>
                 <a:latin typeface="Calibri"/>
                 <a:ea typeface="ＭＳ Ｐゴシック"/>
+                <a:hlinkClick r:id="rId5"/>
               </a:rPr>
               <a:t>missionantyodaya.nic.in</a:t>
             </a:r>
             <a:r>
-              <a:rPr lang="en-US" sz="1800" b="0" u="none" strike="noStrike">
+              <a:rPr lang="en-US" sz="1800" b="0" u="none" strike="noStrike" dirty="0">
                 <a:solidFill>
                   <a:srgbClr val="0F1A14"/>
                 </a:solidFill>
@@ -16305,11 +16784,24 @@
                 <a:uFillTx/>
                 <a:latin typeface="Calibri"/>
                 <a:ea typeface="ＭＳ Ｐゴシック"/>
-              </a:rPr>
-              <a:t> · </a:t>
-            </a:r>
-            <a:r>
-              <a:rPr lang="en-US" sz="1800" b="0" u="none" strike="noStrike">
+                <a:hlinkClick r:id="rId5"/>
+              </a:rPr>
+              <a:t> </a:t>
+            </a:r>
+            <a:r>
+              <a:rPr lang="en-US" sz="1800" b="0" u="none" strike="noStrike" dirty="0">
+                <a:solidFill>
+                  <a:srgbClr val="0F1A14"/>
+                </a:solidFill>
+                <a:effectLst/>
+                <a:uFillTx/>
+                <a:latin typeface="Calibri"/>
+                <a:ea typeface="ＭＳ Ｐゴシック"/>
+              </a:rPr>
+              <a:t>· </a:t>
+            </a:r>
+            <a:r>
+              <a:rPr lang="en-US" sz="1800" b="0" u="none" strike="noStrike" dirty="0">
                 <a:solidFill>
                   <a:srgbClr val="054AB0"/>
                 </a:solidFill>
@@ -16317,11 +16809,12 @@
                 <a:uFillTx/>
                 <a:latin typeface="Calibri"/>
                 <a:ea typeface="ＭＳ Ｐゴシック"/>
+                <a:hlinkClick r:id="rId6"/>
               </a:rPr>
               <a:t>censusindia.gov.in</a:t>
             </a:r>
             <a:r>
-              <a:rPr lang="en-US" sz="1800" b="0" u="none" strike="noStrike">
+              <a:rPr lang="en-US" sz="1800" b="0" u="none" strike="noStrike" dirty="0">
                 <a:solidFill>
                   <a:srgbClr val="0F1A14"/>
                 </a:solidFill>
@@ -16329,10 +16822,11 @@
                 <a:uFillTx/>
                 <a:latin typeface="Calibri"/>
                 <a:ea typeface="ＭＳ Ｐゴシック"/>
+                <a:hlinkClick r:id="rId6"/>
               </a:rPr>
               <a:t>.</a:t>
             </a:r>
-            <a:endParaRPr lang="en-US" sz="1800" b="0" u="none" strike="noStrike">
+            <a:endParaRPr lang="en-US" sz="1800" b="0" u="none" strike="noStrike" dirty="0">
               <a:solidFill>
                 <a:srgbClr val="000000"/>
               </a:solidFill>
@@ -16357,7 +16851,7 @@
               </a:tabLst>
             </a:pPr>
             <a:r>
-              <a:rPr lang="en-US" sz="1800" b="0" u="none" strike="noStrike">
+              <a:rPr lang="en-US" sz="1800" b="0" u="none" strike="noStrike" dirty="0">
                 <a:solidFill>
                   <a:srgbClr val="0F1A14"/>
                 </a:solidFill>
@@ -16369,7 +16863,7 @@
               <a:t>•  </a:t>
             </a:r>
             <a:r>
-              <a:rPr lang="en-US" sz="1800" b="1" u="none" strike="noStrike">
+              <a:rPr lang="en-US" sz="1800" b="1" u="none" strike="noStrike" dirty="0">
                 <a:solidFill>
                   <a:srgbClr val="0B5D3B"/>
                 </a:solidFill>
@@ -16381,7 +16875,7 @@
               <a:t>Mandi Pricing &amp; Livestock Benchmarks: </a:t>
             </a:r>
             <a:r>
-              <a:rPr lang="en-US" sz="1800" b="0" u="none" strike="noStrike">
+              <a:rPr lang="en-US" sz="1800" b="0" u="none" strike="noStrike" dirty="0">
                 <a:solidFill>
                   <a:srgbClr val="0F1A14"/>
                 </a:solidFill>
@@ -16390,10 +16884,47 @@
                 <a:latin typeface="Calibri"/>
                 <a:ea typeface="ＭＳ Ｐゴシック"/>
               </a:rPr>
-              <a:t>Directorate of Marketing &amp; Inspection (DMI) — Agmarknet Daily Mandi Price Feeds &amp; 20th Livestock Census, DAHD — </a:t>
-            </a:r>
-            <a:r>
-              <a:rPr lang="en-US" sz="1800" b="0" u="none" strike="noStrike">
+              <a:t>Directorate of Marketing &amp; Inspection (DMI) — </a:t>
+            </a:r>
+            <a:r>
+              <a:rPr lang="en-US" sz="1800" b="0" u="none" strike="noStrike" dirty="0" err="1">
+                <a:solidFill>
+                  <a:srgbClr val="0F1A14"/>
+                </a:solidFill>
+                <a:effectLst/>
+                <a:uFillTx/>
+                <a:latin typeface="Calibri"/>
+                <a:ea typeface="ＭＳ Ｐゴシック"/>
+              </a:rPr>
+              <a:t>Agmarknet</a:t>
+            </a:r>
+            <a:r>
+              <a:rPr lang="en-US" sz="1800" b="0" u="none" strike="noStrike" dirty="0">
+                <a:solidFill>
+                  <a:srgbClr val="0F1A14"/>
+                </a:solidFill>
+                <a:effectLst/>
+                <a:uFillTx/>
+                <a:latin typeface="Calibri"/>
+                <a:ea typeface="ＭＳ Ｐゴシック"/>
+              </a:rPr>
+              <a:t> Daily Mandi Price Feeds &amp; 20th Livestock Census, DAHD —</a:t>
+            </a:r>
+            <a:r>
+              <a:rPr lang="en-US" sz="1800" b="0" u="none" strike="noStrike" dirty="0">
+                <a:solidFill>
+                  <a:srgbClr val="0F1A14"/>
+                </a:solidFill>
+                <a:effectLst/>
+                <a:uFillTx/>
+                <a:latin typeface="Calibri"/>
+                <a:ea typeface="ＭＳ Ｐゴシック"/>
+                <a:hlinkClick r:id="rId7"/>
+              </a:rPr>
+              <a:t> </a:t>
+            </a:r>
+            <a:r>
+              <a:rPr lang="en-US" sz="1800" b="0" u="none" strike="noStrike" dirty="0">
                 <a:solidFill>
                   <a:srgbClr val="054AB0"/>
                 </a:solidFill>
@@ -16401,11 +16932,12 @@
                 <a:uFillTx/>
                 <a:latin typeface="Calibri"/>
                 <a:ea typeface="ＭＳ Ｐゴシック"/>
+                <a:hlinkClick r:id="rId7"/>
               </a:rPr>
               <a:t>agmarknet.gov.in</a:t>
             </a:r>
             <a:r>
-              <a:rPr lang="en-US" sz="1800" b="0" u="none" strike="noStrike">
+              <a:rPr lang="en-US" sz="1800" b="0" u="none" strike="noStrike" dirty="0">
                 <a:solidFill>
                   <a:srgbClr val="0F1A14"/>
                 </a:solidFill>
@@ -16413,11 +16945,24 @@
                 <a:uFillTx/>
                 <a:latin typeface="Calibri"/>
                 <a:ea typeface="ＭＳ Ｐゴシック"/>
-              </a:rPr>
-              <a:t> · </a:t>
-            </a:r>
-            <a:r>
-              <a:rPr lang="en-US" sz="1800" b="0" u="none" strike="noStrike">
+                <a:hlinkClick r:id="rId7"/>
+              </a:rPr>
+              <a:t> </a:t>
+            </a:r>
+            <a:r>
+              <a:rPr lang="en-US" sz="1800" b="0" u="none" strike="noStrike" dirty="0">
+                <a:solidFill>
+                  <a:srgbClr val="0F1A14"/>
+                </a:solidFill>
+                <a:effectLst/>
+                <a:uFillTx/>
+                <a:latin typeface="Calibri"/>
+                <a:ea typeface="ＭＳ Ｐゴシック"/>
+              </a:rPr>
+              <a:t>· </a:t>
+            </a:r>
+            <a:r>
+              <a:rPr lang="en-US" sz="1800" b="0" u="none" strike="noStrike" dirty="0">
                 <a:solidFill>
                   <a:srgbClr val="054AB0"/>
                 </a:solidFill>
@@ -16425,11 +16970,12 @@
                 <a:uFillTx/>
                 <a:latin typeface="Calibri"/>
                 <a:ea typeface="ＭＳ Ｐゴシック"/>
+                <a:hlinkClick r:id="rId8"/>
               </a:rPr>
               <a:t>dahd.nic.in</a:t>
             </a:r>
             <a:r>
-              <a:rPr lang="en-US" sz="1800" b="0" u="none" strike="noStrike">
+              <a:rPr lang="en-US" sz="1800" b="0" u="none" strike="noStrike" dirty="0">
                 <a:solidFill>
                   <a:srgbClr val="0F1A14"/>
                 </a:solidFill>
@@ -16437,10 +16983,11 @@
                 <a:uFillTx/>
                 <a:latin typeface="Calibri"/>
                 <a:ea typeface="ＭＳ Ｐゴシック"/>
+                <a:hlinkClick r:id="rId8"/>
               </a:rPr>
               <a:t>.</a:t>
             </a:r>
-            <a:endParaRPr lang="en-US" sz="1800" b="0" u="none" strike="noStrike">
+            <a:endParaRPr lang="en-US" sz="1800" b="0" u="none" strike="noStrike" dirty="0">
               <a:solidFill>
                 <a:srgbClr val="000000"/>
               </a:solidFill>
@@ -16465,7 +17012,7 @@
               </a:tabLst>
             </a:pPr>
             <a:r>
-              <a:rPr lang="en-US" sz="1800" b="0" u="none" strike="noStrike">
+              <a:rPr lang="en-US" sz="1800" b="0" u="none" strike="noStrike" dirty="0">
                 <a:solidFill>
                   <a:srgbClr val="0F1A14"/>
                 </a:solidFill>
@@ -16477,7 +17024,7 @@
               <a:t>•  </a:t>
             </a:r>
             <a:r>
-              <a:rPr lang="en-US" sz="1800" b="1" u="none" strike="noStrike">
+              <a:rPr lang="en-US" sz="1800" b="1" u="none" strike="noStrike" dirty="0">
                 <a:solidFill>
                   <a:srgbClr val="0B5D3B"/>
                 </a:solidFill>
@@ -16489,7 +17036,7 @@
               <a:t>Hyper-Local Spatial Data: </a:t>
             </a:r>
             <a:r>
-              <a:rPr lang="en-US" sz="1800" b="0" u="none" strike="noStrike">
+              <a:rPr lang="en-US" sz="1800" b="0" u="none" strike="noStrike" dirty="0">
                 <a:solidFill>
                   <a:srgbClr val="0F1A14"/>
                 </a:solidFill>
@@ -16501,7 +17048,7 @@
               <a:t>OpenStreetMap Foundation &amp; Overpass API for real-time shop density mapping &amp; dual failover — </a:t>
             </a:r>
             <a:r>
-              <a:rPr lang="en-US" sz="1800" b="0" u="none" strike="noStrike">
+              <a:rPr lang="en-US" sz="1800" b="0" u="none" strike="noStrike" dirty="0">
                 <a:solidFill>
                   <a:srgbClr val="054AB0"/>
                 </a:solidFill>
@@ -16509,11 +17056,12 @@
                 <a:uFillTx/>
                 <a:latin typeface="Calibri"/>
                 <a:ea typeface="ＭＳ Ｐゴシック"/>
+                <a:hlinkClick r:id="rId9"/>
               </a:rPr>
               <a:t>overpass-api.de</a:t>
             </a:r>
             <a:r>
-              <a:rPr lang="en-US" sz="1800" b="0" u="none" strike="noStrike">
+              <a:rPr lang="en-US" sz="1800" b="0" u="none" strike="noStrike" dirty="0">
                 <a:solidFill>
                   <a:srgbClr val="0F1A14"/>
                 </a:solidFill>
@@ -16521,11 +17069,24 @@
                 <a:uFillTx/>
                 <a:latin typeface="Calibri"/>
                 <a:ea typeface="ＭＳ Ｐゴシック"/>
-              </a:rPr>
-              <a:t> · </a:t>
-            </a:r>
-            <a:r>
-              <a:rPr lang="en-US" sz="1800" b="0" u="none" strike="noStrike">
+                <a:hlinkClick r:id="rId9"/>
+              </a:rPr>
+              <a:t> </a:t>
+            </a:r>
+            <a:r>
+              <a:rPr lang="en-US" sz="1800" b="0" u="none" strike="noStrike" dirty="0">
+                <a:solidFill>
+                  <a:srgbClr val="0F1A14"/>
+                </a:solidFill>
+                <a:effectLst/>
+                <a:uFillTx/>
+                <a:latin typeface="Calibri"/>
+                <a:ea typeface="ＭＳ Ｐゴシック"/>
+              </a:rPr>
+              <a:t>· </a:t>
+            </a:r>
+            <a:r>
+              <a:rPr lang="en-US" sz="1800" b="0" u="none" strike="noStrike" dirty="0">
                 <a:solidFill>
                   <a:srgbClr val="054AB0"/>
                 </a:solidFill>
@@ -16533,11 +17094,12 @@
                 <a:uFillTx/>
                 <a:latin typeface="Calibri"/>
                 <a:ea typeface="ＭＳ Ｐゴシック"/>
+                <a:hlinkClick r:id="rId10"/>
               </a:rPr>
               <a:t>openstreetmap.org</a:t>
             </a:r>
             <a:r>
-              <a:rPr lang="en-US" sz="1800" b="0" u="none" strike="noStrike">
+              <a:rPr lang="en-US" sz="1800" b="0" u="none" strike="noStrike" dirty="0">
                 <a:solidFill>
                   <a:srgbClr val="0F1A14"/>
                 </a:solidFill>
@@ -16545,10 +17107,11 @@
                 <a:uFillTx/>
                 <a:latin typeface="Calibri"/>
                 <a:ea typeface="ＭＳ Ｐゴシック"/>
+                <a:hlinkClick r:id="rId10"/>
               </a:rPr>
               <a:t>.</a:t>
             </a:r>
-            <a:endParaRPr lang="en-US" sz="1800" b="0" u="none" strike="noStrike">
+            <a:endParaRPr lang="en-US" sz="1800" b="0" u="none" strike="noStrike" dirty="0">
               <a:solidFill>
                 <a:srgbClr val="000000"/>
               </a:solidFill>
@@ -16573,7 +17136,7 @@
               </a:tabLst>
             </a:pPr>
             <a:r>
-              <a:rPr lang="en-US" sz="1800" b="0" u="none" strike="noStrike">
+              <a:rPr lang="en-US" sz="1800" b="0" u="none" strike="noStrike" dirty="0">
                 <a:solidFill>
                   <a:srgbClr val="0F1A14"/>
                 </a:solidFill>
@@ -16585,7 +17148,7 @@
               <a:t>•  </a:t>
             </a:r>
             <a:r>
-              <a:rPr lang="en-US" sz="1800" b="1" u="none" strike="noStrike">
+              <a:rPr lang="en-US" sz="1800" b="1" u="none" strike="noStrike" dirty="0">
                 <a:solidFill>
                   <a:srgbClr val="0B5D3B"/>
                 </a:solidFill>
@@ -16597,7 +17160,7 @@
               <a:t>AI Language &amp; Reasoning: </a:t>
             </a:r>
             <a:r>
-              <a:rPr lang="en-US" sz="1800" b="0" u="none" strike="noStrike">
+              <a:rPr lang="en-US" sz="1800" b="0" u="none" strike="noStrike" dirty="0" err="1">
                 <a:solidFill>
                   <a:srgbClr val="0F1A14"/>
                 </a:solidFill>
@@ -16606,10 +17169,46 @@
                 <a:latin typeface="Calibri"/>
                 <a:ea typeface="ＭＳ Ｐゴシック"/>
               </a:rPr>
-              <a:t>Groq LPU Inference Engine (openai/gpt-oss-20b / llama-3.1-8b) for structured trilingual narratives &amp; SSE streaming advisor — </a:t>
-            </a:r>
-            <a:r>
-              <a:rPr lang="en-US" sz="1800" b="0" u="none" strike="noStrike">
+              <a:t>Groq</a:t>
+            </a:r>
+            <a:r>
+              <a:rPr lang="en-US" sz="1800" b="0" u="none" strike="noStrike" dirty="0">
+                <a:solidFill>
+                  <a:srgbClr val="0F1A14"/>
+                </a:solidFill>
+                <a:effectLst/>
+                <a:uFillTx/>
+                <a:latin typeface="Calibri"/>
+                <a:ea typeface="ＭＳ Ｐゴシック"/>
+              </a:rPr>
+              <a:t> LPU Inference Engine (</a:t>
+            </a:r>
+            <a:r>
+              <a:rPr lang="en-US" sz="1800" b="0" u="none" strike="noStrike" dirty="0" err="1">
+                <a:solidFill>
+                  <a:srgbClr val="0F1A14"/>
+                </a:solidFill>
+                <a:effectLst/>
+                <a:uFillTx/>
+                <a:latin typeface="Calibri"/>
+                <a:ea typeface="ＭＳ Ｐゴシック"/>
+              </a:rPr>
+              <a:t>openai</a:t>
+            </a:r>
+            <a:r>
+              <a:rPr lang="en-US" sz="1800" b="0" u="none" strike="noStrike" dirty="0">
+                <a:solidFill>
+                  <a:srgbClr val="0F1A14"/>
+                </a:solidFill>
+                <a:effectLst/>
+                <a:uFillTx/>
+                <a:latin typeface="Calibri"/>
+                <a:ea typeface="ＭＳ Ｐゴシック"/>
+              </a:rPr>
+              <a:t>/gpt-oss-20b / llama-3.1-8b) for structured trilingual narratives &amp; SSE streaming advisor — </a:t>
+            </a:r>
+            <a:r>
+              <a:rPr lang="en-US" sz="1800" b="0" u="none" strike="noStrike" dirty="0">
                 <a:solidFill>
                   <a:srgbClr val="054AB0"/>
                 </a:solidFill>
@@ -16617,11 +17216,12 @@
                 <a:uFillTx/>
                 <a:latin typeface="Calibri"/>
                 <a:ea typeface="ＭＳ Ｐゴシック"/>
+                <a:hlinkClick r:id="rId11"/>
               </a:rPr>
               <a:t>docs.groq.com</a:t>
             </a:r>
             <a:r>
-              <a:rPr lang="en-US" sz="1800" b="0" u="none" strike="noStrike">
+              <a:rPr lang="en-US" sz="1800" b="0" u="none" strike="noStrike" dirty="0">
                 <a:solidFill>
                   <a:srgbClr val="0F1A14"/>
                 </a:solidFill>
@@ -16629,10 +17229,11 @@
                 <a:uFillTx/>
                 <a:latin typeface="Calibri"/>
                 <a:ea typeface="ＭＳ Ｐゴシック"/>
+                <a:hlinkClick r:id="rId11"/>
               </a:rPr>
               <a:t>.</a:t>
             </a:r>
-            <a:endParaRPr lang="en-US" sz="1800" b="0" u="none" strike="noStrike">
+            <a:endParaRPr lang="en-US" sz="1800" b="0" u="none" strike="noStrike" dirty="0">
               <a:solidFill>
                 <a:srgbClr val="000000"/>
               </a:solidFill>
@@ -16657,7 +17258,7 @@
               </a:tabLst>
             </a:pPr>
             <a:r>
-              <a:rPr lang="en-US" sz="1800" b="0" u="none" strike="noStrike">
+              <a:rPr lang="en-US" sz="1800" b="0" u="none" strike="noStrike" dirty="0">
                 <a:solidFill>
                   <a:srgbClr val="0F1A14"/>
                 </a:solidFill>
@@ -16669,7 +17270,7 @@
               <a:t>•  </a:t>
             </a:r>
             <a:r>
-              <a:rPr lang="en-US" sz="1800" b="1" u="none" strike="noStrike">
+              <a:rPr lang="en-US" sz="1800" b="1" u="none" strike="noStrike" dirty="0">
                 <a:solidFill>
                   <a:srgbClr val="0B5D3B"/>
                 </a:solidFill>
@@ -16681,7 +17282,7 @@
               <a:t>Engineering &amp; Verified TDD: </a:t>
             </a:r>
             <a:r>
-              <a:rPr lang="en-US" sz="1800" b="0" u="none" strike="noStrike">
+              <a:rPr lang="en-US" sz="1800" b="0" u="none" strike="noStrike" dirty="0">
                 <a:solidFill>
                   <a:srgbClr val="0F1A14"/>
                 </a:solidFill>
@@ -16690,10 +17291,82 @@
                 <a:latin typeface="Calibri"/>
                 <a:ea typeface="ＭＳ Ｐゴシック"/>
               </a:rPr>
-              <a:t>Next.js 14 App Router, FastAPI, SQLModel/SQLite; 56-test pytest suite with golden validation for PS lending boundaries &amp; dataset grounding — </a:t>
-            </a:r>
-            <a:r>
-              <a:rPr lang="en-US" sz="1800" b="0" u="none" strike="noStrike">
+              <a:t>Next.js 14 App Router, </a:t>
+            </a:r>
+            <a:r>
+              <a:rPr lang="en-US" sz="1800" b="0" u="none" strike="noStrike" dirty="0" err="1">
+                <a:solidFill>
+                  <a:srgbClr val="0F1A14"/>
+                </a:solidFill>
+                <a:effectLst/>
+                <a:uFillTx/>
+                <a:latin typeface="Calibri"/>
+                <a:ea typeface="ＭＳ Ｐゴシック"/>
+              </a:rPr>
+              <a:t>FastAPI</a:t>
+            </a:r>
+            <a:r>
+              <a:rPr lang="en-US" sz="1800" b="0" u="none" strike="noStrike" dirty="0">
+                <a:solidFill>
+                  <a:srgbClr val="0F1A14"/>
+                </a:solidFill>
+                <a:effectLst/>
+                <a:uFillTx/>
+                <a:latin typeface="Calibri"/>
+                <a:ea typeface="ＭＳ Ｐゴシック"/>
+              </a:rPr>
+              <a:t>, </a:t>
+            </a:r>
+            <a:r>
+              <a:rPr lang="en-US" sz="1800" b="0" u="none" strike="noStrike" dirty="0" err="1">
+                <a:solidFill>
+                  <a:srgbClr val="0F1A14"/>
+                </a:solidFill>
+                <a:effectLst/>
+                <a:uFillTx/>
+                <a:latin typeface="Calibri"/>
+                <a:ea typeface="ＭＳ Ｐゴシック"/>
+              </a:rPr>
+              <a:t>SQLModel</a:t>
+            </a:r>
+            <a:r>
+              <a:rPr lang="en-US" sz="1800" b="0" u="none" strike="noStrike" dirty="0">
+                <a:solidFill>
+                  <a:srgbClr val="0F1A14"/>
+                </a:solidFill>
+                <a:effectLst/>
+                <a:uFillTx/>
+                <a:latin typeface="Calibri"/>
+                <a:ea typeface="ＭＳ Ｐゴシック"/>
+              </a:rPr>
+              <a:t>/SQLite; 56-test </a:t>
+            </a:r>
+            <a:r>
+              <a:rPr lang="en-US" sz="1800" b="0" u="none" strike="noStrike" dirty="0" err="1">
+                <a:solidFill>
+                  <a:srgbClr val="0F1A14"/>
+                </a:solidFill>
+                <a:effectLst/>
+                <a:uFillTx/>
+                <a:latin typeface="Calibri"/>
+                <a:ea typeface="ＭＳ Ｐゴシック"/>
+              </a:rPr>
+              <a:t>pytest</a:t>
+            </a:r>
+            <a:r>
+              <a:rPr lang="en-US" sz="1800" b="0" u="none" strike="noStrike" dirty="0">
+                <a:solidFill>
+                  <a:srgbClr val="0F1A14"/>
+                </a:solidFill>
+                <a:effectLst/>
+                <a:uFillTx/>
+                <a:latin typeface="Calibri"/>
+                <a:ea typeface="ＭＳ Ｐゴシック"/>
+              </a:rPr>
+              <a:t> suite with golden validation for PS lending boundaries &amp; dataset grounding — </a:t>
+            </a:r>
+            <a:r>
+              <a:rPr lang="en-US" sz="1800" b="0" u="none" strike="noStrike" dirty="0">
                 <a:solidFill>
                   <a:srgbClr val="054AB0"/>
                 </a:solidFill>
@@ -16701,11 +17374,25 @@
                 <a:uFillTx/>
                 <a:latin typeface="Calibri"/>
                 <a:ea typeface="ＭＳ Ｐゴシック"/>
-              </a:rPr>
-              <a:t>github.com/GramIntel</a:t>
-            </a:r>
-            <a:r>
-              <a:rPr lang="en-US" sz="1800" b="0" u="none" strike="noStrike">
+                <a:hlinkClick r:id="rId12"/>
+              </a:rPr>
+              <a:t>github.com/</a:t>
+            </a:r>
+            <a:r>
+              <a:rPr lang="en-US" sz="1800" b="0" u="none" strike="noStrike" dirty="0" err="1">
+                <a:solidFill>
+                  <a:srgbClr val="054AB0"/>
+                </a:solidFill>
+                <a:effectLst/>
+                <a:uFillTx/>
+                <a:latin typeface="Calibri"/>
+                <a:ea typeface="ＭＳ Ｐゴシック"/>
+                <a:hlinkClick r:id="rId12"/>
+              </a:rPr>
+              <a:t>GramIntel</a:t>
+            </a:r>
+            <a:r>
+              <a:rPr lang="en-US" sz="1800" b="0" u="none" strike="noStrike" dirty="0">
                 <a:solidFill>
                   <a:srgbClr val="0F1A14"/>
                 </a:solidFill>
@@ -16713,10 +17400,11 @@
                 <a:uFillTx/>
                 <a:latin typeface="Calibri"/>
                 <a:ea typeface="ＭＳ Ｐゴシック"/>
+                <a:hlinkClick r:id="rId12"/>
               </a:rPr>
               <a:t>.</a:t>
             </a:r>
-            <a:endParaRPr lang="en-US" sz="1800" b="0" u="none" strike="noStrike">
+            <a:endParaRPr lang="en-US" sz="1800" b="0" u="none" strike="noStrike" dirty="0">
               <a:solidFill>
                 <a:srgbClr val="000000"/>
               </a:solidFill>
@@ -16751,7 +17439,7 @@
           </a:ln>
         </p:spPr>
         <p:txBody>
-          <a:bodyPr numCol="1" spcCol="0" lIns="91440" tIns="45720" rIns="91440" bIns="45720" anchor="ctr">
+          <a:bodyPr lIns="91440" tIns="45720" rIns="91440" bIns="45720" numCol="1" spcCol="0" anchor="ctr">
             <a:noAutofit/>
           </a:bodyPr>
           <a:lstStyle>
@@ -16794,7 +17482,7 @@
                 <a:latin typeface="TradeGothic"/>
                 <a:ea typeface="ＭＳ Ｐゴシック"/>
               </a:rPr>
-              <a:t>&lt;number&gt;</a:t>
+              <a:t>6</a:t>
             </a:fld>
             <a:endParaRPr lang="en-US" sz="1200" b="0" u="none" strike="noStrike">
               <a:solidFill>
@@ -16925,6 +17613,7 @@
           <a:bodyPr lIns="90000" tIns="45000" rIns="90000" bIns="45000" anchor="ctr">
             <a:noAutofit/>
           </a:bodyPr>
+          <a:lstStyle/>
           <a:p>
             <a:pPr algn="ctr" defTabSz="457200">
               <a:lnSpc>
@@ -16964,7 +17653,7 @@
           <p:nvPr/>
         </p:nvPicPr>
         <p:blipFill>
-          <a:blip r:embed="rId1"/>
+          <a:blip r:embed="rId13"/>
           <a:stretch/>
         </p:blipFill>
         <p:spPr>
@@ -16983,19 +17672,14 @@
       </p:pic>
     </p:spTree>
   </p:cSld>
-  <mc:AlternateContent>
-    <mc:Choice Requires="p14">
-      <p:transition spd="slow" p14:dur="2000"/>
-    </mc:Choice>
-    <mc:Fallback>
-      <p:transition spd="slow"/>
-    </mc:Fallback>
-  </mc:AlternateContent>
+  <p:clrMapOvr>
+    <a:masterClrMapping/>
+  </p:clrMapOvr>
 </p:sld>
 </file>
 
 <file path=ppt/theme/theme1.xml><?xml version="1.0" encoding="utf-8"?>
-<a:theme xmlns:a="http://schemas.openxmlformats.org/drawingml/2006/main" xmlns:r="http://schemas.openxmlformats.org/officeDocument/2006/relationships" name="Office Theme">
+<a:theme xmlns:a="http://schemas.openxmlformats.org/drawingml/2006/main" name="Office Theme">
   <a:themeElements>
     <a:clrScheme name="Office">
       <a:dk1>
@@ -17037,7 +17721,7 @@
     </a:clrScheme>
     <a:fontScheme name="Office">
       <a:majorFont>
-        <a:latin typeface="Calibri" pitchFamily="0" charset="1"/>
+        <a:latin typeface="Calibri"/>
         <a:ea typeface=""/>
         <a:cs typeface=""/>
         <a:font script="Jpan" typeface="ＭＳ Ｐゴシック"/>
@@ -17071,7 +17755,7 @@
         <a:font script="Uigh" typeface="Microsoft Uighur"/>
       </a:majorFont>
       <a:minorFont>
-        <a:latin typeface="Calibri" pitchFamily="0" charset="1"/>
+        <a:latin typeface="Calibri"/>
         <a:ea typeface=""/>
         <a:cs typeface=""/>
         <a:font script="Jpan" typeface="ＭＳ Ｐゴシック"/>
@@ -17129,7 +17813,7 @@
             </a:gs>
           </a:gsLst>
           <a:lin ang="16200000" scaled="1"/>
-          <a:tileRect l="0" t="0" r="0" b="0"/>
+          <a:tileRect/>
         </a:gradFill>
         <a:gradFill>
           <a:gsLst>
@@ -17147,7 +17831,7 @@
             </a:gs>
           </a:gsLst>
           <a:lin ang="16200000" scaled="0"/>
-          <a:tileRect l="0" t="0" r="0" b="0"/>
+          <a:tileRect/>
         </a:gradFill>
       </a:fillStyleLst>
       <a:lnStyleLst>
@@ -17198,7 +17882,7 @@
           <a:path path="circle">
             <a:fillToRect l="50000" t="-80000" r="50000" b="180000"/>
           </a:path>
-          <a:tileRect l="0" t="0" r="0" b="0"/>
+          <a:tileRect/>
         </a:gradFill>
         <a:gradFill>
           <a:gsLst>
@@ -17216,16 +17900,18 @@
           <a:path path="circle">
             <a:fillToRect l="50000" t="50000" r="50000" b="50000"/>
           </a:path>
-          <a:tileRect l="0" t="0" r="0" b="0"/>
+          <a:tileRect/>
         </a:gradFill>
       </a:bgFillStyleLst>
     </a:fmtScheme>
   </a:themeElements>
+  <a:objectDefaults/>
+  <a:extraClrSchemeLst/>
 </a:theme>
 </file>
 
-<file path=ppt/theme/theme12.xml><?xml version="1.0" encoding="utf-8"?>
-<a:theme xmlns:a="http://schemas.openxmlformats.org/drawingml/2006/main" xmlns:r="http://schemas.openxmlformats.org/officeDocument/2006/relationships" name="Office Theme">
+<file path=ppt/theme/theme2.xml><?xml version="1.0" encoding="utf-8"?>
+<a:theme xmlns:a="http://schemas.openxmlformats.org/drawingml/2006/main" name="Office Theme">
   <a:themeElements>
     <a:clrScheme name="LibreOffice">
       <a:dk1>
@@ -17267,14 +17953,14 @@
     </a:clrScheme>
     <a:fontScheme name="Office">
       <a:majorFont>
-        <a:latin typeface="Arial" pitchFamily="0" charset="1"/>
-        <a:ea typeface="DejaVu Sans" pitchFamily="0" charset="1"/>
-        <a:cs typeface="DejaVu Sans" pitchFamily="0" charset="1"/>
+        <a:latin typeface="Arial"/>
+        <a:ea typeface="DejaVu Sans"/>
+        <a:cs typeface="DejaVu Sans"/>
       </a:majorFont>
       <a:minorFont>
-        <a:latin typeface="Arial" pitchFamily="0" charset="1"/>
-        <a:ea typeface="DejaVu Sans" pitchFamily="0" charset="1"/>
-        <a:cs typeface="DejaVu Sans" pitchFamily="0" charset="1"/>
+        <a:latin typeface="Arial"/>
+        <a:ea typeface="DejaVu Sans"/>
+        <a:cs typeface="DejaVu Sans"/>
       </a:minorFont>
     </a:fontScheme>
     <a:fmtScheme>
@@ -17327,5 +18013,7 @@
       </a:bgFillStyleLst>
     </a:fmtScheme>
   </a:themeElements>
+  <a:objectDefaults/>
+  <a:extraClrSchemeLst/>
 </a:theme>
 </file>